--- a/UniRide_Pitch.pptx
+++ b/UniRide_Pitch.pptx
@@ -14,9 +14,10 @@
     <p:sldId id="262" r:id="rId8"/>
     <p:sldId id="263" r:id="rId9"/>
     <p:sldId id="264" r:id="rId10"/>
+    <p:sldId id="265" r:id="rId11"/>
   </p:sldIdLst>
   <p:notesMasterIdLst>
-    <p:notesMasterId r:id="rId11"/>
+    <p:notesMasterId r:id="rId12"/>
   </p:notesMasterIdLst>
   <p:sldSz cx="9144000" cy="5143500"/>
   <p:notesSz cx="5143500" cy="9144000"/>
@@ -552,6 +553,94 @@
 </p:notes>
 </file>
 
+<file path=ppt/notesSlides/notesSlide10.xml><?xml version="1.0" encoding="utf-8"?>
+<p:notes xmlns:a="http://schemas.openxmlformats.org/drawingml/2006/main" xmlns:r="http://schemas.openxmlformats.org/officeDocument/2006/relationships" xmlns:p="http://schemas.openxmlformats.org/presentationml/2006/main">
+  <p:cSld>
+    <p:spTree>
+      <p:nvGrpSpPr>
+        <p:cNvPr id="1" name=""/>
+        <p:cNvGrpSpPr/>
+        <p:nvPr/>
+      </p:nvGrpSpPr>
+      <p:grpSpPr>
+        <a:xfrm>
+          <a:off x="0" y="0"/>
+          <a:ext cx="0" cy="0"/>
+          <a:chOff x="0" y="0"/>
+          <a:chExt cx="0" cy="0"/>
+        </a:xfrm>
+      </p:grpSpPr>
+      <p:sp>
+        <p:nvSpPr>
+          <p:cNvPr id="2" name="Slide Image Placeholder 1"/>
+          <p:cNvSpPr>
+            <a:spLocks noGrp="1" noRot="1" noChangeAspect="1"/>
+          </p:cNvSpPr>
+          <p:nvPr>
+            <p:ph type="sldImg"/>
+          </p:nvPr>
+        </p:nvSpPr>
+        <p:spPr/>
+      </p:sp>
+      <p:sp>
+        <p:nvSpPr>
+          <p:cNvPr id="3" name="Notes Placeholder 2"/>
+          <p:cNvSpPr>
+            <a:spLocks noGrp="1"/>
+          </p:cNvSpPr>
+          <p:nvPr>
+            <p:ph type="body" idx="1"/>
+          </p:nvPr>
+        </p:nvSpPr>
+        <p:spPr/>
+        <p:txBody>
+          <a:bodyPr/>
+          <a:lstStyle/>
+          <a:p>
+            <a:r>
+              <a:rPr lang="en-US" dirty="0"/>
+              <a:t/>
+            </a:r>
+            <a:endParaRPr lang="en-US" dirty="0"/>
+          </a:p>
+        </p:txBody>
+      </p:sp>
+      <p:sp>
+        <p:nvSpPr>
+          <p:cNvPr id="4" name="Slide Number Placeholder 3"/>
+          <p:cNvSpPr>
+            <a:spLocks noGrp="1"/>
+          </p:cNvSpPr>
+          <p:nvPr>
+            <p:ph type="sldNum" sz="quarter" idx="10"/>
+          </p:nvPr>
+        </p:nvSpPr>
+        <p:spPr/>
+        <p:txBody>
+          <a:bodyPr/>
+          <a:lstStyle/>
+          <a:p>
+            <a:fld id="{F7021451-1387-4CA6-816F-3879F97B5CBC}" type="slidenum">
+              <a:rPr lang="en-US"/>
+              <a:t>10</a:t>
+            </a:fld>
+            <a:endParaRPr lang="en-US"/>
+          </a:p>
+        </p:txBody>
+      </p:sp>
+    </p:spTree>
+    <p:extLst>
+      <p:ext uri="{BB962C8B-B14F-4D97-AF65-F5344CB8AC3E}">
+        <p14:creationId xmlns:p14="http://schemas.microsoft.com/office/powerpoint/2010/main" val="1024086991"/>
+      </p:ext>
+    </p:extLst>
+  </p:cSld>
+  <p:clrMapOvr>
+    <a:masterClrMapping/>
+  </p:clrMapOvr>
+</p:notes>
+</file>
+
 <file path=ppt/notesSlides/notesSlide2.xml><?xml version="1.0" encoding="utf-8"?>
 <p:notes xmlns:a="http://schemas.openxmlformats.org/drawingml/2006/main" xmlns:r="http://schemas.openxmlformats.org/officeDocument/2006/relationships" xmlns:p="http://schemas.openxmlformats.org/presentationml/2006/main">
   <p:cSld>
@@ -1790,6 +1879,394 @@
 </p:sld>
 </file>
 
+<file path=ppt/slides/slide10.xml><?xml version="1.0" encoding="utf-8"?>
+<p:sld xmlns:a="http://schemas.openxmlformats.org/drawingml/2006/main" xmlns:r="http://schemas.openxmlformats.org/officeDocument/2006/relationships" xmlns:p="http://schemas.openxmlformats.org/presentationml/2006/main">
+  <p:cSld name="Slide 10">
+    <p:bg>
+      <p:bgPr>
+        <a:solidFill>
+          <a:srgbClr val="07070F"/>
+        </a:solidFill>
+      </p:bgPr>
+    </p:bg>
+    <p:spTree>
+      <p:nvGrpSpPr>
+        <p:cNvPr id="1" name=""/>
+        <p:cNvGrpSpPr/>
+        <p:nvPr/>
+      </p:nvGrpSpPr>
+      <p:grpSpPr>
+        <a:xfrm>
+          <a:off x="0" y="0"/>
+          <a:ext cx="0" cy="0"/>
+          <a:chOff x="0" y="0"/>
+          <a:chExt cx="0" cy="0"/>
+        </a:xfrm>
+      </p:grpSpPr>
+      <p:sp>
+        <p:nvSpPr>
+          <p:cNvPr id="2" name="Shape 0"/>
+          <p:cNvSpPr/>
+          <p:nvPr/>
+        </p:nvSpPr>
+        <p:spPr>
+          <a:xfrm>
+            <a:off x="5029200" y="457200"/>
+            <a:ext cx="4572000" cy="4572000"/>
+          </a:xfrm>
+          <a:prstGeom prst="ellipse">
+            <a:avLst/>
+          </a:prstGeom>
+          <a:solidFill>
+            <a:srgbClr val="FBBF24">
+              <a:alpha val="7000"/>
+            </a:srgbClr>
+          </a:solidFill>
+          <a:ln w="12700">
+            <a:solidFill>
+              <a:srgbClr val="FBBF24">
+                <a:alpha val="7000"/>
+              </a:srgbClr>
+            </a:solidFill>
+            <a:prstDash val="solid"/>
+          </a:ln>
+        </p:spPr>
+      </p:sp>
+      <p:sp>
+        <p:nvSpPr>
+          <p:cNvPr id="3" name="Text 1"/>
+          <p:cNvSpPr/>
+          <p:nvPr/>
+        </p:nvSpPr>
+        <p:spPr>
+          <a:xfrm>
+            <a:off x="914400" y="1188720"/>
+            <a:ext cx="7315200" cy="914400"/>
+          </a:xfrm>
+          <a:prstGeom prst="rect">
+            <a:avLst/>
+          </a:prstGeom>
+          <a:noFill/>
+          <a:ln/>
+        </p:spPr>
+        <p:txBody>
+          <a:bodyPr wrap="square" lIns="0" tIns="0" rIns="0" bIns="0" rtlCol="0" anchor="ctr"/>
+          <a:lstStyle/>
+          <a:p>
+            <a:pPr algn="ctr" indent="0" marL="0">
+              <a:buNone/>
+            </a:pPr>
+            <a:r>
+              <a:rPr lang="en-US" sz="5600" b="1" dirty="0">
+                <a:solidFill>
+                  <a:srgbClr val="FFFFFF"/>
+                </a:solidFill>
+                <a:latin typeface="Calibri" pitchFamily="34" charset="0"/>
+                <a:ea typeface="Calibri" pitchFamily="34" charset="-122"/>
+                <a:cs typeface="Calibri" pitchFamily="34" charset="-120"/>
+              </a:rPr>
+              <a:t>More than just a ride.</a:t>
+            </a:r>
+            <a:endParaRPr lang="en-US" sz="5600" dirty="0"/>
+          </a:p>
+        </p:txBody>
+      </p:sp>
+      <p:sp>
+        <p:nvSpPr>
+          <p:cNvPr id="4" name="Text 2"/>
+          <p:cNvSpPr/>
+          <p:nvPr/>
+        </p:nvSpPr>
+        <p:spPr>
+          <a:xfrm>
+            <a:off x="914400" y="2194560"/>
+            <a:ext cx="7315200" cy="365760"/>
+          </a:xfrm>
+          <a:prstGeom prst="rect">
+            <a:avLst/>
+          </a:prstGeom>
+          <a:noFill/>
+          <a:ln/>
+        </p:spPr>
+        <p:txBody>
+          <a:bodyPr wrap="square" lIns="0" tIns="0" rIns="0" bIns="0" rtlCol="0" anchor="ctr"/>
+          <a:lstStyle/>
+          <a:p>
+            <a:pPr algn="ctr" indent="0" marL="0">
+              <a:buNone/>
+            </a:pPr>
+            <a:r>
+              <a:rPr lang="en-US" sz="1600" dirty="0">
+                <a:solidFill>
+                  <a:srgbClr val="9CA3AF"/>
+                </a:solidFill>
+                <a:latin typeface="Calibri" pitchFamily="34" charset="0"/>
+                <a:ea typeface="Calibri" pitchFamily="34" charset="-122"/>
+                <a:cs typeface="Calibri" pitchFamily="34" charset="-120"/>
+              </a:rPr>
+              <a:t>UniRide connects your campus beyond the commute.</a:t>
+            </a:r>
+            <a:endParaRPr lang="en-US" sz="1600" dirty="0"/>
+          </a:p>
+        </p:txBody>
+      </p:sp>
+      <p:sp>
+        <p:nvSpPr>
+          <p:cNvPr id="5" name="Shape 3"/>
+          <p:cNvSpPr/>
+          <p:nvPr/>
+        </p:nvSpPr>
+        <p:spPr>
+          <a:xfrm>
+            <a:off x="1737360" y="2971800"/>
+            <a:ext cx="475488" cy="475488"/>
+          </a:xfrm>
+          <a:prstGeom prst="ellipse">
+            <a:avLst/>
+          </a:prstGeom>
+          <a:solidFill>
+            <a:srgbClr val="1A1600"/>
+          </a:solidFill>
+          <a:ln/>
+        </p:spPr>
+      </p:sp>
+      <p:pic>
+        <p:nvPicPr>
+          <p:cNvPr id="6" name="Image 0" descr="preencoded.png">    </p:cNvPr>
+          <p:cNvPicPr>
+            <a:picLocks noChangeAspect="1"/>
+          </p:cNvPicPr>
+          <p:nvPr/>
+        </p:nvPicPr>
+        <p:blipFill>
+          <a:blip r:embed="rId1"/>
+          <a:stretch>
+            <a:fillRect/>
+          </a:stretch>
+        </p:blipFill>
+        <p:spPr>
+          <a:xfrm>
+            <a:off x="1847088" y="3081528"/>
+            <a:ext cx="256032" cy="256032"/>
+          </a:xfrm>
+          <a:prstGeom prst="rect">
+            <a:avLst/>
+          </a:prstGeom>
+        </p:spPr>
+      </p:pic>
+      <p:sp>
+        <p:nvSpPr>
+          <p:cNvPr id="7" name="Text 4"/>
+          <p:cNvSpPr/>
+          <p:nvPr/>
+        </p:nvSpPr>
+        <p:spPr>
+          <a:xfrm>
+            <a:off x="914400" y="3566160"/>
+            <a:ext cx="2286000" cy="329184"/>
+          </a:xfrm>
+          <a:prstGeom prst="rect">
+            <a:avLst/>
+          </a:prstGeom>
+          <a:noFill/>
+          <a:ln/>
+        </p:spPr>
+        <p:txBody>
+          <a:bodyPr wrap="square" lIns="0" tIns="0" rIns="0" bIns="0" rtlCol="0" anchor="ctr"/>
+          <a:lstStyle/>
+          <a:p>
+            <a:pPr algn="ctr" indent="0" marL="0">
+              <a:buNone/>
+            </a:pPr>
+            <a:r>
+              <a:rPr lang="en-US" sz="1300" b="1" dirty="0">
+                <a:solidFill>
+                  <a:srgbClr val="FFFFFF"/>
+                </a:solidFill>
+                <a:latin typeface="Calibri" pitchFamily="34" charset="0"/>
+                <a:ea typeface="Calibri" pitchFamily="34" charset="-122"/>
+                <a:cs typeface="Calibri" pitchFamily="34" charset="-120"/>
+              </a:rPr>
+              <a:t>Campus Community</a:t>
+            </a:r>
+            <a:endParaRPr lang="en-US" sz="1300" dirty="0"/>
+          </a:p>
+        </p:txBody>
+      </p:sp>
+      <p:sp>
+        <p:nvSpPr>
+          <p:cNvPr id="8" name="Shape 5"/>
+          <p:cNvSpPr/>
+          <p:nvPr/>
+        </p:nvSpPr>
+        <p:spPr>
+          <a:xfrm>
+            <a:off x="4343400" y="2971800"/>
+            <a:ext cx="475488" cy="475488"/>
+          </a:xfrm>
+          <a:prstGeom prst="ellipse">
+            <a:avLst/>
+          </a:prstGeom>
+          <a:solidFill>
+            <a:srgbClr val="1A1600"/>
+          </a:solidFill>
+          <a:ln/>
+        </p:spPr>
+      </p:sp>
+      <p:pic>
+        <p:nvPicPr>
+          <p:cNvPr id="9" name="Image 1" descr="preencoded.png">    </p:cNvPr>
+          <p:cNvPicPr>
+            <a:picLocks noChangeAspect="1"/>
+          </p:cNvPicPr>
+          <p:nvPr/>
+        </p:nvPicPr>
+        <p:blipFill>
+          <a:blip r:embed="rId2"/>
+          <a:stretch>
+            <a:fillRect/>
+          </a:stretch>
+        </p:blipFill>
+        <p:spPr>
+          <a:xfrm>
+            <a:off x="4453128" y="3081528"/>
+            <a:ext cx="256032" cy="256032"/>
+          </a:xfrm>
+          <a:prstGeom prst="rect">
+            <a:avLst/>
+          </a:prstGeom>
+        </p:spPr>
+      </p:pic>
+      <p:sp>
+        <p:nvSpPr>
+          <p:cNvPr id="10" name="Text 6"/>
+          <p:cNvSpPr/>
+          <p:nvPr/>
+        </p:nvSpPr>
+        <p:spPr>
+          <a:xfrm>
+            <a:off x="3520440" y="3566160"/>
+            <a:ext cx="2286000" cy="329184"/>
+          </a:xfrm>
+          <a:prstGeom prst="rect">
+            <a:avLst/>
+          </a:prstGeom>
+          <a:noFill/>
+          <a:ln/>
+        </p:spPr>
+        <p:txBody>
+          <a:bodyPr wrap="square" lIns="0" tIns="0" rIns="0" bIns="0" rtlCol="0" anchor="ctr"/>
+          <a:lstStyle/>
+          <a:p>
+            <a:pPr algn="ctr" indent="0" marL="0">
+              <a:buNone/>
+            </a:pPr>
+            <a:r>
+              <a:rPr lang="en-US" sz="1300" b="1" dirty="0">
+                <a:solidFill>
+                  <a:srgbClr val="FFFFFF"/>
+                </a:solidFill>
+                <a:latin typeface="Calibri" pitchFamily="34" charset="0"/>
+                <a:ea typeface="Calibri" pitchFamily="34" charset="-122"/>
+                <a:cs typeface="Calibri" pitchFamily="34" charset="-120"/>
+              </a:rPr>
+              <a:t>Ride History &amp; Ratings</a:t>
+            </a:r>
+            <a:endParaRPr lang="en-US" sz="1300" dirty="0"/>
+          </a:p>
+        </p:txBody>
+      </p:sp>
+      <p:sp>
+        <p:nvSpPr>
+          <p:cNvPr id="11" name="Shape 7"/>
+          <p:cNvSpPr/>
+          <p:nvPr/>
+        </p:nvSpPr>
+        <p:spPr>
+          <a:xfrm>
+            <a:off x="6949440" y="2971800"/>
+            <a:ext cx="475488" cy="475488"/>
+          </a:xfrm>
+          <a:prstGeom prst="ellipse">
+            <a:avLst/>
+          </a:prstGeom>
+          <a:solidFill>
+            <a:srgbClr val="1A1600"/>
+          </a:solidFill>
+          <a:ln/>
+        </p:spPr>
+      </p:sp>
+      <p:pic>
+        <p:nvPicPr>
+          <p:cNvPr id="12" name="Image 2" descr="preencoded.png">    </p:cNvPr>
+          <p:cNvPicPr>
+            <a:picLocks noChangeAspect="1"/>
+          </p:cNvPicPr>
+          <p:nvPr/>
+        </p:nvPicPr>
+        <p:blipFill>
+          <a:blip r:embed="rId3"/>
+          <a:stretch>
+            <a:fillRect/>
+          </a:stretch>
+        </p:blipFill>
+        <p:spPr>
+          <a:xfrm>
+            <a:off x="7059168" y="3081528"/>
+            <a:ext cx="256032" cy="256032"/>
+          </a:xfrm>
+          <a:prstGeom prst="rect">
+            <a:avLst/>
+          </a:prstGeom>
+        </p:spPr>
+      </p:pic>
+      <p:sp>
+        <p:nvSpPr>
+          <p:cNvPr id="13" name="Text 8"/>
+          <p:cNvSpPr/>
+          <p:nvPr/>
+        </p:nvSpPr>
+        <p:spPr>
+          <a:xfrm>
+            <a:off x="6126480" y="3566160"/>
+            <a:ext cx="2286000" cy="329184"/>
+          </a:xfrm>
+          <a:prstGeom prst="rect">
+            <a:avLst/>
+          </a:prstGeom>
+          <a:noFill/>
+          <a:ln/>
+        </p:spPr>
+        <p:txBody>
+          <a:bodyPr wrap="square" lIns="0" tIns="0" rIns="0" bIns="0" rtlCol="0" anchor="ctr"/>
+          <a:lstStyle/>
+          <a:p>
+            <a:pPr algn="ctr" indent="0" marL="0">
+              <a:buNone/>
+            </a:pPr>
+            <a:r>
+              <a:rPr lang="en-US" sz="1300" b="1" dirty="0">
+                <a:solidFill>
+                  <a:srgbClr val="FFFFFF"/>
+                </a:solidFill>
+                <a:latin typeface="Calibri" pitchFamily="34" charset="0"/>
+                <a:ea typeface="Calibri" pitchFamily="34" charset="-122"/>
+                <a:cs typeface="Calibri" pitchFamily="34" charset="-120"/>
+              </a:rPr>
+              <a:t>Events &amp; Announcements</a:t>
+            </a:r>
+            <a:endParaRPr lang="en-US" sz="1300" dirty="0"/>
+          </a:p>
+        </p:txBody>
+      </p:sp>
+    </p:spTree>
+  </p:cSld>
+  <p:clrMapOvr>
+    <a:masterClrMapping/>
+  </p:clrMapOvr>
+</p:sld>
+</file>
+
 <file path=ppt/slides/slide2.xml><?xml version="1.0" encoding="utf-8"?>
 <p:sld xmlns:a="http://schemas.openxmlformats.org/drawingml/2006/main" xmlns:r="http://schemas.openxmlformats.org/officeDocument/2006/relationships" xmlns:p="http://schemas.openxmlformats.org/presentationml/2006/main">
   <p:cSld name="Slide 2">
@@ -3546,8 +4023,8 @@
         </p:nvSpPr>
         <p:spPr>
           <a:xfrm>
-            <a:off x="457200" y="164592"/>
-            <a:ext cx="8229600" cy="530352"/>
+            <a:off x="457200" y="182880"/>
+            <a:ext cx="4572000" cy="530352"/>
           </a:xfrm>
           <a:prstGeom prst="rect">
             <a:avLst/>
@@ -3571,7 +4048,7 @@
                 <a:ea typeface="Calibri" pitchFamily="34" charset="-122"/>
                 <a:cs typeface="Calibri" pitchFamily="34" charset="-120"/>
               </a:rPr>
-              <a:t>No one is solving this for students.</a:t>
+              <a:t>A market built to scale.</a:t>
             </a:r>
             <a:endParaRPr lang="en-US" sz="3200" dirty="0"/>
           </a:p>
@@ -3585,8 +4062,8 @@
         </p:nvSpPr>
         <p:spPr>
           <a:xfrm>
-            <a:off x="457200" y="713232"/>
-            <a:ext cx="8229600" cy="274320"/>
+            <a:off x="457200" y="749808"/>
+            <a:ext cx="4389120" cy="384048"/>
           </a:xfrm>
           <a:prstGeom prst="rect">
             <a:avLst/>
@@ -3602,7 +4079,7 @@
               <a:buNone/>
             </a:pPr>
             <a:r>
-              <a:rPr lang="en-US" sz="1300" dirty="0">
+              <a:rPr lang="en-US" sz="1200" dirty="0">
                 <a:solidFill>
                   <a:srgbClr val="9CA3AF"/>
                 </a:solidFill>
@@ -3610,9 +4087,9 @@
                 <a:ea typeface="Calibri" pitchFamily="34" charset="-122"/>
                 <a:cs typeface="Calibri" pitchFamily="34" charset="-120"/>
               </a:rPr>
-              <a:t>Existing apps miss the campus commuter entirely.</a:t>
-            </a:r>
-            <a:endParaRPr lang="en-US" sz="1300" dirty="0"/>
+              <a:t>Starting campus-native, expanding across India's 1,000+ universities.</a:t>
+            </a:r>
+            <a:endParaRPr lang="en-US" sz="1200" dirty="0"/>
           </a:p>
         </p:txBody>
       </p:sp>
@@ -3624,8 +4101,8 @@
         </p:nvSpPr>
         <p:spPr>
           <a:xfrm>
-            <a:off x="365760" y="1143000"/>
-            <a:ext cx="4069080" cy="1417320"/>
+            <a:off x="365760" y="1325880"/>
+            <a:ext cx="4389120" cy="1051560"/>
           </a:xfrm>
           <a:prstGeom prst="rect">
             <a:avLst/>
@@ -3651,14 +4128,14 @@
         </p:nvSpPr>
         <p:spPr>
           <a:xfrm>
-            <a:off x="365760" y="1143000"/>
-            <a:ext cx="4069080" cy="45720"/>
-          </a:xfrm>
-          <a:prstGeom prst="rect">
-            <a:avLst/>
-          </a:prstGeom>
-          <a:solidFill>
-            <a:srgbClr val="F87171"/>
+            <a:off x="365760" y="1325880"/>
+            <a:ext cx="54864" cy="1051560"/>
+          </a:xfrm>
+          <a:prstGeom prst="rect">
+            <a:avLst/>
+          </a:prstGeom>
+          <a:solidFill>
+            <a:srgbClr val="6366F1"/>
           </a:solidFill>
           <a:ln/>
         </p:spPr>
@@ -3671,52 +4148,28 @@
         </p:nvSpPr>
         <p:spPr>
           <a:xfrm>
-            <a:off x="548640" y="1613916"/>
-            <a:ext cx="475488" cy="475488"/>
-          </a:xfrm>
-          <a:prstGeom prst="ellipse">
-            <a:avLst/>
-          </a:prstGeom>
-          <a:solidFill>
-            <a:srgbClr val="1A1A38"/>
-          </a:solidFill>
-          <a:ln/>
-        </p:spPr>
-      </p:sp>
-      <p:pic>
-        <p:nvPicPr>
-          <p:cNvPr id="7" name="Image 0" descr="preencoded.png">    </p:cNvPr>
-          <p:cNvPicPr>
-            <a:picLocks noChangeAspect="1"/>
-          </p:cNvPicPr>
-          <p:nvPr/>
-        </p:nvPicPr>
-        <p:blipFill>
-          <a:blip r:embed="rId1"/>
-          <a:stretch>
-            <a:fillRect/>
-          </a:stretch>
-        </p:blipFill>
-        <p:spPr>
-          <a:xfrm>
-            <a:off x="658368" y="1723644"/>
-            <a:ext cx="256032" cy="256032"/>
-          </a:xfrm>
-          <a:prstGeom prst="rect">
-            <a:avLst/>
-          </a:prstGeom>
-        </p:spPr>
-      </p:pic>
-      <p:sp>
-        <p:nvSpPr>
-          <p:cNvPr id="8" name="Text 5"/>
-          <p:cNvSpPr/>
-          <p:nvPr/>
-        </p:nvSpPr>
-        <p:spPr>
-          <a:xfrm>
-            <a:off x="1170432" y="1650492"/>
-            <a:ext cx="3099816" cy="402336"/>
+            <a:off x="566928" y="1481328"/>
+            <a:ext cx="621792" cy="256032"/>
+          </a:xfrm>
+          <a:prstGeom prst="rect">
+            <a:avLst/>
+          </a:prstGeom>
+          <a:solidFill>
+            <a:srgbClr val="6366F1"/>
+          </a:solidFill>
+          <a:ln/>
+        </p:spPr>
+      </p:sp>
+      <p:sp>
+        <p:nvSpPr>
+          <p:cNvPr id="7" name="Text 5"/>
+          <p:cNvSpPr/>
+          <p:nvPr/>
+        </p:nvSpPr>
+        <p:spPr>
+          <a:xfrm>
+            <a:off x="566928" y="1481328"/>
+            <a:ext cx="621792" cy="256032"/>
           </a:xfrm>
           <a:prstGeom prst="rect">
             <a:avLst/>
@@ -3728,11 +4181,50 @@
           <a:bodyPr wrap="square" lIns="0" tIns="0" rIns="0" bIns="0" rtlCol="0" anchor="ctr"/>
           <a:lstStyle/>
           <a:p>
+            <a:pPr algn="ctr" indent="0" marL="0">
+              <a:buNone/>
+            </a:pPr>
+            <a:r>
+              <a:rPr lang="en-US" sz="1100" b="1" dirty="0">
+                <a:solidFill>
+                  <a:srgbClr val="07070F"/>
+                </a:solidFill>
+                <a:latin typeface="Calibri" pitchFamily="34" charset="0"/>
+                <a:ea typeface="Calibri" pitchFamily="34" charset="-122"/>
+                <a:cs typeface="Calibri" pitchFamily="34" charset="-120"/>
+              </a:rPr>
+              <a:t>TAM</a:t>
+            </a:r>
+            <a:endParaRPr lang="en-US" sz="1100" dirty="0"/>
+          </a:p>
+        </p:txBody>
+      </p:sp>
+      <p:sp>
+        <p:nvSpPr>
+          <p:cNvPr id="8" name="Text 6"/>
+          <p:cNvSpPr/>
+          <p:nvPr/>
+        </p:nvSpPr>
+        <p:spPr>
+          <a:xfrm>
+            <a:off x="1316736" y="1417320"/>
+            <a:ext cx="3291840" cy="457200"/>
+          </a:xfrm>
+          <a:prstGeom prst="rect">
+            <a:avLst/>
+          </a:prstGeom>
+          <a:noFill/>
+          <a:ln/>
+        </p:spPr>
+        <p:txBody>
+          <a:bodyPr wrap="square" lIns="0" tIns="0" rIns="0" bIns="0" rtlCol="0" anchor="ctr"/>
+          <a:lstStyle/>
+          <a:p>
             <a:pPr algn="l" indent="0" marL="0">
               <a:buNone/>
             </a:pPr>
             <a:r>
-              <a:rPr lang="en-US" sz="1700" b="1" dirty="0">
+              <a:rPr lang="en-US" sz="2800" b="1" dirty="0">
                 <a:solidFill>
                   <a:srgbClr val="FFFFFF"/>
                 </a:solidFill>
@@ -3740,22 +4232,61 @@
                 <a:ea typeface="Calibri" pitchFamily="34" charset="-122"/>
                 <a:cs typeface="Calibri" pitchFamily="34" charset="-120"/>
               </a:rPr>
-              <a:t>No Campus Trust Layer</a:t>
-            </a:r>
-            <a:endParaRPr lang="en-US" sz="1700" dirty="0"/>
-          </a:p>
-        </p:txBody>
-      </p:sp>
-      <p:sp>
-        <p:nvSpPr>
-          <p:cNvPr id="9" name="Shape 6"/>
-          <p:cNvSpPr/>
-          <p:nvPr/>
-        </p:nvSpPr>
-        <p:spPr>
-          <a:xfrm>
-            <a:off x="4709160" y="1143000"/>
-            <a:ext cx="4069080" cy="1417320"/>
+              <a:t>₹1.2L Cr</a:t>
+            </a:r>
+            <a:endParaRPr lang="en-US" sz="2800" dirty="0"/>
+          </a:p>
+        </p:txBody>
+      </p:sp>
+      <p:sp>
+        <p:nvSpPr>
+          <p:cNvPr id="9" name="Text 7"/>
+          <p:cNvSpPr/>
+          <p:nvPr/>
+        </p:nvSpPr>
+        <p:spPr>
+          <a:xfrm>
+            <a:off x="1316736" y="1920240"/>
+            <a:ext cx="3291840" cy="274320"/>
+          </a:xfrm>
+          <a:prstGeom prst="rect">
+            <a:avLst/>
+          </a:prstGeom>
+          <a:noFill/>
+          <a:ln/>
+        </p:spPr>
+        <p:txBody>
+          <a:bodyPr wrap="square" lIns="0" tIns="0" rIns="0" bIns="0" rtlCol="0" anchor="ctr"/>
+          <a:lstStyle/>
+          <a:p>
+            <a:pPr algn="l" indent="0" marL="0">
+              <a:buNone/>
+            </a:pPr>
+            <a:r>
+              <a:rPr lang="en-US" sz="1100" dirty="0">
+                <a:solidFill>
+                  <a:srgbClr val="6B7280"/>
+                </a:solidFill>
+                <a:latin typeface="Calibri" pitchFamily="34" charset="0"/>
+                <a:ea typeface="Calibri" pitchFamily="34" charset="-122"/>
+                <a:cs typeface="Calibri" pitchFamily="34" charset="-120"/>
+              </a:rPr>
+              <a:t>40M+ students × ₹2,500/mo</a:t>
+            </a:r>
+            <a:endParaRPr lang="en-US" sz="1100" dirty="0"/>
+          </a:p>
+        </p:txBody>
+      </p:sp>
+      <p:sp>
+        <p:nvSpPr>
+          <p:cNvPr id="10" name="Shape 8"/>
+          <p:cNvSpPr/>
+          <p:nvPr/>
+        </p:nvSpPr>
+        <p:spPr>
+          <a:xfrm>
+            <a:off x="365760" y="2560320"/>
+            <a:ext cx="4389120" cy="1051560"/>
           </a:xfrm>
           <a:prstGeom prst="rect">
             <a:avLst/>
@@ -3775,78 +4306,54 @@
       </p:sp>
       <p:sp>
         <p:nvSpPr>
-          <p:cNvPr id="10" name="Shape 7"/>
-          <p:cNvSpPr/>
-          <p:nvPr/>
-        </p:nvSpPr>
-        <p:spPr>
-          <a:xfrm>
-            <a:off x="4709160" y="1143000"/>
-            <a:ext cx="4069080" cy="45720"/>
-          </a:xfrm>
-          <a:prstGeom prst="rect">
-            <a:avLst/>
-          </a:prstGeom>
-          <a:solidFill>
-            <a:srgbClr val="FBBF24"/>
-          </a:solidFill>
-          <a:ln/>
-        </p:spPr>
-      </p:sp>
-      <p:sp>
-        <p:nvSpPr>
-          <p:cNvPr id="11" name="Shape 8"/>
-          <p:cNvSpPr/>
-          <p:nvPr/>
-        </p:nvSpPr>
-        <p:spPr>
-          <a:xfrm>
-            <a:off x="4892040" y="1613916"/>
-            <a:ext cx="475488" cy="475488"/>
-          </a:xfrm>
-          <a:prstGeom prst="ellipse">
-            <a:avLst/>
-          </a:prstGeom>
-          <a:solidFill>
-            <a:srgbClr val="1A1A38"/>
-          </a:solidFill>
-          <a:ln/>
-        </p:spPr>
-      </p:sp>
-      <p:pic>
-        <p:nvPicPr>
-          <p:cNvPr id="12" name="Image 1" descr="preencoded.png">    </p:cNvPr>
-          <p:cNvPicPr>
-            <a:picLocks noChangeAspect="1"/>
-          </p:cNvPicPr>
-          <p:nvPr/>
-        </p:nvPicPr>
-        <p:blipFill>
-          <a:blip r:embed="rId2"/>
-          <a:stretch>
-            <a:fillRect/>
-          </a:stretch>
-        </p:blipFill>
-        <p:spPr>
-          <a:xfrm>
-            <a:off x="5001768" y="1723644"/>
-            <a:ext cx="256032" cy="256032"/>
-          </a:xfrm>
-          <a:prstGeom prst="rect">
-            <a:avLst/>
-          </a:prstGeom>
-        </p:spPr>
-      </p:pic>
-      <p:sp>
-        <p:nvSpPr>
-          <p:cNvPr id="13" name="Text 9"/>
-          <p:cNvSpPr/>
-          <p:nvPr/>
-        </p:nvSpPr>
-        <p:spPr>
-          <a:xfrm>
-            <a:off x="5513832" y="1650492"/>
-            <a:ext cx="3099816" cy="402336"/>
+          <p:cNvPr id="11" name="Shape 9"/>
+          <p:cNvSpPr/>
+          <p:nvPr/>
+        </p:nvSpPr>
+        <p:spPr>
+          <a:xfrm>
+            <a:off x="365760" y="2560320"/>
+            <a:ext cx="54864" cy="1051560"/>
+          </a:xfrm>
+          <a:prstGeom prst="rect">
+            <a:avLst/>
+          </a:prstGeom>
+          <a:solidFill>
+            <a:srgbClr val="10B981"/>
+          </a:solidFill>
+          <a:ln/>
+        </p:spPr>
+      </p:sp>
+      <p:sp>
+        <p:nvSpPr>
+          <p:cNvPr id="12" name="Shape 10"/>
+          <p:cNvSpPr/>
+          <p:nvPr/>
+        </p:nvSpPr>
+        <p:spPr>
+          <a:xfrm>
+            <a:off x="566928" y="2715768"/>
+            <a:ext cx="621792" cy="256032"/>
+          </a:xfrm>
+          <a:prstGeom prst="rect">
+            <a:avLst/>
+          </a:prstGeom>
+          <a:solidFill>
+            <a:srgbClr val="10B981"/>
+          </a:solidFill>
+          <a:ln/>
+        </p:spPr>
+      </p:sp>
+      <p:sp>
+        <p:nvSpPr>
+          <p:cNvPr id="13" name="Text 11"/>
+          <p:cNvSpPr/>
+          <p:nvPr/>
+        </p:nvSpPr>
+        <p:spPr>
+          <a:xfrm>
+            <a:off x="566928" y="2715768"/>
+            <a:ext cx="621792" cy="256032"/>
           </a:xfrm>
           <a:prstGeom prst="rect">
             <a:avLst/>
@@ -3858,11 +4365,50 @@
           <a:bodyPr wrap="square" lIns="0" tIns="0" rIns="0" bIns="0" rtlCol="0" anchor="ctr"/>
           <a:lstStyle/>
           <a:p>
+            <a:pPr algn="ctr" indent="0" marL="0">
+              <a:buNone/>
+            </a:pPr>
+            <a:r>
+              <a:rPr lang="en-US" sz="1100" b="1" dirty="0">
+                <a:solidFill>
+                  <a:srgbClr val="07070F"/>
+                </a:solidFill>
+                <a:latin typeface="Calibri" pitchFamily="34" charset="0"/>
+                <a:ea typeface="Calibri" pitchFamily="34" charset="-122"/>
+                <a:cs typeface="Calibri" pitchFamily="34" charset="-120"/>
+              </a:rPr>
+              <a:t>SAM</a:t>
+            </a:r>
+            <a:endParaRPr lang="en-US" sz="1100" dirty="0"/>
+          </a:p>
+        </p:txBody>
+      </p:sp>
+      <p:sp>
+        <p:nvSpPr>
+          <p:cNvPr id="14" name="Text 12"/>
+          <p:cNvSpPr/>
+          <p:nvPr/>
+        </p:nvSpPr>
+        <p:spPr>
+          <a:xfrm>
+            <a:off x="1316736" y="2651760"/>
+            <a:ext cx="3291840" cy="457200"/>
+          </a:xfrm>
+          <a:prstGeom prst="rect">
+            <a:avLst/>
+          </a:prstGeom>
+          <a:noFill/>
+          <a:ln/>
+        </p:spPr>
+        <p:txBody>
+          <a:bodyPr wrap="square" lIns="0" tIns="0" rIns="0" bIns="0" rtlCol="0" anchor="ctr"/>
+          <a:lstStyle/>
+          <a:p>
             <a:pPr algn="l" indent="0" marL="0">
               <a:buNone/>
             </a:pPr>
             <a:r>
-              <a:rPr lang="en-US" sz="1700" b="1" dirty="0">
+              <a:rPr lang="en-US" sz="2800" b="1" dirty="0">
                 <a:solidFill>
                   <a:srgbClr val="FFFFFF"/>
                 </a:solidFill>
@@ -3870,22 +4416,61 @@
                 <a:ea typeface="Calibri" pitchFamily="34" charset="-122"/>
                 <a:cs typeface="Calibri" pitchFamily="34" charset="-120"/>
               </a:rPr>
-              <a:t>No Student-First Pricing</a:t>
-            </a:r>
-            <a:endParaRPr lang="en-US" sz="1700" dirty="0"/>
-          </a:p>
-        </p:txBody>
-      </p:sp>
-      <p:sp>
-        <p:nvSpPr>
-          <p:cNvPr id="14" name="Shape 10"/>
-          <p:cNvSpPr/>
-          <p:nvPr/>
-        </p:nvSpPr>
-        <p:spPr>
-          <a:xfrm>
-            <a:off x="365760" y="2788920"/>
-            <a:ext cx="4069080" cy="1417320"/>
+              <a:t>₹15,000 Cr</a:t>
+            </a:r>
+            <a:endParaRPr lang="en-US" sz="2800" dirty="0"/>
+          </a:p>
+        </p:txBody>
+      </p:sp>
+      <p:sp>
+        <p:nvSpPr>
+          <p:cNvPr id="15" name="Text 13"/>
+          <p:cNvSpPr/>
+          <p:nvPr/>
+        </p:nvSpPr>
+        <p:spPr>
+          <a:xfrm>
+            <a:off x="1316736" y="3154680"/>
+            <a:ext cx="3291840" cy="274320"/>
+          </a:xfrm>
+          <a:prstGeom prst="rect">
+            <a:avLst/>
+          </a:prstGeom>
+          <a:noFill/>
+          <a:ln/>
+        </p:spPr>
+        <p:txBody>
+          <a:bodyPr wrap="square" lIns="0" tIns="0" rIns="0" bIns="0" rtlCol="0" anchor="ctr"/>
+          <a:lstStyle/>
+          <a:p>
+            <a:pPr algn="l" indent="0" marL="0">
+              <a:buNone/>
+            </a:pPr>
+            <a:r>
+              <a:rPr lang="en-US" sz="1100" dirty="0">
+                <a:solidFill>
+                  <a:srgbClr val="6B7280"/>
+                </a:solidFill>
+                <a:latin typeface="Calibri" pitchFamily="34" charset="0"/>
+                <a:ea typeface="Calibri" pitchFamily="34" charset="-122"/>
+                <a:cs typeface="Calibri" pitchFamily="34" charset="-120"/>
+              </a:rPr>
+              <a:t>10M urban day scholars, Tier 1 &amp; 2</a:t>
+            </a:r>
+            <a:endParaRPr lang="en-US" sz="1100" dirty="0"/>
+          </a:p>
+        </p:txBody>
+      </p:sp>
+      <p:sp>
+        <p:nvSpPr>
+          <p:cNvPr id="16" name="Shape 14"/>
+          <p:cNvSpPr/>
+          <p:nvPr/>
+        </p:nvSpPr>
+        <p:spPr>
+          <a:xfrm>
+            <a:off x="365760" y="3794760"/>
+            <a:ext cx="4389120" cy="1051560"/>
           </a:xfrm>
           <a:prstGeom prst="rect">
             <a:avLst/>
@@ -3905,78 +4490,200 @@
       </p:sp>
       <p:sp>
         <p:nvSpPr>
-          <p:cNvPr id="15" name="Shape 11"/>
-          <p:cNvSpPr/>
-          <p:nvPr/>
-        </p:nvSpPr>
-        <p:spPr>
-          <a:xfrm>
-            <a:off x="365760" y="2788920"/>
-            <a:ext cx="4069080" cy="45720"/>
-          </a:xfrm>
-          <a:prstGeom prst="rect">
-            <a:avLst/>
-          </a:prstGeom>
-          <a:solidFill>
-            <a:srgbClr val="10B981"/>
-          </a:solidFill>
-          <a:ln/>
-        </p:spPr>
-      </p:sp>
-      <p:sp>
-        <p:nvSpPr>
-          <p:cNvPr id="16" name="Shape 12"/>
-          <p:cNvSpPr/>
-          <p:nvPr/>
-        </p:nvSpPr>
-        <p:spPr>
-          <a:xfrm>
-            <a:off x="548640" y="3259836"/>
-            <a:ext cx="475488" cy="475488"/>
+          <p:cNvPr id="17" name="Shape 15"/>
+          <p:cNvSpPr/>
+          <p:nvPr/>
+        </p:nvSpPr>
+        <p:spPr>
+          <a:xfrm>
+            <a:off x="365760" y="3794760"/>
+            <a:ext cx="54864" cy="1051560"/>
+          </a:xfrm>
+          <a:prstGeom prst="rect">
+            <a:avLst/>
+          </a:prstGeom>
+          <a:solidFill>
+            <a:srgbClr val="FBBF24"/>
+          </a:solidFill>
+          <a:ln/>
+        </p:spPr>
+      </p:sp>
+      <p:sp>
+        <p:nvSpPr>
+          <p:cNvPr id="18" name="Shape 16"/>
+          <p:cNvSpPr/>
+          <p:nvPr/>
+        </p:nvSpPr>
+        <p:spPr>
+          <a:xfrm>
+            <a:off x="566928" y="3950208"/>
+            <a:ext cx="621792" cy="256032"/>
+          </a:xfrm>
+          <a:prstGeom prst="rect">
+            <a:avLst/>
+          </a:prstGeom>
+          <a:solidFill>
+            <a:srgbClr val="FBBF24"/>
+          </a:solidFill>
+          <a:ln/>
+        </p:spPr>
+      </p:sp>
+      <p:sp>
+        <p:nvSpPr>
+          <p:cNvPr id="19" name="Text 17"/>
+          <p:cNvSpPr/>
+          <p:nvPr/>
+        </p:nvSpPr>
+        <p:spPr>
+          <a:xfrm>
+            <a:off x="566928" y="3950208"/>
+            <a:ext cx="621792" cy="256032"/>
+          </a:xfrm>
+          <a:prstGeom prst="rect">
+            <a:avLst/>
+          </a:prstGeom>
+          <a:noFill/>
+          <a:ln/>
+        </p:spPr>
+        <p:txBody>
+          <a:bodyPr wrap="square" lIns="0" tIns="0" rIns="0" bIns="0" rtlCol="0" anchor="ctr"/>
+          <a:lstStyle/>
+          <a:p>
+            <a:pPr algn="ctr" indent="0" marL="0">
+              <a:buNone/>
+            </a:pPr>
+            <a:r>
+              <a:rPr lang="en-US" sz="1100" b="1" dirty="0">
+                <a:solidFill>
+                  <a:srgbClr val="07070F"/>
+                </a:solidFill>
+                <a:latin typeface="Calibri" pitchFamily="34" charset="0"/>
+                <a:ea typeface="Calibri" pitchFamily="34" charset="-122"/>
+                <a:cs typeface="Calibri" pitchFamily="34" charset="-120"/>
+              </a:rPr>
+              <a:t>SOM</a:t>
+            </a:r>
+            <a:endParaRPr lang="en-US" sz="1100" dirty="0"/>
+          </a:p>
+        </p:txBody>
+      </p:sp>
+      <p:sp>
+        <p:nvSpPr>
+          <p:cNvPr id="20" name="Text 18"/>
+          <p:cNvSpPr/>
+          <p:nvPr/>
+        </p:nvSpPr>
+        <p:spPr>
+          <a:xfrm>
+            <a:off x="1316736" y="3886200"/>
+            <a:ext cx="3291840" cy="457200"/>
+          </a:xfrm>
+          <a:prstGeom prst="rect">
+            <a:avLst/>
+          </a:prstGeom>
+          <a:noFill/>
+          <a:ln/>
+        </p:spPr>
+        <p:txBody>
+          <a:bodyPr wrap="square" lIns="0" tIns="0" rIns="0" bIns="0" rtlCol="0" anchor="ctr"/>
+          <a:lstStyle/>
+          <a:p>
+            <a:pPr algn="l" indent="0" marL="0">
+              <a:buNone/>
+            </a:pPr>
+            <a:r>
+              <a:rPr lang="en-US" sz="2800" b="1" dirty="0">
+                <a:solidFill>
+                  <a:srgbClr val="FFFFFF"/>
+                </a:solidFill>
+                <a:latin typeface="Calibri" pitchFamily="34" charset="0"/>
+                <a:ea typeface="Calibri" pitchFamily="34" charset="-122"/>
+                <a:cs typeface="Calibri" pitchFamily="34" charset="-120"/>
+              </a:rPr>
+              <a:t>₹600 Cr</a:t>
+            </a:r>
+            <a:endParaRPr lang="en-US" sz="2800" dirty="0"/>
+          </a:p>
+        </p:txBody>
+      </p:sp>
+      <p:sp>
+        <p:nvSpPr>
+          <p:cNvPr id="21" name="Text 19"/>
+          <p:cNvSpPr/>
+          <p:nvPr/>
+        </p:nvSpPr>
+        <p:spPr>
+          <a:xfrm>
+            <a:off x="1316736" y="4389120"/>
+            <a:ext cx="3291840" cy="274320"/>
+          </a:xfrm>
+          <a:prstGeom prst="rect">
+            <a:avLst/>
+          </a:prstGeom>
+          <a:noFill/>
+          <a:ln/>
+        </p:spPr>
+        <p:txBody>
+          <a:bodyPr wrap="square" lIns="0" tIns="0" rIns="0" bIns="0" rtlCol="0" anchor="ctr"/>
+          <a:lstStyle/>
+          <a:p>
+            <a:pPr algn="l" indent="0" marL="0">
+              <a:buNone/>
+            </a:pPr>
+            <a:r>
+              <a:rPr lang="en-US" sz="1100" dirty="0">
+                <a:solidFill>
+                  <a:srgbClr val="6B7280"/>
+                </a:solidFill>
+                <a:latin typeface="Calibri" pitchFamily="34" charset="0"/>
+                <a:ea typeface="Calibri" pitchFamily="34" charset="-122"/>
+                <a:cs typeface="Calibri" pitchFamily="34" charset="-120"/>
+              </a:rPr>
+              <a:t>500K MAU · 50 campuses · Year 3</a:t>
+            </a:r>
+            <a:endParaRPr lang="en-US" sz="1100" dirty="0"/>
+          </a:p>
+        </p:txBody>
+      </p:sp>
+      <p:sp>
+        <p:nvSpPr>
+          <p:cNvPr id="22" name="Shape 20"/>
+          <p:cNvSpPr/>
+          <p:nvPr/>
+        </p:nvSpPr>
+        <p:spPr>
+          <a:xfrm>
+            <a:off x="4937760" y="822960"/>
+            <a:ext cx="3931920" cy="3749040"/>
           </a:xfrm>
           <a:prstGeom prst="ellipse">
             <a:avLst/>
           </a:prstGeom>
           <a:solidFill>
-            <a:srgbClr val="1A1A38"/>
-          </a:solidFill>
-          <a:ln/>
-        </p:spPr>
-      </p:sp>
-      <p:pic>
-        <p:nvPicPr>
-          <p:cNvPr id="17" name="Image 2" descr="preencoded.png">    </p:cNvPr>
-          <p:cNvPicPr>
-            <a:picLocks noChangeAspect="1"/>
-          </p:cNvPicPr>
-          <p:nvPr/>
-        </p:nvPicPr>
-        <p:blipFill>
-          <a:blip r:embed="rId3"/>
-          <a:stretch>
-            <a:fillRect/>
-          </a:stretch>
-        </p:blipFill>
-        <p:spPr>
-          <a:xfrm>
-            <a:off x="658368" y="3369564"/>
-            <a:ext cx="256032" cy="256032"/>
-          </a:xfrm>
-          <a:prstGeom prst="rect">
-            <a:avLst/>
-          </a:prstGeom>
-        </p:spPr>
-      </p:pic>
-      <p:sp>
-        <p:nvSpPr>
-          <p:cNvPr id="18" name="Text 13"/>
-          <p:cNvSpPr/>
-          <p:nvPr/>
-        </p:nvSpPr>
-        <p:spPr>
-          <a:xfrm>
-            <a:off x="1170432" y="3296412"/>
-            <a:ext cx="3099816" cy="402336"/>
+            <a:srgbClr val="6366F1">
+              <a:alpha val="16000"/>
+            </a:srgbClr>
+          </a:solidFill>
+          <a:ln w="19050">
+            <a:solidFill>
+              <a:srgbClr val="6366F1">
+                <a:alpha val="45000"/>
+              </a:srgbClr>
+            </a:solidFill>
+            <a:prstDash val="solid"/>
+          </a:ln>
+        </p:spPr>
+      </p:sp>
+      <p:sp>
+        <p:nvSpPr>
+          <p:cNvPr id="23" name="Text 21"/>
+          <p:cNvSpPr/>
+          <p:nvPr/>
+        </p:nvSpPr>
+        <p:spPr>
+          <a:xfrm>
+            <a:off x="4983480" y="868680"/>
+            <a:ext cx="1005840" cy="256032"/>
           </a:xfrm>
           <a:prstGeom prst="rect">
             <a:avLst/>
@@ -3988,151 +4695,196 @@
           <a:bodyPr wrap="square" lIns="0" tIns="0" rIns="0" bIns="0" rtlCol="0" anchor="ctr"/>
           <a:lstStyle/>
           <a:p>
+            <a:pPr algn="ctr" indent="0" marL="0">
+              <a:buNone/>
+            </a:pPr>
+            <a:r>
+              <a:rPr lang="en-US" sz="1000" b="1" dirty="0">
+                <a:solidFill>
+                  <a:srgbClr val="A5B4FC"/>
+                </a:solidFill>
+                <a:latin typeface="Calibri" pitchFamily="34" charset="0"/>
+                <a:ea typeface="Calibri" pitchFamily="34" charset="-122"/>
+                <a:cs typeface="Calibri" pitchFamily="34" charset="-120"/>
+              </a:rPr>
+              <a:t>TAM</a:t>
+            </a:r>
+            <a:endParaRPr lang="en-US" sz="1000" dirty="0"/>
+          </a:p>
+        </p:txBody>
+      </p:sp>
+      <p:sp>
+        <p:nvSpPr>
+          <p:cNvPr id="24" name="Shape 22"/>
+          <p:cNvSpPr/>
+          <p:nvPr/>
+        </p:nvSpPr>
+        <p:spPr>
+          <a:xfrm>
+            <a:off x="5513832" y="1399032"/>
+            <a:ext cx="2779776" cy="2596896"/>
+          </a:xfrm>
+          <a:prstGeom prst="ellipse">
+            <a:avLst/>
+          </a:prstGeom>
+          <a:solidFill>
+            <a:srgbClr val="10B981">
+              <a:alpha val="16000"/>
+            </a:srgbClr>
+          </a:solidFill>
+          <a:ln w="19050">
+            <a:solidFill>
+              <a:srgbClr val="10B981">
+                <a:alpha val="45000"/>
+              </a:srgbClr>
+            </a:solidFill>
+            <a:prstDash val="solid"/>
+          </a:ln>
+        </p:spPr>
+      </p:sp>
+      <p:sp>
+        <p:nvSpPr>
+          <p:cNvPr id="25" name="Text 23"/>
+          <p:cNvSpPr/>
+          <p:nvPr/>
+        </p:nvSpPr>
+        <p:spPr>
+          <a:xfrm>
+            <a:off x="5550408" y="1435608"/>
+            <a:ext cx="914400" cy="256032"/>
+          </a:xfrm>
+          <a:prstGeom prst="rect">
+            <a:avLst/>
+          </a:prstGeom>
+          <a:noFill/>
+          <a:ln/>
+        </p:spPr>
+        <p:txBody>
+          <a:bodyPr wrap="square" lIns="0" tIns="0" rIns="0" bIns="0" rtlCol="0" anchor="ctr"/>
+          <a:lstStyle/>
+          <a:p>
+            <a:pPr algn="ctr" indent="0" marL="0">
+              <a:buNone/>
+            </a:pPr>
+            <a:r>
+              <a:rPr lang="en-US" sz="1000" b="1" dirty="0">
+                <a:solidFill>
+                  <a:srgbClr val="10B981"/>
+                </a:solidFill>
+                <a:latin typeface="Calibri" pitchFamily="34" charset="0"/>
+                <a:ea typeface="Calibri" pitchFamily="34" charset="-122"/>
+                <a:cs typeface="Calibri" pitchFamily="34" charset="-120"/>
+              </a:rPr>
+              <a:t>SAM</a:t>
+            </a:r>
+            <a:endParaRPr lang="en-US" sz="1000" dirty="0"/>
+          </a:p>
+        </p:txBody>
+      </p:sp>
+      <p:sp>
+        <p:nvSpPr>
+          <p:cNvPr id="26" name="Shape 24"/>
+          <p:cNvSpPr/>
+          <p:nvPr/>
+        </p:nvSpPr>
+        <p:spPr>
+          <a:xfrm>
+            <a:off x="6099048" y="1965960"/>
+            <a:ext cx="1609344" cy="1463040"/>
+          </a:xfrm>
+          <a:prstGeom prst="ellipse">
+            <a:avLst/>
+          </a:prstGeom>
+          <a:solidFill>
+            <a:srgbClr val="FBBF24">
+              <a:alpha val="28000"/>
+            </a:srgbClr>
+          </a:solidFill>
+          <a:ln w="19050">
+            <a:solidFill>
+              <a:srgbClr val="FBBF24">
+                <a:alpha val="55000"/>
+              </a:srgbClr>
+            </a:solidFill>
+            <a:prstDash val="solid"/>
+          </a:ln>
+        </p:spPr>
+      </p:sp>
+      <p:sp>
+        <p:nvSpPr>
+          <p:cNvPr id="27" name="Text 25"/>
+          <p:cNvSpPr/>
+          <p:nvPr/>
+        </p:nvSpPr>
+        <p:spPr>
+          <a:xfrm>
+            <a:off x="6135624" y="2011680"/>
+            <a:ext cx="914400" cy="256032"/>
+          </a:xfrm>
+          <a:prstGeom prst="rect">
+            <a:avLst/>
+          </a:prstGeom>
+          <a:noFill/>
+          <a:ln/>
+        </p:spPr>
+        <p:txBody>
+          <a:bodyPr wrap="square" lIns="0" tIns="0" rIns="0" bIns="0" rtlCol="0" anchor="ctr"/>
+          <a:lstStyle/>
+          <a:p>
+            <a:pPr algn="ctr" indent="0" marL="0">
+              <a:buNone/>
+            </a:pPr>
+            <a:r>
+              <a:rPr lang="en-US" sz="1000" b="1" dirty="0">
+                <a:solidFill>
+                  <a:srgbClr val="FBBF24"/>
+                </a:solidFill>
+                <a:latin typeface="Calibri" pitchFamily="34" charset="0"/>
+                <a:ea typeface="Calibri" pitchFamily="34" charset="-122"/>
+                <a:cs typeface="Calibri" pitchFamily="34" charset="-120"/>
+              </a:rPr>
+              <a:t>SOM</a:t>
+            </a:r>
+            <a:endParaRPr lang="en-US" sz="1000" dirty="0"/>
+          </a:p>
+        </p:txBody>
+      </p:sp>
+      <p:sp>
+        <p:nvSpPr>
+          <p:cNvPr id="28" name="Text 26"/>
+          <p:cNvSpPr/>
+          <p:nvPr/>
+        </p:nvSpPr>
+        <p:spPr>
+          <a:xfrm>
+            <a:off x="365760" y="4828032"/>
+            <a:ext cx="8412480" cy="201168"/>
+          </a:xfrm>
+          <a:prstGeom prst="rect">
+            <a:avLst/>
+          </a:prstGeom>
+          <a:noFill/>
+          <a:ln/>
+        </p:spPr>
+        <p:txBody>
+          <a:bodyPr wrap="square" lIns="0" tIns="0" rIns="0" bIns="0" rtlCol="0" anchor="ctr"/>
+          <a:lstStyle/>
+          <a:p>
             <a:pPr algn="l" indent="0" marL="0">
               <a:buNone/>
             </a:pPr>
             <a:r>
-              <a:rPr lang="en-US" sz="1700" b="1" dirty="0">
-                <a:solidFill>
-                  <a:srgbClr val="FFFFFF"/>
-                </a:solidFill>
-                <a:latin typeface="Calibri" pitchFamily="34" charset="0"/>
-                <a:ea typeface="Calibri" pitchFamily="34" charset="-122"/>
-                <a:cs typeface="Calibri" pitchFamily="34" charset="-120"/>
-              </a:rPr>
-              <a:t>No Daily Route Matching</a:t>
-            </a:r>
-            <a:endParaRPr lang="en-US" sz="1700" dirty="0"/>
-          </a:p>
-        </p:txBody>
-      </p:sp>
-      <p:sp>
-        <p:nvSpPr>
-          <p:cNvPr id="19" name="Shape 14"/>
-          <p:cNvSpPr/>
-          <p:nvPr/>
-        </p:nvSpPr>
-        <p:spPr>
-          <a:xfrm>
-            <a:off x="4709160" y="2788920"/>
-            <a:ext cx="4069080" cy="1417320"/>
-          </a:xfrm>
-          <a:prstGeom prst="rect">
-            <a:avLst/>
-          </a:prstGeom>
-          <a:solidFill>
-            <a:srgbClr val="111124"/>
-          </a:solidFill>
-          <a:ln/>
-          <a:effectLst>
-            <a:outerShdw sx="100000" sy="100000" kx="0" ky="0" algn="bl" rotWithShape="0" blurRad="203200" dist="50800" dir="8100000">
-              <a:srgbClr val="000000">
-                <a:alpha val="35000"/>
-              </a:srgbClr>
-            </a:outerShdw>
-          </a:effectLst>
-        </p:spPr>
-      </p:sp>
-      <p:sp>
-        <p:nvSpPr>
-          <p:cNvPr id="20" name="Shape 15"/>
-          <p:cNvSpPr/>
-          <p:nvPr/>
-        </p:nvSpPr>
-        <p:spPr>
-          <a:xfrm>
-            <a:off x="4709160" y="2788920"/>
-            <a:ext cx="4069080" cy="45720"/>
-          </a:xfrm>
-          <a:prstGeom prst="rect">
-            <a:avLst/>
-          </a:prstGeom>
-          <a:solidFill>
-            <a:srgbClr val="A5B4FC"/>
-          </a:solidFill>
-          <a:ln/>
-        </p:spPr>
-      </p:sp>
-      <p:sp>
-        <p:nvSpPr>
-          <p:cNvPr id="21" name="Shape 16"/>
-          <p:cNvSpPr/>
-          <p:nvPr/>
-        </p:nvSpPr>
-        <p:spPr>
-          <a:xfrm>
-            <a:off x="4892040" y="3259836"/>
-            <a:ext cx="475488" cy="475488"/>
-          </a:xfrm>
-          <a:prstGeom prst="ellipse">
-            <a:avLst/>
-          </a:prstGeom>
-          <a:solidFill>
-            <a:srgbClr val="1A1A38"/>
-          </a:solidFill>
-          <a:ln/>
-        </p:spPr>
-      </p:sp>
-      <p:pic>
-        <p:nvPicPr>
-          <p:cNvPr id="22" name="Image 3" descr="preencoded.png">    </p:cNvPr>
-          <p:cNvPicPr>
-            <a:picLocks noChangeAspect="1"/>
-          </p:cNvPicPr>
-          <p:nvPr/>
-        </p:nvPicPr>
-        <p:blipFill>
-          <a:blip r:embed="rId4"/>
-          <a:stretch>
-            <a:fillRect/>
-          </a:stretch>
-        </p:blipFill>
-        <p:spPr>
-          <a:xfrm>
-            <a:off x="5001768" y="3369564"/>
-            <a:ext cx="256032" cy="256032"/>
-          </a:xfrm>
-          <a:prstGeom prst="rect">
-            <a:avLst/>
-          </a:prstGeom>
-        </p:spPr>
-      </p:pic>
-      <p:sp>
-        <p:nvSpPr>
-          <p:cNvPr id="23" name="Text 17"/>
-          <p:cNvSpPr/>
-          <p:nvPr/>
-        </p:nvSpPr>
-        <p:spPr>
-          <a:xfrm>
-            <a:off x="5513832" y="3296412"/>
-            <a:ext cx="3099816" cy="402336"/>
-          </a:xfrm>
-          <a:prstGeom prst="rect">
-            <a:avLst/>
-          </a:prstGeom>
-          <a:noFill/>
-          <a:ln/>
-        </p:spPr>
-        <p:txBody>
-          <a:bodyPr wrap="square" lIns="0" tIns="0" rIns="0" bIns="0" rtlCol="0" anchor="ctr"/>
-          <a:lstStyle/>
-          <a:p>
-            <a:pPr algn="l" indent="0" marL="0">
-              <a:buNone/>
-            </a:pPr>
-            <a:r>
-              <a:rPr lang="en-US" sz="1700" b="1" dirty="0">
-                <a:solidFill>
-                  <a:srgbClr val="FFFFFF"/>
-                </a:solidFill>
-                <a:latin typeface="Calibri" pitchFamily="34" charset="0"/>
-                <a:ea typeface="Calibri" pitchFamily="34" charset="-122"/>
-                <a:cs typeface="Calibri" pitchFamily="34" charset="-120"/>
-              </a:rPr>
-              <a:t>No Student Community Network</a:t>
-            </a:r>
-            <a:endParaRPr lang="en-US" sz="1700" dirty="0"/>
+              <a:rPr lang="en-US" sz="800" i="1" dirty="0">
+                <a:solidFill>
+                  <a:srgbClr val="3A3A5A"/>
+                </a:solidFill>
+                <a:latin typeface="Calibri" pitchFamily="34" charset="0"/>
+                <a:ea typeface="Calibri" pitchFamily="34" charset="-122"/>
+                <a:cs typeface="Calibri" pitchFamily="34" charset="-120"/>
+              </a:rPr>
+              <a:t>Sources: AISHE 2022–23 (education.gov.in)  ·  UGC Annual Report 2023–24 (ugc.ac.in)  ·  Market sizing estimated</a:t>
+            </a:r>
+            <a:endParaRPr lang="en-US" sz="800" dirty="0"/>
           </a:p>
         </p:txBody>
       </p:sp>
@@ -4170,43 +4922,313 @@
       </p:grpSpPr>
       <p:sp>
         <p:nvSpPr>
-          <p:cNvPr id="2" name="Shape 0"/>
-          <p:cNvSpPr/>
-          <p:nvPr/>
-        </p:nvSpPr>
-        <p:spPr>
-          <a:xfrm>
-            <a:off x="2286000" y="457200"/>
-            <a:ext cx="4572000" cy="4572000"/>
+          <p:cNvPr id="2" name="Text 0"/>
+          <p:cNvSpPr/>
+          <p:nvPr/>
+        </p:nvSpPr>
+        <p:spPr>
+          <a:xfrm>
+            <a:off x="457200" y="164592"/>
+            <a:ext cx="8229600" cy="530352"/>
+          </a:xfrm>
+          <a:prstGeom prst="rect">
+            <a:avLst/>
+          </a:prstGeom>
+          <a:noFill/>
+          <a:ln/>
+        </p:spPr>
+        <p:txBody>
+          <a:bodyPr wrap="square" lIns="0" tIns="0" rIns="0" bIns="0" rtlCol="0" anchor="ctr"/>
+          <a:lstStyle/>
+          <a:p>
+            <a:pPr algn="l" indent="0" marL="0">
+              <a:buNone/>
+            </a:pPr>
+            <a:r>
+              <a:rPr lang="en-US" sz="3200" b="1" dirty="0">
+                <a:solidFill>
+                  <a:srgbClr val="FFFFFF"/>
+                </a:solidFill>
+                <a:latin typeface="Calibri" pitchFamily="34" charset="0"/>
+                <a:ea typeface="Calibri" pitchFamily="34" charset="-122"/>
+                <a:cs typeface="Calibri" pitchFamily="34" charset="-120"/>
+              </a:rPr>
+              <a:t>Everything your commute has been missing.</a:t>
+            </a:r>
+            <a:endParaRPr lang="en-US" sz="3200" dirty="0"/>
+          </a:p>
+        </p:txBody>
+      </p:sp>
+      <p:sp>
+        <p:nvSpPr>
+          <p:cNvPr id="3" name="Text 1"/>
+          <p:cNvSpPr/>
+          <p:nvPr/>
+        </p:nvSpPr>
+        <p:spPr>
+          <a:xfrm>
+            <a:off x="457200" y="713232"/>
+            <a:ext cx="8229600" cy="274320"/>
+          </a:xfrm>
+          <a:prstGeom prst="rect">
+            <a:avLst/>
+          </a:prstGeom>
+          <a:noFill/>
+          <a:ln/>
+        </p:spPr>
+        <p:txBody>
+          <a:bodyPr wrap="square" lIns="0" tIns="0" rIns="0" bIns="0" rtlCol="0" anchor="ctr"/>
+          <a:lstStyle/>
+          <a:p>
+            <a:pPr algn="l" indent="0" marL="0">
+              <a:buNone/>
+            </a:pPr>
+            <a:r>
+              <a:rPr lang="en-US" sz="1300" dirty="0">
+                <a:solidFill>
+                  <a:srgbClr val="9CA3AF"/>
+                </a:solidFill>
+                <a:latin typeface="Calibri" pitchFamily="34" charset="0"/>
+                <a:ea typeface="Calibri" pitchFamily="34" charset="-122"/>
+                <a:cs typeface="Calibri" pitchFamily="34" charset="-120"/>
+              </a:rPr>
+              <a:t>Built exclusively for campus commuters — riders and drivers alike.</a:t>
+            </a:r>
+            <a:endParaRPr lang="en-US" sz="1300" dirty="0"/>
+          </a:p>
+        </p:txBody>
+      </p:sp>
+      <p:sp>
+        <p:nvSpPr>
+          <p:cNvPr id="4" name="Shape 2"/>
+          <p:cNvSpPr/>
+          <p:nvPr/>
+        </p:nvSpPr>
+        <p:spPr>
+          <a:xfrm>
+            <a:off x="365760" y="1143000"/>
+            <a:ext cx="4069080" cy="1417320"/>
+          </a:xfrm>
+          <a:prstGeom prst="rect">
+            <a:avLst/>
+          </a:prstGeom>
+          <a:solidFill>
+            <a:srgbClr val="111124"/>
+          </a:solidFill>
+          <a:ln/>
+          <a:effectLst>
+            <a:outerShdw sx="100000" sy="100000" kx="0" ky="0" algn="bl" rotWithShape="0" blurRad="203200" dist="50800" dir="8100000">
+              <a:srgbClr val="000000">
+                <a:alpha val="35000"/>
+              </a:srgbClr>
+            </a:outerShdw>
+          </a:effectLst>
+        </p:spPr>
+      </p:sp>
+      <p:sp>
+        <p:nvSpPr>
+          <p:cNvPr id="5" name="Shape 3"/>
+          <p:cNvSpPr/>
+          <p:nvPr/>
+        </p:nvSpPr>
+        <p:spPr>
+          <a:xfrm>
+            <a:off x="365760" y="1143000"/>
+            <a:ext cx="4069080" cy="45720"/>
+          </a:xfrm>
+          <a:prstGeom prst="rect">
+            <a:avLst/>
+          </a:prstGeom>
+          <a:solidFill>
+            <a:srgbClr val="6366F1"/>
+          </a:solidFill>
+          <a:ln/>
+        </p:spPr>
+      </p:sp>
+      <p:sp>
+        <p:nvSpPr>
+          <p:cNvPr id="6" name="Shape 4"/>
+          <p:cNvSpPr/>
+          <p:nvPr/>
+        </p:nvSpPr>
+        <p:spPr>
+          <a:xfrm>
+            <a:off x="548640" y="1613916"/>
+            <a:ext cx="475488" cy="475488"/>
           </a:xfrm>
           <a:prstGeom prst="ellipse">
             <a:avLst/>
           </a:prstGeom>
           <a:solidFill>
-            <a:srgbClr val="6366F1">
-              <a:alpha val="15000"/>
-            </a:srgbClr>
-          </a:solidFill>
-          <a:ln w="12700">
-            <a:solidFill>
-              <a:srgbClr val="6366F1">
-                <a:alpha val="15000"/>
+            <a:srgbClr val="1A1A38"/>
+          </a:solidFill>
+          <a:ln/>
+        </p:spPr>
+      </p:sp>
+      <p:pic>
+        <p:nvPicPr>
+          <p:cNvPr id="7" name="Image 0" descr="preencoded.png">    </p:cNvPr>
+          <p:cNvPicPr>
+            <a:picLocks noChangeAspect="1"/>
+          </p:cNvPicPr>
+          <p:nvPr/>
+        </p:nvPicPr>
+        <p:blipFill>
+          <a:blip r:embed="rId1"/>
+          <a:stretch>
+            <a:fillRect/>
+          </a:stretch>
+        </p:blipFill>
+        <p:spPr>
+          <a:xfrm>
+            <a:off x="658368" y="1723644"/>
+            <a:ext cx="256032" cy="256032"/>
+          </a:xfrm>
+          <a:prstGeom prst="rect">
+            <a:avLst/>
+          </a:prstGeom>
+        </p:spPr>
+      </p:pic>
+      <p:sp>
+        <p:nvSpPr>
+          <p:cNvPr id="8" name="Text 5"/>
+          <p:cNvSpPr/>
+          <p:nvPr/>
+        </p:nvSpPr>
+        <p:spPr>
+          <a:xfrm>
+            <a:off x="1170432" y="1650492"/>
+            <a:ext cx="3099816" cy="402336"/>
+          </a:xfrm>
+          <a:prstGeom prst="rect">
+            <a:avLst/>
+          </a:prstGeom>
+          <a:noFill/>
+          <a:ln/>
+        </p:spPr>
+        <p:txBody>
+          <a:bodyPr wrap="square" lIns="0" tIns="0" rIns="0" bIns="0" rtlCol="0" anchor="ctr"/>
+          <a:lstStyle/>
+          <a:p>
+            <a:pPr algn="l" indent="0" marL="0">
+              <a:buNone/>
+            </a:pPr>
+            <a:r>
+              <a:rPr lang="en-US" sz="1700" b="1" dirty="0">
+                <a:solidFill>
+                  <a:srgbClr val="FFFFFF"/>
+                </a:solidFill>
+                <a:latin typeface="Calibri" pitchFamily="34" charset="0"/>
+                <a:ea typeface="Calibri" pitchFamily="34" charset="-122"/>
+                <a:cs typeface="Calibri" pitchFamily="34" charset="-120"/>
+              </a:rPr>
+              <a:t>Campus-Verified Community</a:t>
+            </a:r>
+            <a:endParaRPr lang="en-US" sz="1700" dirty="0"/>
+          </a:p>
+        </p:txBody>
+      </p:sp>
+      <p:sp>
+        <p:nvSpPr>
+          <p:cNvPr id="9" name="Shape 6"/>
+          <p:cNvSpPr/>
+          <p:nvPr/>
+        </p:nvSpPr>
+        <p:spPr>
+          <a:xfrm>
+            <a:off x="4709160" y="1143000"/>
+            <a:ext cx="4069080" cy="1417320"/>
+          </a:xfrm>
+          <a:prstGeom prst="rect">
+            <a:avLst/>
+          </a:prstGeom>
+          <a:solidFill>
+            <a:srgbClr val="111124"/>
+          </a:solidFill>
+          <a:ln/>
+          <a:effectLst>
+            <a:outerShdw sx="100000" sy="100000" kx="0" ky="0" algn="bl" rotWithShape="0" blurRad="203200" dist="50800" dir="8100000">
+              <a:srgbClr val="000000">
+                <a:alpha val="35000"/>
               </a:srgbClr>
-            </a:solidFill>
-            <a:prstDash val="solid"/>
-          </a:ln>
-        </p:spPr>
-      </p:sp>
-      <p:sp>
-        <p:nvSpPr>
-          <p:cNvPr id="3" name="Text 1"/>
-          <p:cNvSpPr/>
-          <p:nvPr/>
-        </p:nvSpPr>
-        <p:spPr>
-          <a:xfrm>
-            <a:off x="914400" y="1005840"/>
-            <a:ext cx="7315200" cy="457200"/>
+            </a:outerShdw>
+          </a:effectLst>
+        </p:spPr>
+      </p:sp>
+      <p:sp>
+        <p:nvSpPr>
+          <p:cNvPr id="10" name="Shape 7"/>
+          <p:cNvSpPr/>
+          <p:nvPr/>
+        </p:nvSpPr>
+        <p:spPr>
+          <a:xfrm>
+            <a:off x="4709160" y="1143000"/>
+            <a:ext cx="4069080" cy="45720"/>
+          </a:xfrm>
+          <a:prstGeom prst="rect">
+            <a:avLst/>
+          </a:prstGeom>
+          <a:solidFill>
+            <a:srgbClr val="FBBF24"/>
+          </a:solidFill>
+          <a:ln/>
+        </p:spPr>
+      </p:sp>
+      <p:sp>
+        <p:nvSpPr>
+          <p:cNvPr id="11" name="Shape 8"/>
+          <p:cNvSpPr/>
+          <p:nvPr/>
+        </p:nvSpPr>
+        <p:spPr>
+          <a:xfrm>
+            <a:off x="4892040" y="1613916"/>
+            <a:ext cx="475488" cy="475488"/>
+          </a:xfrm>
+          <a:prstGeom prst="ellipse">
+            <a:avLst/>
+          </a:prstGeom>
+          <a:solidFill>
+            <a:srgbClr val="1A1A38"/>
+          </a:solidFill>
+          <a:ln/>
+        </p:spPr>
+      </p:sp>
+      <p:pic>
+        <p:nvPicPr>
+          <p:cNvPr id="12" name="Image 1" descr="preencoded.png">    </p:cNvPr>
+          <p:cNvPicPr>
+            <a:picLocks noChangeAspect="1"/>
+          </p:cNvPicPr>
+          <p:nvPr/>
+        </p:nvPicPr>
+        <p:blipFill>
+          <a:blip r:embed="rId2"/>
+          <a:stretch>
+            <a:fillRect/>
+          </a:stretch>
+        </p:blipFill>
+        <p:spPr>
+          <a:xfrm>
+            <a:off x="5001768" y="1723644"/>
+            <a:ext cx="256032" cy="256032"/>
+          </a:xfrm>
+          <a:prstGeom prst="rect">
+            <a:avLst/>
+          </a:prstGeom>
+        </p:spPr>
+      </p:pic>
+      <p:sp>
+        <p:nvSpPr>
+          <p:cNvPr id="13" name="Text 9"/>
+          <p:cNvSpPr/>
+          <p:nvPr/>
+        </p:nvSpPr>
+        <p:spPr>
+          <a:xfrm>
+            <a:off x="5513832" y="1650492"/>
+            <a:ext cx="3099816" cy="402336"/>
           </a:xfrm>
           <a:prstGeom prst="rect">
             <a:avLst/>
@@ -4218,34 +5240,125 @@
           <a:bodyPr wrap="square" lIns="0" tIns="0" rIns="0" bIns="0" rtlCol="0" anchor="ctr"/>
           <a:lstStyle/>
           <a:p>
-            <a:pPr algn="ctr" indent="0" marL="0">
-              <a:buNone/>
-            </a:pPr>
-            <a:r>
-              <a:rPr lang="en-US" sz="2000" spc="800" kern="0" dirty="0">
-                <a:solidFill>
-                  <a:srgbClr val="A5B4FC"/>
-                </a:solidFill>
-                <a:latin typeface="Calibri" pitchFamily="34" charset="0"/>
-                <a:ea typeface="Calibri" pitchFamily="34" charset="-122"/>
-                <a:cs typeface="Calibri" pitchFamily="34" charset="-120"/>
-              </a:rPr>
-              <a:t>Introducing</a:t>
-            </a:r>
-            <a:endParaRPr lang="en-US" sz="2000" dirty="0"/>
-          </a:p>
-        </p:txBody>
-      </p:sp>
-      <p:sp>
-        <p:nvSpPr>
-          <p:cNvPr id="4" name="Text 2"/>
-          <p:cNvSpPr/>
-          <p:nvPr/>
-        </p:nvSpPr>
-        <p:spPr>
-          <a:xfrm>
-            <a:off x="914400" y="1508760"/>
-            <a:ext cx="7315200" cy="1188720"/>
+            <a:pPr algn="l" indent="0" marL="0">
+              <a:buNone/>
+            </a:pPr>
+            <a:r>
+              <a:rPr lang="en-US" sz="1700" b="1" dirty="0">
+                <a:solidFill>
+                  <a:srgbClr val="FFFFFF"/>
+                </a:solidFill>
+                <a:latin typeface="Calibri" pitchFamily="34" charset="0"/>
+                <a:ea typeface="Calibri" pitchFamily="34" charset="-122"/>
+                <a:cs typeface="Calibri" pitchFamily="34" charset="-120"/>
+              </a:rPr>
+              <a:t>Student-First Pricing</a:t>
+            </a:r>
+            <a:endParaRPr lang="en-US" sz="1700" dirty="0"/>
+          </a:p>
+        </p:txBody>
+      </p:sp>
+      <p:sp>
+        <p:nvSpPr>
+          <p:cNvPr id="14" name="Shape 10"/>
+          <p:cNvSpPr/>
+          <p:nvPr/>
+        </p:nvSpPr>
+        <p:spPr>
+          <a:xfrm>
+            <a:off x="365760" y="2788920"/>
+            <a:ext cx="4069080" cy="1417320"/>
+          </a:xfrm>
+          <a:prstGeom prst="rect">
+            <a:avLst/>
+          </a:prstGeom>
+          <a:solidFill>
+            <a:srgbClr val="111124"/>
+          </a:solidFill>
+          <a:ln/>
+          <a:effectLst>
+            <a:outerShdw sx="100000" sy="100000" kx="0" ky="0" algn="bl" rotWithShape="0" blurRad="203200" dist="50800" dir="8100000">
+              <a:srgbClr val="000000">
+                <a:alpha val="35000"/>
+              </a:srgbClr>
+            </a:outerShdw>
+          </a:effectLst>
+        </p:spPr>
+      </p:sp>
+      <p:sp>
+        <p:nvSpPr>
+          <p:cNvPr id="15" name="Shape 11"/>
+          <p:cNvSpPr/>
+          <p:nvPr/>
+        </p:nvSpPr>
+        <p:spPr>
+          <a:xfrm>
+            <a:off x="365760" y="2788920"/>
+            <a:ext cx="4069080" cy="45720"/>
+          </a:xfrm>
+          <a:prstGeom prst="rect">
+            <a:avLst/>
+          </a:prstGeom>
+          <a:solidFill>
+            <a:srgbClr val="10B981"/>
+          </a:solidFill>
+          <a:ln/>
+        </p:spPr>
+      </p:sp>
+      <p:sp>
+        <p:nvSpPr>
+          <p:cNvPr id="16" name="Shape 12"/>
+          <p:cNvSpPr/>
+          <p:nvPr/>
+        </p:nvSpPr>
+        <p:spPr>
+          <a:xfrm>
+            <a:off x="548640" y="3259836"/>
+            <a:ext cx="475488" cy="475488"/>
+          </a:xfrm>
+          <a:prstGeom prst="ellipse">
+            <a:avLst/>
+          </a:prstGeom>
+          <a:solidFill>
+            <a:srgbClr val="1A1A38"/>
+          </a:solidFill>
+          <a:ln/>
+        </p:spPr>
+      </p:sp>
+      <p:pic>
+        <p:nvPicPr>
+          <p:cNvPr id="17" name="Image 2" descr="preencoded.png">    </p:cNvPr>
+          <p:cNvPicPr>
+            <a:picLocks noChangeAspect="1"/>
+          </p:cNvPicPr>
+          <p:nvPr/>
+        </p:nvPicPr>
+        <p:blipFill>
+          <a:blip r:embed="rId3"/>
+          <a:stretch>
+            <a:fillRect/>
+          </a:stretch>
+        </p:blipFill>
+        <p:spPr>
+          <a:xfrm>
+            <a:off x="658368" y="3369564"/>
+            <a:ext cx="256032" cy="256032"/>
+          </a:xfrm>
+          <a:prstGeom prst="rect">
+            <a:avLst/>
+          </a:prstGeom>
+        </p:spPr>
+      </p:pic>
+      <p:sp>
+        <p:nvSpPr>
+          <p:cNvPr id="18" name="Text 13"/>
+          <p:cNvSpPr/>
+          <p:nvPr/>
+        </p:nvSpPr>
+        <p:spPr>
+          <a:xfrm>
+            <a:off x="1170432" y="3296412"/>
+            <a:ext cx="3099816" cy="402336"/>
           </a:xfrm>
           <a:prstGeom prst="rect">
             <a:avLst/>
@@ -4257,11 +5370,11 @@
           <a:bodyPr wrap="square" lIns="0" tIns="0" rIns="0" bIns="0" rtlCol="0" anchor="ctr"/>
           <a:lstStyle/>
           <a:p>
-            <a:pPr algn="ctr" indent="0" marL="0">
-              <a:buNone/>
-            </a:pPr>
-            <a:r>
-              <a:rPr lang="en-US" sz="8000" b="1" dirty="0">
+            <a:pPr algn="l" indent="0" marL="0">
+              <a:buNone/>
+            </a:pPr>
+            <a:r>
+              <a:rPr lang="en-US" sz="1700" b="1" dirty="0">
                 <a:solidFill>
                   <a:srgbClr val="FFFFFF"/>
                 </a:solidFill>
@@ -4269,22 +5382,113 @@
                 <a:ea typeface="Calibri" pitchFamily="34" charset="-122"/>
                 <a:cs typeface="Calibri" pitchFamily="34" charset="-120"/>
               </a:rPr>
-              <a:t>UniRide</a:t>
-            </a:r>
-            <a:endParaRPr lang="en-US" sz="8000" dirty="0"/>
-          </a:p>
-        </p:txBody>
-      </p:sp>
-      <p:sp>
-        <p:nvSpPr>
-          <p:cNvPr id="5" name="Text 3"/>
-          <p:cNvSpPr/>
-          <p:nvPr/>
-        </p:nvSpPr>
-        <p:spPr>
-          <a:xfrm>
-            <a:off x="914400" y="2788920"/>
-            <a:ext cx="7315200" cy="411480"/>
+              <a:t>Smart Daily Route Matching</a:t>
+            </a:r>
+            <a:endParaRPr lang="en-US" sz="1700" dirty="0"/>
+          </a:p>
+        </p:txBody>
+      </p:sp>
+      <p:sp>
+        <p:nvSpPr>
+          <p:cNvPr id="19" name="Shape 14"/>
+          <p:cNvSpPr/>
+          <p:nvPr/>
+        </p:nvSpPr>
+        <p:spPr>
+          <a:xfrm>
+            <a:off x="4709160" y="2788920"/>
+            <a:ext cx="4069080" cy="1417320"/>
+          </a:xfrm>
+          <a:prstGeom prst="rect">
+            <a:avLst/>
+          </a:prstGeom>
+          <a:solidFill>
+            <a:srgbClr val="111124"/>
+          </a:solidFill>
+          <a:ln/>
+          <a:effectLst>
+            <a:outerShdw sx="100000" sy="100000" kx="0" ky="0" algn="bl" rotWithShape="0" blurRad="203200" dist="50800" dir="8100000">
+              <a:srgbClr val="000000">
+                <a:alpha val="35000"/>
+              </a:srgbClr>
+            </a:outerShdw>
+          </a:effectLst>
+        </p:spPr>
+      </p:sp>
+      <p:sp>
+        <p:nvSpPr>
+          <p:cNvPr id="20" name="Shape 15"/>
+          <p:cNvSpPr/>
+          <p:nvPr/>
+        </p:nvSpPr>
+        <p:spPr>
+          <a:xfrm>
+            <a:off x="4709160" y="2788920"/>
+            <a:ext cx="4069080" cy="45720"/>
+          </a:xfrm>
+          <a:prstGeom prst="rect">
+            <a:avLst/>
+          </a:prstGeom>
+          <a:solidFill>
+            <a:srgbClr val="A5B4FC"/>
+          </a:solidFill>
+          <a:ln/>
+        </p:spPr>
+      </p:sp>
+      <p:sp>
+        <p:nvSpPr>
+          <p:cNvPr id="21" name="Shape 16"/>
+          <p:cNvSpPr/>
+          <p:nvPr/>
+        </p:nvSpPr>
+        <p:spPr>
+          <a:xfrm>
+            <a:off x="4892040" y="3259836"/>
+            <a:ext cx="475488" cy="475488"/>
+          </a:xfrm>
+          <a:prstGeom prst="ellipse">
+            <a:avLst/>
+          </a:prstGeom>
+          <a:solidFill>
+            <a:srgbClr val="1A1A38"/>
+          </a:solidFill>
+          <a:ln/>
+        </p:spPr>
+      </p:sp>
+      <p:pic>
+        <p:nvPicPr>
+          <p:cNvPr id="22" name="Image 3" descr="preencoded.png">    </p:cNvPr>
+          <p:cNvPicPr>
+            <a:picLocks noChangeAspect="1"/>
+          </p:cNvPicPr>
+          <p:nvPr/>
+        </p:nvPicPr>
+        <p:blipFill>
+          <a:blip r:embed="rId4"/>
+          <a:stretch>
+            <a:fillRect/>
+          </a:stretch>
+        </p:blipFill>
+        <p:spPr>
+          <a:xfrm>
+            <a:off x="5001768" y="3369564"/>
+            <a:ext cx="256032" cy="256032"/>
+          </a:xfrm>
+          <a:prstGeom prst="rect">
+            <a:avLst/>
+          </a:prstGeom>
+        </p:spPr>
+      </p:pic>
+      <p:sp>
+        <p:nvSpPr>
+          <p:cNvPr id="23" name="Text 17"/>
+          <p:cNvSpPr/>
+          <p:nvPr/>
+        </p:nvSpPr>
+        <p:spPr>
+          <a:xfrm>
+            <a:off x="5513832" y="3296412"/>
+            <a:ext cx="3099816" cy="402336"/>
           </a:xfrm>
           <a:prstGeom prst="rect">
             <a:avLst/>
@@ -4296,219 +5500,21 @@
           <a:bodyPr wrap="square" lIns="0" tIns="0" rIns="0" bIns="0" rtlCol="0" anchor="ctr"/>
           <a:lstStyle/>
           <a:p>
-            <a:pPr algn="ctr" indent="0" marL="0">
-              <a:buNone/>
-            </a:pPr>
-            <a:r>
-              <a:rPr lang="en-US" sz="1700" dirty="0">
-                <a:solidFill>
-                  <a:srgbClr val="A5B4FC"/>
-                </a:solidFill>
-                <a:latin typeface="Calibri" pitchFamily="34" charset="0"/>
-                <a:ea typeface="Calibri" pitchFamily="34" charset="-122"/>
-                <a:cs typeface="Calibri" pitchFamily="34" charset="-120"/>
-              </a:rPr>
-              <a:t>Need a ride to campus — or have empty seats to share?</a:t>
+            <a:pPr algn="l" indent="0" marL="0">
+              <a:buNone/>
+            </a:pPr>
+            <a:r>
+              <a:rPr lang="en-US" sz="1700" b="1" dirty="0">
+                <a:solidFill>
+                  <a:srgbClr val="FFFFFF"/>
+                </a:solidFill>
+                <a:latin typeface="Calibri" pitchFamily="34" charset="0"/>
+                <a:ea typeface="Calibri" pitchFamily="34" charset="-122"/>
+                <a:cs typeface="Calibri" pitchFamily="34" charset="-120"/>
+              </a:rPr>
+              <a:t>Campus Social Network</a:t>
             </a:r>
             <a:endParaRPr lang="en-US" sz="1700" dirty="0"/>
-          </a:p>
-        </p:txBody>
-      </p:sp>
-      <p:sp>
-        <p:nvSpPr>
-          <p:cNvPr id="6" name="Shape 4"/>
-          <p:cNvSpPr/>
-          <p:nvPr/>
-        </p:nvSpPr>
-        <p:spPr>
-          <a:xfrm>
-            <a:off x="2011680" y="3429000"/>
-            <a:ext cx="1463040" cy="411480"/>
-          </a:xfrm>
-          <a:prstGeom prst="roundRect">
-            <a:avLst>
-              <a:gd name="adj" fmla="val 17778"/>
-            </a:avLst>
-          </a:prstGeom>
-          <a:solidFill>
-            <a:srgbClr val="121224"/>
-          </a:solidFill>
-          <a:ln w="19050">
-            <a:solidFill>
-              <a:srgbClr val="6366F1"/>
-            </a:solidFill>
-            <a:prstDash val="solid"/>
-          </a:ln>
-        </p:spPr>
-      </p:sp>
-      <p:sp>
-        <p:nvSpPr>
-          <p:cNvPr id="7" name="Text 5"/>
-          <p:cNvSpPr/>
-          <p:nvPr/>
-        </p:nvSpPr>
-        <p:spPr>
-          <a:xfrm>
-            <a:off x="2011680" y="3429000"/>
-            <a:ext cx="1463040" cy="411480"/>
-          </a:xfrm>
-          <a:prstGeom prst="rect">
-            <a:avLst/>
-          </a:prstGeom>
-          <a:noFill/>
-          <a:ln/>
-        </p:spPr>
-        <p:txBody>
-          <a:bodyPr wrap="square" lIns="0" tIns="0" rIns="0" bIns="0" rtlCol="0" anchor="ctr"/>
-          <a:lstStyle/>
-          <a:p>
-            <a:pPr algn="ctr" indent="0" marL="0">
-              <a:buNone/>
-            </a:pPr>
-            <a:r>
-              <a:rPr lang="en-US" sz="1300" b="1" dirty="0">
-                <a:solidFill>
-                  <a:srgbClr val="6366F1"/>
-                </a:solidFill>
-                <a:latin typeface="Calibri" pitchFamily="34" charset="0"/>
-                <a:ea typeface="Calibri" pitchFamily="34" charset="-122"/>
-                <a:cs typeface="Calibri" pitchFamily="34" charset="-120"/>
-              </a:rPr>
-              <a:t>Trusted</a:t>
-            </a:r>
-            <a:endParaRPr lang="en-US" sz="1300" dirty="0"/>
-          </a:p>
-        </p:txBody>
-      </p:sp>
-      <p:sp>
-        <p:nvSpPr>
-          <p:cNvPr id="8" name="Shape 6"/>
-          <p:cNvSpPr/>
-          <p:nvPr/>
-        </p:nvSpPr>
-        <p:spPr>
-          <a:xfrm>
-            <a:off x="3840480" y="3429000"/>
-            <a:ext cx="1463040" cy="411480"/>
-          </a:xfrm>
-          <a:prstGeom prst="roundRect">
-            <a:avLst>
-              <a:gd name="adj" fmla="val 17778"/>
-            </a:avLst>
-          </a:prstGeom>
-          <a:solidFill>
-            <a:srgbClr val="121224"/>
-          </a:solidFill>
-          <a:ln w="19050">
-            <a:solidFill>
-              <a:srgbClr val="10B981"/>
-            </a:solidFill>
-            <a:prstDash val="solid"/>
-          </a:ln>
-        </p:spPr>
-      </p:sp>
-      <p:sp>
-        <p:nvSpPr>
-          <p:cNvPr id="9" name="Text 7"/>
-          <p:cNvSpPr/>
-          <p:nvPr/>
-        </p:nvSpPr>
-        <p:spPr>
-          <a:xfrm>
-            <a:off x="3840480" y="3429000"/>
-            <a:ext cx="1463040" cy="411480"/>
-          </a:xfrm>
-          <a:prstGeom prst="rect">
-            <a:avLst/>
-          </a:prstGeom>
-          <a:noFill/>
-          <a:ln/>
-        </p:spPr>
-        <p:txBody>
-          <a:bodyPr wrap="square" lIns="0" tIns="0" rIns="0" bIns="0" rtlCol="0" anchor="ctr"/>
-          <a:lstStyle/>
-          <a:p>
-            <a:pPr algn="ctr" indent="0" marL="0">
-              <a:buNone/>
-            </a:pPr>
-            <a:r>
-              <a:rPr lang="en-US" sz="1300" b="1" dirty="0">
-                <a:solidFill>
-                  <a:srgbClr val="10B981"/>
-                </a:solidFill>
-                <a:latin typeface="Calibri" pitchFamily="34" charset="0"/>
-                <a:ea typeface="Calibri" pitchFamily="34" charset="-122"/>
-                <a:cs typeface="Calibri" pitchFamily="34" charset="-120"/>
-              </a:rPr>
-              <a:t>Affordable</a:t>
-            </a:r>
-            <a:endParaRPr lang="en-US" sz="1300" dirty="0"/>
-          </a:p>
-        </p:txBody>
-      </p:sp>
-      <p:sp>
-        <p:nvSpPr>
-          <p:cNvPr id="10" name="Shape 8"/>
-          <p:cNvSpPr/>
-          <p:nvPr/>
-        </p:nvSpPr>
-        <p:spPr>
-          <a:xfrm>
-            <a:off x="5669280" y="3429000"/>
-            <a:ext cx="1463040" cy="411480"/>
-          </a:xfrm>
-          <a:prstGeom prst="roundRect">
-            <a:avLst>
-              <a:gd name="adj" fmla="val 17778"/>
-            </a:avLst>
-          </a:prstGeom>
-          <a:solidFill>
-            <a:srgbClr val="121224"/>
-          </a:solidFill>
-          <a:ln w="19050">
-            <a:solidFill>
-              <a:srgbClr val="FBBF24"/>
-            </a:solidFill>
-            <a:prstDash val="solid"/>
-          </a:ln>
-        </p:spPr>
-      </p:sp>
-      <p:sp>
-        <p:nvSpPr>
-          <p:cNvPr id="11" name="Text 9"/>
-          <p:cNvSpPr/>
-          <p:nvPr/>
-        </p:nvSpPr>
-        <p:spPr>
-          <a:xfrm>
-            <a:off x="5669280" y="3429000"/>
-            <a:ext cx="1463040" cy="411480"/>
-          </a:xfrm>
-          <a:prstGeom prst="rect">
-            <a:avLst/>
-          </a:prstGeom>
-          <a:noFill/>
-          <a:ln/>
-        </p:spPr>
-        <p:txBody>
-          <a:bodyPr wrap="square" lIns="0" tIns="0" rIns="0" bIns="0" rtlCol="0" anchor="ctr"/>
-          <a:lstStyle/>
-          <a:p>
-            <a:pPr algn="ctr" indent="0" marL="0">
-              <a:buNone/>
-            </a:pPr>
-            <a:r>
-              <a:rPr lang="en-US" sz="1300" b="1" dirty="0">
-                <a:solidFill>
-                  <a:srgbClr val="FBBF24"/>
-                </a:solidFill>
-                <a:latin typeface="Calibri" pitchFamily="34" charset="0"/>
-                <a:ea typeface="Calibri" pitchFamily="34" charset="-122"/>
-                <a:cs typeface="Calibri" pitchFamily="34" charset="-120"/>
-              </a:rPr>
-              <a:t>Seamless</a:t>
-            </a:r>
-            <a:endParaRPr lang="en-US" sz="1300" dirty="0"/>
           </a:p>
         </p:txBody>
       </p:sp>
@@ -4546,576 +5552,253 @@
       </p:grpSpPr>
       <p:sp>
         <p:nvSpPr>
-          <p:cNvPr id="2" name="Text 0"/>
-          <p:cNvSpPr/>
-          <p:nvPr/>
-        </p:nvSpPr>
-        <p:spPr>
-          <a:xfrm>
-            <a:off x="457200" y="365760"/>
-            <a:ext cx="4754880" cy="594360"/>
-          </a:xfrm>
-          <a:prstGeom prst="rect">
-            <a:avLst/>
-          </a:prstGeom>
-          <a:noFill/>
-          <a:ln/>
-        </p:spPr>
-        <p:txBody>
-          <a:bodyPr wrap="square" lIns="0" tIns="0" rIns="0" bIns="0" rtlCol="0" anchor="ctr"/>
-          <a:lstStyle/>
-          <a:p>
-            <a:pPr algn="l" indent="0" marL="0">
-              <a:buNone/>
-            </a:pPr>
-            <a:r>
-              <a:rPr lang="en-US" sz="3600" b="1" dirty="0">
-                <a:solidFill>
-                  <a:srgbClr val="FFFFFF"/>
-                </a:solidFill>
-                <a:latin typeface="Calibri" pitchFamily="34" charset="0"/>
-                <a:ea typeface="Calibri" pitchFamily="34" charset="-122"/>
-                <a:cs typeface="Calibri" pitchFamily="34" charset="-120"/>
-              </a:rPr>
-              <a:t>Find a Ride</a:t>
-            </a:r>
-            <a:endParaRPr lang="en-US" sz="3600" dirty="0"/>
-          </a:p>
-        </p:txBody>
-      </p:sp>
-      <p:sp>
-        <p:nvSpPr>
-          <p:cNvPr id="3" name="Text 1"/>
-          <p:cNvSpPr/>
-          <p:nvPr/>
-        </p:nvSpPr>
-        <p:spPr>
-          <a:xfrm>
-            <a:off x="457200" y="1005840"/>
-            <a:ext cx="4754880" cy="320040"/>
-          </a:xfrm>
-          <a:prstGeom prst="rect">
-            <a:avLst/>
-          </a:prstGeom>
-          <a:noFill/>
-          <a:ln/>
-        </p:spPr>
-        <p:txBody>
-          <a:bodyPr wrap="square" lIns="0" tIns="0" rIns="0" bIns="0" rtlCol="0" anchor="ctr"/>
-          <a:lstStyle/>
-          <a:p>
-            <a:pPr algn="l" indent="0" marL="0">
-              <a:buNone/>
-            </a:pPr>
-            <a:r>
-              <a:rPr lang="en-US" sz="1300" dirty="0">
-                <a:solidFill>
-                  <a:srgbClr val="A5B4FC"/>
-                </a:solidFill>
-                <a:latin typeface="Calibri" pitchFamily="34" charset="0"/>
-                <a:ea typeface="Calibri" pitchFamily="34" charset="-122"/>
-                <a:cs typeface="Calibri" pitchFamily="34" charset="-120"/>
-              </a:rPr>
-              <a:t>Get to college without the chaos.</a:t>
-            </a:r>
-            <a:endParaRPr lang="en-US" sz="1300" dirty="0"/>
-          </a:p>
-        </p:txBody>
-      </p:sp>
-      <p:sp>
-        <p:nvSpPr>
-          <p:cNvPr id="4" name="Shape 2"/>
-          <p:cNvSpPr/>
-          <p:nvPr/>
-        </p:nvSpPr>
-        <p:spPr>
-          <a:xfrm>
-            <a:off x="457200" y="1517904"/>
-            <a:ext cx="384048" cy="384048"/>
+          <p:cNvPr id="2" name="Shape 0"/>
+          <p:cNvSpPr/>
+          <p:nvPr/>
+        </p:nvSpPr>
+        <p:spPr>
+          <a:xfrm>
+            <a:off x="2286000" y="457200"/>
+            <a:ext cx="4572000" cy="4572000"/>
           </a:xfrm>
           <a:prstGeom prst="ellipse">
             <a:avLst/>
           </a:prstGeom>
           <a:solidFill>
-            <a:srgbClr val="1E1E3A"/>
-          </a:solidFill>
-          <a:ln/>
-        </p:spPr>
-      </p:sp>
-      <p:pic>
-        <p:nvPicPr>
-          <p:cNvPr id="5" name="Image 0" descr="preencoded.png">    </p:cNvPr>
-          <p:cNvPicPr>
-            <a:picLocks noChangeAspect="1"/>
-          </p:cNvPicPr>
-          <p:nvPr/>
-        </p:nvPicPr>
-        <p:blipFill>
-          <a:blip r:embed="rId1"/>
-          <a:stretch>
-            <a:fillRect/>
-          </a:stretch>
-        </p:blipFill>
-        <p:spPr>
-          <a:xfrm>
-            <a:off x="521208" y="1581912"/>
-            <a:ext cx="256032" cy="256032"/>
-          </a:xfrm>
-          <a:prstGeom prst="rect">
-            <a:avLst/>
-          </a:prstGeom>
-        </p:spPr>
-      </p:pic>
-      <p:sp>
-        <p:nvSpPr>
-          <p:cNvPr id="6" name="Text 3"/>
-          <p:cNvSpPr/>
-          <p:nvPr/>
-        </p:nvSpPr>
-        <p:spPr>
-          <a:xfrm>
-            <a:off x="950976" y="1517904"/>
-            <a:ext cx="3840480" cy="228600"/>
-          </a:xfrm>
-          <a:prstGeom prst="rect">
-            <a:avLst/>
-          </a:prstGeom>
-          <a:noFill/>
-          <a:ln/>
-        </p:spPr>
-        <p:txBody>
-          <a:bodyPr wrap="square" lIns="0" tIns="0" rIns="0" bIns="0" rtlCol="0" anchor="ctr"/>
-          <a:lstStyle/>
-          <a:p>
-            <a:pPr algn="l" indent="0" marL="0">
-              <a:buNone/>
-            </a:pPr>
-            <a:r>
-              <a:rPr lang="en-US" sz="1500" b="1" dirty="0">
-                <a:solidFill>
-                  <a:srgbClr val="FFFFFF"/>
-                </a:solidFill>
-                <a:latin typeface="Calibri" pitchFamily="34" charset="0"/>
-                <a:ea typeface="Calibri" pitchFamily="34" charset="-122"/>
-                <a:cs typeface="Calibri" pitchFamily="34" charset="-120"/>
-              </a:rPr>
-              <a:t>Search by route &amp; time</a:t>
-            </a:r>
-            <a:endParaRPr lang="en-US" sz="1500" dirty="0"/>
-          </a:p>
-        </p:txBody>
-      </p:sp>
-      <p:sp>
-        <p:nvSpPr>
-          <p:cNvPr id="7" name="Text 4"/>
-          <p:cNvSpPr/>
-          <p:nvPr/>
-        </p:nvSpPr>
-        <p:spPr>
-          <a:xfrm>
-            <a:off x="950976" y="1755648"/>
-            <a:ext cx="3840480" cy="201168"/>
-          </a:xfrm>
-          <a:prstGeom prst="rect">
-            <a:avLst/>
-          </a:prstGeom>
-          <a:noFill/>
-          <a:ln/>
-        </p:spPr>
-        <p:txBody>
-          <a:bodyPr wrap="square" lIns="0" tIns="0" rIns="0" bIns="0" rtlCol="0" anchor="ctr"/>
-          <a:lstStyle/>
-          <a:p>
-            <a:pPr algn="l" indent="0" marL="0">
-              <a:buNone/>
-            </a:pPr>
-            <a:r>
-              <a:rPr lang="en-US" sz="1100" dirty="0">
-                <a:solidFill>
-                  <a:srgbClr val="9CA3AF"/>
-                </a:solidFill>
-                <a:latin typeface="Calibri" pitchFamily="34" charset="0"/>
-                <a:ea typeface="Calibri" pitchFamily="34" charset="-122"/>
-                <a:cs typeface="Calibri" pitchFamily="34" charset="-120"/>
-              </a:rPr>
-              <a:t>Match your schedule exactly.</a:t>
-            </a:r>
-            <a:endParaRPr lang="en-US" sz="1100" dirty="0"/>
-          </a:p>
-        </p:txBody>
-      </p:sp>
-      <p:sp>
-        <p:nvSpPr>
-          <p:cNvPr id="8" name="Shape 5"/>
-          <p:cNvSpPr/>
-          <p:nvPr/>
-        </p:nvSpPr>
-        <p:spPr>
-          <a:xfrm>
-            <a:off x="457200" y="2340864"/>
-            <a:ext cx="384048" cy="384048"/>
-          </a:xfrm>
-          <a:prstGeom prst="ellipse">
-            <a:avLst/>
-          </a:prstGeom>
-          <a:solidFill>
-            <a:srgbClr val="1E1E3A"/>
-          </a:solidFill>
-          <a:ln/>
-        </p:spPr>
-      </p:sp>
-      <p:pic>
-        <p:nvPicPr>
-          <p:cNvPr id="9" name="Image 1" descr="preencoded.png">    </p:cNvPr>
-          <p:cNvPicPr>
-            <a:picLocks noChangeAspect="1"/>
-          </p:cNvPicPr>
-          <p:nvPr/>
-        </p:nvPicPr>
-        <p:blipFill>
-          <a:blip r:embed="rId2"/>
-          <a:stretch>
-            <a:fillRect/>
-          </a:stretch>
-        </p:blipFill>
-        <p:spPr>
-          <a:xfrm>
-            <a:off x="521208" y="2404872"/>
-            <a:ext cx="256032" cy="256032"/>
-          </a:xfrm>
-          <a:prstGeom prst="rect">
-            <a:avLst/>
-          </a:prstGeom>
-        </p:spPr>
-      </p:pic>
-      <p:sp>
-        <p:nvSpPr>
-          <p:cNvPr id="10" name="Text 6"/>
-          <p:cNvSpPr/>
-          <p:nvPr/>
-        </p:nvSpPr>
-        <p:spPr>
-          <a:xfrm>
-            <a:off x="950976" y="2340864"/>
-            <a:ext cx="3840480" cy="228600"/>
-          </a:xfrm>
-          <a:prstGeom prst="rect">
-            <a:avLst/>
-          </a:prstGeom>
-          <a:noFill/>
-          <a:ln/>
-        </p:spPr>
-        <p:txBody>
-          <a:bodyPr wrap="square" lIns="0" tIns="0" rIns="0" bIns="0" rtlCol="0" anchor="ctr"/>
-          <a:lstStyle/>
-          <a:p>
-            <a:pPr algn="l" indent="0" marL="0">
-              <a:buNone/>
-            </a:pPr>
-            <a:r>
-              <a:rPr lang="en-US" sz="1500" b="1" dirty="0">
-                <a:solidFill>
-                  <a:srgbClr val="FFFFFF"/>
-                </a:solidFill>
-                <a:latin typeface="Calibri" pitchFamily="34" charset="0"/>
-                <a:ea typeface="Calibri" pitchFamily="34" charset="-122"/>
-                <a:cs typeface="Calibri" pitchFamily="34" charset="-120"/>
-              </a:rPr>
-              <a:t>Campus-verified community</a:t>
-            </a:r>
-            <a:endParaRPr lang="en-US" sz="1500" dirty="0"/>
-          </a:p>
-        </p:txBody>
-      </p:sp>
-      <p:sp>
-        <p:nvSpPr>
-          <p:cNvPr id="11" name="Text 7"/>
-          <p:cNvSpPr/>
-          <p:nvPr/>
-        </p:nvSpPr>
-        <p:spPr>
-          <a:xfrm>
-            <a:off x="950976" y="2578608"/>
-            <a:ext cx="3840480" cy="201168"/>
-          </a:xfrm>
-          <a:prstGeom prst="rect">
-            <a:avLst/>
-          </a:prstGeom>
-          <a:noFill/>
-          <a:ln/>
-        </p:spPr>
-        <p:txBody>
-          <a:bodyPr wrap="square" lIns="0" tIns="0" rIns="0" bIns="0" rtlCol="0" anchor="ctr"/>
-          <a:lstStyle/>
-          <a:p>
-            <a:pPr algn="l" indent="0" marL="0">
-              <a:buNone/>
-            </a:pPr>
-            <a:r>
-              <a:rPr lang="en-US" sz="1100" dirty="0">
-                <a:solidFill>
-                  <a:srgbClr val="9CA3AF"/>
-                </a:solidFill>
-                <a:latin typeface="Calibri" pitchFamily="34" charset="0"/>
-                <a:ea typeface="Calibri" pitchFamily="34" charset="-122"/>
-                <a:cs typeface="Calibri" pitchFamily="34" charset="-120"/>
-              </a:rPr>
-              <a:t>Students and faculty only.</a:t>
-            </a:r>
-            <a:endParaRPr lang="en-US" sz="1100" dirty="0"/>
-          </a:p>
-        </p:txBody>
-      </p:sp>
-      <p:sp>
-        <p:nvSpPr>
-          <p:cNvPr id="12" name="Shape 8"/>
-          <p:cNvSpPr/>
-          <p:nvPr/>
-        </p:nvSpPr>
-        <p:spPr>
-          <a:xfrm>
-            <a:off x="457200" y="3163824"/>
-            <a:ext cx="384048" cy="384048"/>
-          </a:xfrm>
-          <a:prstGeom prst="ellipse">
-            <a:avLst/>
-          </a:prstGeom>
-          <a:solidFill>
-            <a:srgbClr val="1E1E3A"/>
-          </a:solidFill>
-          <a:ln/>
-        </p:spPr>
-      </p:sp>
-      <p:pic>
-        <p:nvPicPr>
-          <p:cNvPr id="13" name="Image 2" descr="preencoded.png">    </p:cNvPr>
-          <p:cNvPicPr>
-            <a:picLocks noChangeAspect="1"/>
-          </p:cNvPicPr>
-          <p:nvPr/>
-        </p:nvPicPr>
-        <p:blipFill>
-          <a:blip r:embed="rId3"/>
-          <a:stretch>
-            <a:fillRect/>
-          </a:stretch>
-        </p:blipFill>
-        <p:spPr>
-          <a:xfrm>
-            <a:off x="521208" y="3227832"/>
-            <a:ext cx="256032" cy="256032"/>
-          </a:xfrm>
-          <a:prstGeom prst="rect">
-            <a:avLst/>
-          </a:prstGeom>
-        </p:spPr>
-      </p:pic>
-      <p:sp>
-        <p:nvSpPr>
-          <p:cNvPr id="14" name="Text 9"/>
-          <p:cNvSpPr/>
-          <p:nvPr/>
-        </p:nvSpPr>
-        <p:spPr>
-          <a:xfrm>
-            <a:off x="950976" y="3163824"/>
-            <a:ext cx="3840480" cy="228600"/>
-          </a:xfrm>
-          <a:prstGeom prst="rect">
-            <a:avLst/>
-          </a:prstGeom>
-          <a:noFill/>
-          <a:ln/>
-        </p:spPr>
-        <p:txBody>
-          <a:bodyPr wrap="square" lIns="0" tIns="0" rIns="0" bIns="0" rtlCol="0" anchor="ctr"/>
-          <a:lstStyle/>
-          <a:p>
-            <a:pPr algn="l" indent="0" marL="0">
-              <a:buNone/>
-            </a:pPr>
-            <a:r>
-              <a:rPr lang="en-US" sz="1500" b="1" dirty="0">
-                <a:solidFill>
-                  <a:srgbClr val="FFFFFF"/>
-                </a:solidFill>
-                <a:latin typeface="Calibri" pitchFamily="34" charset="0"/>
-                <a:ea typeface="Calibri" pitchFamily="34" charset="-122"/>
-                <a:cs typeface="Calibri" pitchFamily="34" charset="-120"/>
-              </a:rPr>
-              <a:t>Ratings after every ride</a:t>
-            </a:r>
-            <a:endParaRPr lang="en-US" sz="1500" dirty="0"/>
-          </a:p>
-        </p:txBody>
-      </p:sp>
-      <p:sp>
-        <p:nvSpPr>
-          <p:cNvPr id="15" name="Text 10"/>
-          <p:cNvSpPr/>
-          <p:nvPr/>
-        </p:nvSpPr>
-        <p:spPr>
-          <a:xfrm>
-            <a:off x="950976" y="3401568"/>
-            <a:ext cx="3840480" cy="201168"/>
-          </a:xfrm>
-          <a:prstGeom prst="rect">
-            <a:avLst/>
-          </a:prstGeom>
-          <a:noFill/>
-          <a:ln/>
-        </p:spPr>
-        <p:txBody>
-          <a:bodyPr wrap="square" lIns="0" tIns="0" rIns="0" bIns="0" rtlCol="0" anchor="ctr"/>
-          <a:lstStyle/>
-          <a:p>
-            <a:pPr algn="l" indent="0" marL="0">
-              <a:buNone/>
-            </a:pPr>
-            <a:r>
-              <a:rPr lang="en-US" sz="1100" dirty="0">
-                <a:solidFill>
-                  <a:srgbClr val="9CA3AF"/>
-                </a:solidFill>
-                <a:latin typeface="Calibri" pitchFamily="34" charset="0"/>
-                <a:ea typeface="Calibri" pitchFamily="34" charset="-122"/>
-                <a:cs typeface="Calibri" pitchFamily="34" charset="-120"/>
-              </a:rPr>
-              <a:t>Ride with people you trust.</a:t>
-            </a:r>
-            <a:endParaRPr lang="en-US" sz="1100" dirty="0"/>
-          </a:p>
-        </p:txBody>
-      </p:sp>
-      <p:sp>
-        <p:nvSpPr>
-          <p:cNvPr id="16" name="Shape 11"/>
-          <p:cNvSpPr/>
-          <p:nvPr/>
-        </p:nvSpPr>
-        <p:spPr>
-          <a:xfrm>
-            <a:off x="5760720" y="274320"/>
-            <a:ext cx="2926080" cy="4572000"/>
-          </a:xfrm>
-          <a:prstGeom prst="roundRect">
-            <a:avLst>
-              <a:gd name="adj" fmla="val 5625"/>
-            </a:avLst>
-          </a:prstGeom>
-          <a:solidFill>
-            <a:srgbClr val="1A1A32"/>
-          </a:solidFill>
-          <a:ln w="25400">
+            <a:srgbClr val="6366F1">
+              <a:alpha val="15000"/>
+            </a:srgbClr>
+          </a:solidFill>
+          <a:ln w="12700">
             <a:solidFill>
-              <a:srgbClr val="2E2E50"/>
+              <a:srgbClr val="6366F1">
+                <a:alpha val="15000"/>
+              </a:srgbClr>
             </a:solidFill>
             <a:prstDash val="solid"/>
           </a:ln>
-          <a:effectLst>
-            <a:outerShdw sx="100000" sy="100000" kx="0" ky="0" algn="bl" rotWithShape="0" blurRad="203200" dist="50800" dir="8100000">
-              <a:srgbClr val="000000">
-                <a:alpha val="35000"/>
-              </a:srgbClr>
-            </a:outerShdw>
-          </a:effectLst>
-        </p:spPr>
-      </p:sp>
-      <p:sp>
-        <p:nvSpPr>
-          <p:cNvPr id="17" name="Shape 12"/>
-          <p:cNvSpPr/>
-          <p:nvPr/>
-        </p:nvSpPr>
-        <p:spPr>
-          <a:xfrm>
-            <a:off x="5852160" y="475488"/>
-            <a:ext cx="2743200" cy="4187952"/>
-          </a:xfrm>
-          <a:prstGeom prst="rect">
-            <a:avLst/>
-          </a:prstGeom>
-          <a:solidFill>
-            <a:srgbClr val="0A0A1A"/>
-          </a:solidFill>
-          <a:ln/>
-        </p:spPr>
-      </p:sp>
-      <p:sp>
-        <p:nvSpPr>
-          <p:cNvPr id="18" name="Shape 13"/>
-          <p:cNvSpPr/>
-          <p:nvPr/>
-        </p:nvSpPr>
-        <p:spPr>
-          <a:xfrm>
-            <a:off x="7059168" y="338328"/>
-            <a:ext cx="329184" cy="91440"/>
+        </p:spPr>
+      </p:sp>
+      <p:sp>
+        <p:nvSpPr>
+          <p:cNvPr id="3" name="Text 1"/>
+          <p:cNvSpPr/>
+          <p:nvPr/>
+        </p:nvSpPr>
+        <p:spPr>
+          <a:xfrm>
+            <a:off x="914400" y="1005840"/>
+            <a:ext cx="7315200" cy="457200"/>
+          </a:xfrm>
+          <a:prstGeom prst="rect">
+            <a:avLst/>
+          </a:prstGeom>
+          <a:noFill/>
+          <a:ln/>
+        </p:spPr>
+        <p:txBody>
+          <a:bodyPr wrap="square" lIns="0" tIns="0" rIns="0" bIns="0" rtlCol="0" anchor="ctr"/>
+          <a:lstStyle/>
+          <a:p>
+            <a:pPr algn="ctr" indent="0" marL="0">
+              <a:buNone/>
+            </a:pPr>
+            <a:r>
+              <a:rPr lang="en-US" sz="2000" spc="800" kern="0" dirty="0">
+                <a:solidFill>
+                  <a:srgbClr val="A5B4FC"/>
+                </a:solidFill>
+                <a:latin typeface="Calibri" pitchFamily="34" charset="0"/>
+                <a:ea typeface="Calibri" pitchFamily="34" charset="-122"/>
+                <a:cs typeface="Calibri" pitchFamily="34" charset="-120"/>
+              </a:rPr>
+              <a:t>Introducing</a:t>
+            </a:r>
+            <a:endParaRPr lang="en-US" sz="2000" dirty="0"/>
+          </a:p>
+        </p:txBody>
+      </p:sp>
+      <p:sp>
+        <p:nvSpPr>
+          <p:cNvPr id="4" name="Text 2"/>
+          <p:cNvSpPr/>
+          <p:nvPr/>
+        </p:nvSpPr>
+        <p:spPr>
+          <a:xfrm>
+            <a:off x="914400" y="1508760"/>
+            <a:ext cx="7315200" cy="1188720"/>
+          </a:xfrm>
+          <a:prstGeom prst="rect">
+            <a:avLst/>
+          </a:prstGeom>
+          <a:noFill/>
+          <a:ln/>
+        </p:spPr>
+        <p:txBody>
+          <a:bodyPr wrap="square" lIns="0" tIns="0" rIns="0" bIns="0" rtlCol="0" anchor="ctr"/>
+          <a:lstStyle/>
+          <a:p>
+            <a:pPr algn="ctr" indent="0" marL="0">
+              <a:buNone/>
+            </a:pPr>
+            <a:r>
+              <a:rPr lang="en-US" sz="8000" b="1" dirty="0">
+                <a:solidFill>
+                  <a:srgbClr val="FFFFFF"/>
+                </a:solidFill>
+                <a:latin typeface="Calibri" pitchFamily="34" charset="0"/>
+                <a:ea typeface="Calibri" pitchFamily="34" charset="-122"/>
+                <a:cs typeface="Calibri" pitchFamily="34" charset="-120"/>
+              </a:rPr>
+              <a:t>UniRide</a:t>
+            </a:r>
+            <a:endParaRPr lang="en-US" sz="8000" dirty="0"/>
+          </a:p>
+        </p:txBody>
+      </p:sp>
+      <p:sp>
+        <p:nvSpPr>
+          <p:cNvPr id="5" name="Text 3"/>
+          <p:cNvSpPr/>
+          <p:nvPr/>
+        </p:nvSpPr>
+        <p:spPr>
+          <a:xfrm>
+            <a:off x="914400" y="2788920"/>
+            <a:ext cx="7315200" cy="411480"/>
+          </a:xfrm>
+          <a:prstGeom prst="rect">
+            <a:avLst/>
+          </a:prstGeom>
+          <a:noFill/>
+          <a:ln/>
+        </p:spPr>
+        <p:txBody>
+          <a:bodyPr wrap="square" lIns="0" tIns="0" rIns="0" bIns="0" rtlCol="0" anchor="ctr"/>
+          <a:lstStyle/>
+          <a:p>
+            <a:pPr algn="ctr" indent="0" marL="0">
+              <a:buNone/>
+            </a:pPr>
+            <a:r>
+              <a:rPr lang="en-US" sz="1700" dirty="0">
+                <a:solidFill>
+                  <a:srgbClr val="A5B4FC"/>
+                </a:solidFill>
+                <a:latin typeface="Calibri" pitchFamily="34" charset="0"/>
+                <a:ea typeface="Calibri" pitchFamily="34" charset="-122"/>
+                <a:cs typeface="Calibri" pitchFamily="34" charset="-120"/>
+              </a:rPr>
+              <a:t>Need a ride to campus — or have empty seats to share?</a:t>
+            </a:r>
+            <a:endParaRPr lang="en-US" sz="1700" dirty="0"/>
+          </a:p>
+        </p:txBody>
+      </p:sp>
+      <p:sp>
+        <p:nvSpPr>
+          <p:cNvPr id="6" name="Shape 4"/>
+          <p:cNvSpPr/>
+          <p:nvPr/>
+        </p:nvSpPr>
+        <p:spPr>
+          <a:xfrm>
+            <a:off x="2011680" y="3429000"/>
+            <a:ext cx="1463040" cy="411480"/>
           </a:xfrm>
           <a:prstGeom prst="roundRect">
             <a:avLst>
-              <a:gd name="adj" fmla="val 50000"/>
+              <a:gd name="adj" fmla="val 17778"/>
             </a:avLst>
           </a:prstGeom>
           <a:solidFill>
-            <a:srgbClr val="2E2E50"/>
-          </a:solidFill>
-          <a:ln/>
-        </p:spPr>
-      </p:sp>
-      <p:sp>
-        <p:nvSpPr>
-          <p:cNvPr id="19" name="Shape 14"/>
-          <p:cNvSpPr/>
-          <p:nvPr/>
-        </p:nvSpPr>
-        <p:spPr>
-          <a:xfrm>
-            <a:off x="6949440" y="4718304"/>
-            <a:ext cx="548640" cy="54864"/>
+            <a:srgbClr val="121224"/>
+          </a:solidFill>
+          <a:ln w="19050">
+            <a:solidFill>
+              <a:srgbClr val="6366F1"/>
+            </a:solidFill>
+            <a:prstDash val="solid"/>
+          </a:ln>
+        </p:spPr>
+      </p:sp>
+      <p:sp>
+        <p:nvSpPr>
+          <p:cNvPr id="7" name="Text 5"/>
+          <p:cNvSpPr/>
+          <p:nvPr/>
+        </p:nvSpPr>
+        <p:spPr>
+          <a:xfrm>
+            <a:off x="2011680" y="3429000"/>
+            <a:ext cx="1463040" cy="411480"/>
+          </a:xfrm>
+          <a:prstGeom prst="rect">
+            <a:avLst/>
+          </a:prstGeom>
+          <a:noFill/>
+          <a:ln/>
+        </p:spPr>
+        <p:txBody>
+          <a:bodyPr wrap="square" lIns="0" tIns="0" rIns="0" bIns="0" rtlCol="0" anchor="ctr"/>
+          <a:lstStyle/>
+          <a:p>
+            <a:pPr algn="ctr" indent="0" marL="0">
+              <a:buNone/>
+            </a:pPr>
+            <a:r>
+              <a:rPr lang="en-US" sz="1300" b="1" dirty="0">
+                <a:solidFill>
+                  <a:srgbClr val="6366F1"/>
+                </a:solidFill>
+                <a:latin typeface="Calibri" pitchFamily="34" charset="0"/>
+                <a:ea typeface="Calibri" pitchFamily="34" charset="-122"/>
+                <a:cs typeface="Calibri" pitchFamily="34" charset="-120"/>
+              </a:rPr>
+              <a:t>Trusted</a:t>
+            </a:r>
+            <a:endParaRPr lang="en-US" sz="1300" dirty="0"/>
+          </a:p>
+        </p:txBody>
+      </p:sp>
+      <p:sp>
+        <p:nvSpPr>
+          <p:cNvPr id="8" name="Shape 6"/>
+          <p:cNvSpPr/>
+          <p:nvPr/>
+        </p:nvSpPr>
+        <p:spPr>
+          <a:xfrm>
+            <a:off x="3840480" y="3429000"/>
+            <a:ext cx="1463040" cy="411480"/>
           </a:xfrm>
           <a:prstGeom prst="roundRect">
             <a:avLst>
-              <a:gd name="adj" fmla="val 50000"/>
+              <a:gd name="adj" fmla="val 17778"/>
             </a:avLst>
           </a:prstGeom>
           <a:solidFill>
-            <a:srgbClr val="2E2E50"/>
-          </a:solidFill>
-          <a:ln/>
-        </p:spPr>
-      </p:sp>
-      <p:sp>
-        <p:nvSpPr>
-          <p:cNvPr id="20" name="Shape 15"/>
-          <p:cNvSpPr/>
-          <p:nvPr/>
-        </p:nvSpPr>
-        <p:spPr>
-          <a:xfrm>
-            <a:off x="5852160" y="475488"/>
-            <a:ext cx="2743200" cy="274320"/>
-          </a:xfrm>
-          <a:prstGeom prst="rect">
-            <a:avLst/>
-          </a:prstGeom>
-          <a:solidFill>
-            <a:srgbClr val="111130"/>
-          </a:solidFill>
-          <a:ln/>
-        </p:spPr>
-      </p:sp>
-      <p:sp>
-        <p:nvSpPr>
-          <p:cNvPr id="21" name="Text 16"/>
-          <p:cNvSpPr/>
-          <p:nvPr/>
-        </p:nvSpPr>
-        <p:spPr>
-          <a:xfrm>
-            <a:off x="5852160" y="512064"/>
-            <a:ext cx="2743200" cy="201168"/>
+            <a:srgbClr val="121224"/>
+          </a:solidFill>
+          <a:ln w="19050">
+            <a:solidFill>
+              <a:srgbClr val="10B981"/>
+            </a:solidFill>
+            <a:prstDash val="solid"/>
+          </a:ln>
+        </p:spPr>
+      </p:sp>
+      <p:sp>
+        <p:nvSpPr>
+          <p:cNvPr id="9" name="Text 7"/>
+          <p:cNvSpPr/>
+          <p:nvPr/>
+        </p:nvSpPr>
+        <p:spPr>
+          <a:xfrm>
+            <a:off x="3840480" y="3429000"/>
+            <a:ext cx="1463040" cy="411480"/>
           </a:xfrm>
           <a:prstGeom prst="rect">
             <a:avLst/>
@@ -5131,30 +5814,57 @@
               <a:buNone/>
             </a:pPr>
             <a:r>
-              <a:rPr lang="en-US" sz="800" b="1" dirty="0">
-                <a:solidFill>
-                  <a:srgbClr val="A5B4FC"/>
-                </a:solidFill>
-                <a:latin typeface="Calibri" pitchFamily="34" charset="0"/>
-                <a:ea typeface="Calibri" pitchFamily="34" charset="-122"/>
-                <a:cs typeface="Calibri" pitchFamily="34" charset="-120"/>
-              </a:rPr>
-              <a:t>UniRide</a:t>
-            </a:r>
-            <a:endParaRPr lang="en-US" sz="800" dirty="0"/>
-          </a:p>
-        </p:txBody>
-      </p:sp>
-      <p:sp>
-        <p:nvSpPr>
-          <p:cNvPr id="22" name="Text 17"/>
-          <p:cNvSpPr/>
-          <p:nvPr/>
-        </p:nvSpPr>
-        <p:spPr>
-          <a:xfrm>
-            <a:off x="5852160" y="2340864"/>
-            <a:ext cx="2743200" cy="457200"/>
+              <a:rPr lang="en-US" sz="1300" b="1" dirty="0">
+                <a:solidFill>
+                  <a:srgbClr val="10B981"/>
+                </a:solidFill>
+                <a:latin typeface="Calibri" pitchFamily="34" charset="0"/>
+                <a:ea typeface="Calibri" pitchFamily="34" charset="-122"/>
+                <a:cs typeface="Calibri" pitchFamily="34" charset="-120"/>
+              </a:rPr>
+              <a:t>Affordable</a:t>
+            </a:r>
+            <a:endParaRPr lang="en-US" sz="1300" dirty="0"/>
+          </a:p>
+        </p:txBody>
+      </p:sp>
+      <p:sp>
+        <p:nvSpPr>
+          <p:cNvPr id="10" name="Shape 8"/>
+          <p:cNvSpPr/>
+          <p:nvPr/>
+        </p:nvSpPr>
+        <p:spPr>
+          <a:xfrm>
+            <a:off x="5669280" y="3429000"/>
+            <a:ext cx="1463040" cy="411480"/>
+          </a:xfrm>
+          <a:prstGeom prst="roundRect">
+            <a:avLst>
+              <a:gd name="adj" fmla="val 17778"/>
+            </a:avLst>
+          </a:prstGeom>
+          <a:solidFill>
+            <a:srgbClr val="121224"/>
+          </a:solidFill>
+          <a:ln w="19050">
+            <a:solidFill>
+              <a:srgbClr val="FBBF24"/>
+            </a:solidFill>
+            <a:prstDash val="solid"/>
+          </a:ln>
+        </p:spPr>
+      </p:sp>
+      <p:sp>
+        <p:nvSpPr>
+          <p:cNvPr id="11" name="Text 9"/>
+          <p:cNvSpPr/>
+          <p:nvPr/>
+        </p:nvSpPr>
+        <p:spPr>
+          <a:xfrm>
+            <a:off x="5669280" y="3429000"/>
+            <a:ext cx="1463040" cy="411480"/>
           </a:xfrm>
           <a:prstGeom prst="rect">
             <a:avLst/>
@@ -5170,34 +5880,17 @@
               <a:buNone/>
             </a:pPr>
             <a:r>
-              <a:rPr lang="en-US" sz="900" i="1" dirty="0">
-                <a:solidFill>
-                  <a:srgbClr val="2E2E55"/>
-                </a:solidFill>
-                <a:latin typeface="Calibri" pitchFamily="34" charset="0"/>
-                <a:ea typeface="Calibri" pitchFamily="34" charset="-122"/>
-                <a:cs typeface="Calibri" pitchFamily="34" charset="-120"/>
-              </a:rPr>
-              <a:t>Find a Ride</a:t>
-            </a:r>
-            <a:endParaRPr lang="en-US" sz="900" dirty="0"/>
-          </a:p>
-          <a:p>
-            <a:pPr algn="ctr" indent="0" marL="0">
-              <a:buNone/>
-            </a:pPr>
-            <a:r>
-              <a:rPr lang="en-US" sz="900" i="1" dirty="0">
-                <a:solidFill>
-                  <a:srgbClr val="2E2E55"/>
-                </a:solidFill>
-                <a:latin typeface="Calibri" pitchFamily="34" charset="0"/>
-                <a:ea typeface="Calibri" pitchFamily="34" charset="-122"/>
-                <a:cs typeface="Calibri" pitchFamily="34" charset="-120"/>
-              </a:rPr>
-              <a:t>Screen</a:t>
-            </a:r>
-            <a:endParaRPr lang="en-US" sz="900" dirty="0"/>
+              <a:rPr lang="en-US" sz="1300" b="1" dirty="0">
+                <a:solidFill>
+                  <a:srgbClr val="FBBF24"/>
+                </a:solidFill>
+                <a:latin typeface="Calibri" pitchFamily="34" charset="0"/>
+                <a:ea typeface="Calibri" pitchFamily="34" charset="-122"/>
+                <a:cs typeface="Calibri" pitchFamily="34" charset="-120"/>
+              </a:rPr>
+              <a:t>Seamless</a:t>
+            </a:r>
+            <a:endParaRPr lang="en-US" sz="1300" dirty="0"/>
           </a:p>
         </p:txBody>
       </p:sp>
@@ -5241,73 +5934,104 @@
         </p:nvSpPr>
         <p:spPr>
           <a:xfrm>
-            <a:off x="365760" y="274320"/>
-            <a:ext cx="2926080" cy="4572000"/>
-          </a:xfrm>
-          <a:prstGeom prst="roundRect">
-            <a:avLst>
-              <a:gd name="adj" fmla="val 5625"/>
-            </a:avLst>
-          </a:prstGeom>
-          <a:solidFill>
-            <a:srgbClr val="1A1A32"/>
-          </a:solidFill>
-          <a:ln w="25400">
+            <a:off x="5029200" y="457200"/>
+            <a:ext cx="4572000" cy="4572000"/>
+          </a:xfrm>
+          <a:prstGeom prst="ellipse">
+            <a:avLst/>
+          </a:prstGeom>
+          <a:solidFill>
+            <a:srgbClr val="6366F1">
+              <a:alpha val="8000"/>
+            </a:srgbClr>
+          </a:solidFill>
+          <a:ln w="12700">
             <a:solidFill>
-              <a:srgbClr val="2E2E50"/>
+              <a:srgbClr val="6366F1">
+                <a:alpha val="8000"/>
+              </a:srgbClr>
             </a:solidFill>
             <a:prstDash val="solid"/>
           </a:ln>
-          <a:effectLst>
-            <a:outerShdw sx="100000" sy="100000" kx="0" ky="0" algn="bl" rotWithShape="0" blurRad="203200" dist="50800" dir="8100000">
-              <a:srgbClr val="000000">
-                <a:alpha val="35000"/>
-              </a:srgbClr>
-            </a:outerShdw>
-          </a:effectLst>
-        </p:spPr>
-      </p:sp>
-      <p:sp>
-        <p:nvSpPr>
-          <p:cNvPr id="3" name="Shape 1"/>
-          <p:cNvSpPr/>
-          <p:nvPr/>
-        </p:nvSpPr>
-        <p:spPr>
-          <a:xfrm>
-            <a:off x="457200" y="475488"/>
-            <a:ext cx="2743200" cy="4187952"/>
-          </a:xfrm>
-          <a:prstGeom prst="rect">
-            <a:avLst/>
-          </a:prstGeom>
-          <a:solidFill>
-            <a:srgbClr val="0A0A1A"/>
-          </a:solidFill>
-          <a:ln/>
-        </p:spPr>
-      </p:sp>
-      <p:sp>
-        <p:nvSpPr>
-          <p:cNvPr id="4" name="Shape 2"/>
-          <p:cNvSpPr/>
-          <p:nvPr/>
-        </p:nvSpPr>
-        <p:spPr>
-          <a:xfrm>
-            <a:off x="1664208" y="338328"/>
-            <a:ext cx="329184" cy="91440"/>
-          </a:xfrm>
-          <a:prstGeom prst="roundRect">
-            <a:avLst>
-              <a:gd name="adj" fmla="val 50000"/>
-            </a:avLst>
-          </a:prstGeom>
-          <a:solidFill>
-            <a:srgbClr val="2E2E50"/>
-          </a:solidFill>
-          <a:ln/>
-        </p:spPr>
+        </p:spPr>
+      </p:sp>
+      <p:sp>
+        <p:nvSpPr>
+          <p:cNvPr id="3" name="Text 1"/>
+          <p:cNvSpPr/>
+          <p:nvPr/>
+        </p:nvSpPr>
+        <p:spPr>
+          <a:xfrm>
+            <a:off x="914400" y="1188720"/>
+            <a:ext cx="7315200" cy="914400"/>
+          </a:xfrm>
+          <a:prstGeom prst="rect">
+            <a:avLst/>
+          </a:prstGeom>
+          <a:noFill/>
+          <a:ln/>
+        </p:spPr>
+        <p:txBody>
+          <a:bodyPr wrap="square" lIns="0" tIns="0" rIns="0" bIns="0" rtlCol="0" anchor="ctr"/>
+          <a:lstStyle/>
+          <a:p>
+            <a:pPr algn="ctr" indent="0" marL="0">
+              <a:buNone/>
+            </a:pPr>
+            <a:r>
+              <a:rPr lang="en-US" sz="5600" b="1" dirty="0">
+                <a:solidFill>
+                  <a:srgbClr val="FFFFFF"/>
+                </a:solidFill>
+                <a:latin typeface="Calibri" pitchFamily="34" charset="0"/>
+                <a:ea typeface="Calibri" pitchFamily="34" charset="-122"/>
+                <a:cs typeface="Calibri" pitchFamily="34" charset="-120"/>
+              </a:rPr>
+              <a:t>Find a Ride</a:t>
+            </a:r>
+            <a:endParaRPr lang="en-US" sz="5600" dirty="0"/>
+          </a:p>
+        </p:txBody>
+      </p:sp>
+      <p:sp>
+        <p:nvSpPr>
+          <p:cNvPr id="4" name="Text 2"/>
+          <p:cNvSpPr/>
+          <p:nvPr/>
+        </p:nvSpPr>
+        <p:spPr>
+          <a:xfrm>
+            <a:off x="914400" y="2194560"/>
+            <a:ext cx="7315200" cy="365760"/>
+          </a:xfrm>
+          <a:prstGeom prst="rect">
+            <a:avLst/>
+          </a:prstGeom>
+          <a:noFill/>
+          <a:ln/>
+        </p:spPr>
+        <p:txBody>
+          <a:bodyPr wrap="square" lIns="0" tIns="0" rIns="0" bIns="0" rtlCol="0" anchor="ctr"/>
+          <a:lstStyle/>
+          <a:p>
+            <a:pPr algn="ctr" indent="0" marL="0">
+              <a:buNone/>
+            </a:pPr>
+            <a:r>
+              <a:rPr lang="en-US" sz="1600" dirty="0">
+                <a:solidFill>
+                  <a:srgbClr val="A5B4FC"/>
+                </a:solidFill>
+                <a:latin typeface="Calibri" pitchFamily="34" charset="0"/>
+                <a:ea typeface="Calibri" pitchFamily="34" charset="-122"/>
+                <a:cs typeface="Calibri" pitchFamily="34" charset="-120"/>
+              </a:rPr>
+              <a:t>Get to campus without the chaos.</a:t>
+            </a:r>
+            <a:endParaRPr lang="en-US" sz="1600" dirty="0"/>
+          </a:p>
+        </p:txBody>
       </p:sp>
       <p:sp>
         <p:nvSpPr>
@@ -5317,236 +6041,21 @@
         </p:nvSpPr>
         <p:spPr>
           <a:xfrm>
-            <a:off x="1554480" y="4718304"/>
-            <a:ext cx="548640" cy="54864"/>
-          </a:xfrm>
-          <a:prstGeom prst="roundRect">
-            <a:avLst>
-              <a:gd name="adj" fmla="val 50000"/>
-            </a:avLst>
-          </a:prstGeom>
-          <a:solidFill>
-            <a:srgbClr val="2E2E50"/>
-          </a:solidFill>
-          <a:ln/>
-        </p:spPr>
-      </p:sp>
-      <p:sp>
-        <p:nvSpPr>
-          <p:cNvPr id="6" name="Shape 4"/>
-          <p:cNvSpPr/>
-          <p:nvPr/>
-        </p:nvSpPr>
-        <p:spPr>
-          <a:xfrm>
-            <a:off x="457200" y="475488"/>
-            <a:ext cx="2743200" cy="274320"/>
-          </a:xfrm>
-          <a:prstGeom prst="rect">
-            <a:avLst/>
-          </a:prstGeom>
-          <a:solidFill>
-            <a:srgbClr val="111130"/>
-          </a:solidFill>
-          <a:ln/>
-        </p:spPr>
-      </p:sp>
-      <p:sp>
-        <p:nvSpPr>
-          <p:cNvPr id="7" name="Text 5"/>
-          <p:cNvSpPr/>
-          <p:nvPr/>
-        </p:nvSpPr>
-        <p:spPr>
-          <a:xfrm>
-            <a:off x="457200" y="512064"/>
-            <a:ext cx="2743200" cy="201168"/>
-          </a:xfrm>
-          <a:prstGeom prst="rect">
-            <a:avLst/>
-          </a:prstGeom>
-          <a:noFill/>
-          <a:ln/>
-        </p:spPr>
-        <p:txBody>
-          <a:bodyPr wrap="square" lIns="0" tIns="0" rIns="0" bIns="0" rtlCol="0" anchor="ctr"/>
-          <a:lstStyle/>
-          <a:p>
-            <a:pPr algn="ctr" indent="0" marL="0">
-              <a:buNone/>
-            </a:pPr>
-            <a:r>
-              <a:rPr lang="en-US" sz="800" b="1" dirty="0">
-                <a:solidFill>
-                  <a:srgbClr val="10B981"/>
-                </a:solidFill>
-                <a:latin typeface="Calibri" pitchFamily="34" charset="0"/>
-                <a:ea typeface="Calibri" pitchFamily="34" charset="-122"/>
-                <a:cs typeface="Calibri" pitchFamily="34" charset="-120"/>
-              </a:rPr>
-              <a:t>UniRide</a:t>
-            </a:r>
-            <a:endParaRPr lang="en-US" sz="800" dirty="0"/>
-          </a:p>
-        </p:txBody>
-      </p:sp>
-      <p:sp>
-        <p:nvSpPr>
-          <p:cNvPr id="8" name="Text 6"/>
-          <p:cNvSpPr/>
-          <p:nvPr/>
-        </p:nvSpPr>
-        <p:spPr>
-          <a:xfrm>
-            <a:off x="457200" y="2340864"/>
-            <a:ext cx="2743200" cy="457200"/>
-          </a:xfrm>
-          <a:prstGeom prst="rect">
-            <a:avLst/>
-          </a:prstGeom>
-          <a:noFill/>
-          <a:ln/>
-        </p:spPr>
-        <p:txBody>
-          <a:bodyPr wrap="square" lIns="0" tIns="0" rIns="0" bIns="0" rtlCol="0" anchor="ctr"/>
-          <a:lstStyle/>
-          <a:p>
-            <a:pPr algn="ctr" indent="0" marL="0">
-              <a:buNone/>
-            </a:pPr>
-            <a:r>
-              <a:rPr lang="en-US" sz="900" i="1" dirty="0">
-                <a:solidFill>
-                  <a:srgbClr val="2E2E55"/>
-                </a:solidFill>
-                <a:latin typeface="Calibri" pitchFamily="34" charset="0"/>
-                <a:ea typeface="Calibri" pitchFamily="34" charset="-122"/>
-                <a:cs typeface="Calibri" pitchFamily="34" charset="-120"/>
-              </a:rPr>
-              <a:t>Offer a Ride</a:t>
-            </a:r>
-            <a:endParaRPr lang="en-US" sz="900" dirty="0"/>
-          </a:p>
-          <a:p>
-            <a:pPr algn="ctr" indent="0" marL="0">
-              <a:buNone/>
-            </a:pPr>
-            <a:r>
-              <a:rPr lang="en-US" sz="900" i="1" dirty="0">
-                <a:solidFill>
-                  <a:srgbClr val="2E2E55"/>
-                </a:solidFill>
-                <a:latin typeface="Calibri" pitchFamily="34" charset="0"/>
-                <a:ea typeface="Calibri" pitchFamily="34" charset="-122"/>
-                <a:cs typeface="Calibri" pitchFamily="34" charset="-120"/>
-              </a:rPr>
-              <a:t>Screen</a:t>
-            </a:r>
-            <a:endParaRPr lang="en-US" sz="900" dirty="0"/>
-          </a:p>
-        </p:txBody>
-      </p:sp>
-      <p:sp>
-        <p:nvSpPr>
-          <p:cNvPr id="9" name="Text 7"/>
-          <p:cNvSpPr/>
-          <p:nvPr/>
-        </p:nvSpPr>
-        <p:spPr>
-          <a:xfrm>
-            <a:off x="4114800" y="365760"/>
-            <a:ext cx="4663440" cy="594360"/>
-          </a:xfrm>
-          <a:prstGeom prst="rect">
-            <a:avLst/>
-          </a:prstGeom>
-          <a:noFill/>
-          <a:ln/>
-        </p:spPr>
-        <p:txBody>
-          <a:bodyPr wrap="square" lIns="0" tIns="0" rIns="0" bIns="0" rtlCol="0" anchor="ctr"/>
-          <a:lstStyle/>
-          <a:p>
-            <a:pPr algn="l" indent="0" marL="0">
-              <a:buNone/>
-            </a:pPr>
-            <a:r>
-              <a:rPr lang="en-US" sz="3600" b="1" dirty="0">
-                <a:solidFill>
-                  <a:srgbClr val="FFFFFF"/>
-                </a:solidFill>
-                <a:latin typeface="Calibri" pitchFamily="34" charset="0"/>
-                <a:ea typeface="Calibri" pitchFamily="34" charset="-122"/>
-                <a:cs typeface="Calibri" pitchFamily="34" charset="-120"/>
-              </a:rPr>
-              <a:t>Offer a Ride</a:t>
-            </a:r>
-            <a:endParaRPr lang="en-US" sz="3600" dirty="0"/>
-          </a:p>
-        </p:txBody>
-      </p:sp>
-      <p:sp>
-        <p:nvSpPr>
-          <p:cNvPr id="10" name="Text 8"/>
-          <p:cNvSpPr/>
-          <p:nvPr/>
-        </p:nvSpPr>
-        <p:spPr>
-          <a:xfrm>
-            <a:off x="4114800" y="1005840"/>
-            <a:ext cx="4663440" cy="320040"/>
-          </a:xfrm>
-          <a:prstGeom prst="rect">
-            <a:avLst/>
-          </a:prstGeom>
-          <a:noFill/>
-          <a:ln/>
-        </p:spPr>
-        <p:txBody>
-          <a:bodyPr wrap="square" lIns="0" tIns="0" rIns="0" bIns="0" rtlCol="0" anchor="ctr"/>
-          <a:lstStyle/>
-          <a:p>
-            <a:pPr algn="l" indent="0" marL="0">
-              <a:buNone/>
-            </a:pPr>
-            <a:r>
-              <a:rPr lang="en-US" sz="1300" dirty="0">
-                <a:solidFill>
-                  <a:srgbClr val="10B981"/>
-                </a:solidFill>
-                <a:latin typeface="Calibri" pitchFamily="34" charset="0"/>
-                <a:ea typeface="Calibri" pitchFamily="34" charset="-122"/>
-                <a:cs typeface="Calibri" pitchFamily="34" charset="-120"/>
-              </a:rPr>
-              <a:t>Turn your daily drive into shared value.</a:t>
-            </a:r>
-            <a:endParaRPr lang="en-US" sz="1300" dirty="0"/>
-          </a:p>
-        </p:txBody>
-      </p:sp>
-      <p:sp>
-        <p:nvSpPr>
-          <p:cNvPr id="11" name="Shape 9"/>
-          <p:cNvSpPr/>
-          <p:nvPr/>
-        </p:nvSpPr>
-        <p:spPr>
-          <a:xfrm>
-            <a:off x="4114800" y="1517904"/>
-            <a:ext cx="384048" cy="384048"/>
+            <a:off x="1737360" y="2971800"/>
+            <a:ext cx="475488" cy="475488"/>
           </a:xfrm>
           <a:prstGeom prst="ellipse">
             <a:avLst/>
           </a:prstGeom>
           <a:solidFill>
-            <a:srgbClr val="1E1E3A"/>
+            <a:srgbClr val="1A1A38"/>
           </a:solidFill>
           <a:ln/>
         </p:spPr>
       </p:sp>
       <p:pic>
         <p:nvPicPr>
-          <p:cNvPr id="12" name="Image 0" descr="preencoded.png">    </p:cNvPr>
+          <p:cNvPr id="6" name="Image 0" descr="preencoded.png">    </p:cNvPr>
           <p:cNvPicPr>
             <a:picLocks noChangeAspect="1"/>
           </p:cNvPicPr>
@@ -5560,7 +6069,7 @@
         </p:blipFill>
         <p:spPr>
           <a:xfrm>
-            <a:off x="4178808" y="1581912"/>
+            <a:off x="1847088" y="3081528"/>
             <a:ext cx="256032" cy="256032"/>
           </a:xfrm>
           <a:prstGeom prst="rect">
@@ -5570,14 +6079,14 @@
       </p:pic>
       <p:sp>
         <p:nvSpPr>
-          <p:cNvPr id="13" name="Text 10"/>
-          <p:cNvSpPr/>
-          <p:nvPr/>
-        </p:nvSpPr>
-        <p:spPr>
-          <a:xfrm>
-            <a:off x="4608576" y="1517904"/>
-            <a:ext cx="3840480" cy="228600"/>
+          <p:cNvPr id="7" name="Text 4"/>
+          <p:cNvSpPr/>
+          <p:nvPr/>
+        </p:nvSpPr>
+        <p:spPr>
+          <a:xfrm>
+            <a:off x="914400" y="3566160"/>
+            <a:ext cx="2286000" cy="329184"/>
           </a:xfrm>
           <a:prstGeom prst="rect">
             <a:avLst/>
@@ -5589,11 +6098,11 @@
           <a:bodyPr wrap="square" lIns="0" tIns="0" rIns="0" bIns="0" rtlCol="0" anchor="ctr"/>
           <a:lstStyle/>
           <a:p>
-            <a:pPr algn="l" indent="0" marL="0">
-              <a:buNone/>
-            </a:pPr>
-            <a:r>
-              <a:rPr lang="en-US" sz="1500" b="1" dirty="0">
+            <a:pPr algn="ctr" indent="0" marL="0">
+              <a:buNone/>
+            </a:pPr>
+            <a:r>
+              <a:rPr lang="en-US" sz="1300" b="1" dirty="0">
                 <a:solidFill>
                   <a:srgbClr val="FFFFFF"/>
                 </a:solidFill>
@@ -5601,74 +6110,35 @@
                 <a:ea typeface="Calibri" pitchFamily="34" charset="-122"/>
                 <a:cs typeface="Calibri" pitchFamily="34" charset="-120"/>
               </a:rPr>
-              <a:t>Plan route with maps</a:t>
-            </a:r>
-            <a:endParaRPr lang="en-US" sz="1500" dirty="0"/>
-          </a:p>
-        </p:txBody>
-      </p:sp>
-      <p:sp>
-        <p:nvSpPr>
-          <p:cNvPr id="14" name="Text 11"/>
-          <p:cNvSpPr/>
-          <p:nvPr/>
-        </p:nvSpPr>
-        <p:spPr>
-          <a:xfrm>
-            <a:off x="4608576" y="1755648"/>
-            <a:ext cx="3840480" cy="201168"/>
-          </a:xfrm>
-          <a:prstGeom prst="rect">
-            <a:avLst/>
-          </a:prstGeom>
-          <a:noFill/>
-          <a:ln/>
-        </p:spPr>
-        <p:txBody>
-          <a:bodyPr wrap="square" lIns="0" tIns="0" rIns="0" bIns="0" rtlCol="0" anchor="ctr"/>
-          <a:lstStyle/>
-          <a:p>
-            <a:pPr algn="l" indent="0" marL="0">
-              <a:buNone/>
-            </a:pPr>
-            <a:r>
-              <a:rPr lang="en-US" sz="1100" dirty="0">
-                <a:solidFill>
-                  <a:srgbClr val="9CA3AF"/>
-                </a:solidFill>
-                <a:latin typeface="Calibri" pitchFamily="34" charset="0"/>
-                <a:ea typeface="Calibri" pitchFamily="34" charset="-122"/>
-                <a:cs typeface="Calibri" pitchFamily="34" charset="-120"/>
-              </a:rPr>
-              <a:t>Set stops and departure times.</a:t>
-            </a:r>
-            <a:endParaRPr lang="en-US" sz="1100" dirty="0"/>
-          </a:p>
-        </p:txBody>
-      </p:sp>
-      <p:sp>
-        <p:nvSpPr>
-          <p:cNvPr id="15" name="Shape 12"/>
-          <p:cNvSpPr/>
-          <p:nvPr/>
-        </p:nvSpPr>
-        <p:spPr>
-          <a:xfrm>
-            <a:off x="4114800" y="2340864"/>
-            <a:ext cx="384048" cy="384048"/>
+              <a:t>Search by route &amp; time</a:t>
+            </a:r>
+            <a:endParaRPr lang="en-US" sz="1300" dirty="0"/>
+          </a:p>
+        </p:txBody>
+      </p:sp>
+      <p:sp>
+        <p:nvSpPr>
+          <p:cNvPr id="8" name="Shape 5"/>
+          <p:cNvSpPr/>
+          <p:nvPr/>
+        </p:nvSpPr>
+        <p:spPr>
+          <a:xfrm>
+            <a:off x="4343400" y="2971800"/>
+            <a:ext cx="475488" cy="475488"/>
           </a:xfrm>
           <a:prstGeom prst="ellipse">
             <a:avLst/>
           </a:prstGeom>
           <a:solidFill>
-            <a:srgbClr val="1E1E3A"/>
+            <a:srgbClr val="1A1A38"/>
           </a:solidFill>
           <a:ln/>
         </p:spPr>
       </p:sp>
       <p:pic>
         <p:nvPicPr>
-          <p:cNvPr id="16" name="Image 1" descr="preencoded.png">    </p:cNvPr>
+          <p:cNvPr id="9" name="Image 1" descr="preencoded.png">    </p:cNvPr>
           <p:cNvPicPr>
             <a:picLocks noChangeAspect="1"/>
           </p:cNvPicPr>
@@ -5682,7 +6152,7 @@
         </p:blipFill>
         <p:spPr>
           <a:xfrm>
-            <a:off x="4178808" y="2404872"/>
+            <a:off x="4453128" y="3081528"/>
             <a:ext cx="256032" cy="256032"/>
           </a:xfrm>
           <a:prstGeom prst="rect">
@@ -5692,14 +6162,14 @@
       </p:pic>
       <p:sp>
         <p:nvSpPr>
-          <p:cNvPr id="17" name="Text 13"/>
-          <p:cNvSpPr/>
-          <p:nvPr/>
-        </p:nvSpPr>
-        <p:spPr>
-          <a:xfrm>
-            <a:off x="4608576" y="2340864"/>
-            <a:ext cx="3840480" cy="228600"/>
+          <p:cNvPr id="10" name="Text 6"/>
+          <p:cNvSpPr/>
+          <p:nvPr/>
+        </p:nvSpPr>
+        <p:spPr>
+          <a:xfrm>
+            <a:off x="3520440" y="3566160"/>
+            <a:ext cx="2286000" cy="329184"/>
           </a:xfrm>
           <a:prstGeom prst="rect">
             <a:avLst/>
@@ -5711,11 +6181,11 @@
           <a:bodyPr wrap="square" lIns="0" tIns="0" rIns="0" bIns="0" rtlCol="0" anchor="ctr"/>
           <a:lstStyle/>
           <a:p>
-            <a:pPr algn="l" indent="0" marL="0">
-              <a:buNone/>
-            </a:pPr>
-            <a:r>
-              <a:rPr lang="en-US" sz="1500" b="1" dirty="0">
+            <a:pPr algn="ctr" indent="0" marL="0">
+              <a:buNone/>
+            </a:pPr>
+            <a:r>
+              <a:rPr lang="en-US" sz="1300" b="1" dirty="0">
                 <a:solidFill>
                   <a:srgbClr val="FFFFFF"/>
                 </a:solidFill>
@@ -5723,74 +6193,35 @@
                 <a:ea typeface="Calibri" pitchFamily="34" charset="-122"/>
                 <a:cs typeface="Calibri" pitchFamily="34" charset="-120"/>
               </a:rPr>
-              <a:t>Split fuel costs</a:t>
-            </a:r>
-            <a:endParaRPr lang="en-US" sz="1500" dirty="0"/>
-          </a:p>
-        </p:txBody>
-      </p:sp>
-      <p:sp>
-        <p:nvSpPr>
-          <p:cNvPr id="18" name="Text 14"/>
-          <p:cNvSpPr/>
-          <p:nvPr/>
-        </p:nvSpPr>
-        <p:spPr>
-          <a:xfrm>
-            <a:off x="4608576" y="2578608"/>
-            <a:ext cx="3840480" cy="201168"/>
-          </a:xfrm>
-          <a:prstGeom prst="rect">
-            <a:avLst/>
-          </a:prstGeom>
-          <a:noFill/>
-          <a:ln/>
-        </p:spPr>
-        <p:txBody>
-          <a:bodyPr wrap="square" lIns="0" tIns="0" rIns="0" bIns="0" rtlCol="0" anchor="ctr"/>
-          <a:lstStyle/>
-          <a:p>
-            <a:pPr algn="l" indent="0" marL="0">
-              <a:buNone/>
-            </a:pPr>
-            <a:r>
-              <a:rPr lang="en-US" sz="1100" dirty="0">
-                <a:solidFill>
-                  <a:srgbClr val="9CA3AF"/>
-                </a:solidFill>
-                <a:latin typeface="Calibri" pitchFamily="34" charset="0"/>
-                <a:ea typeface="Calibri" pitchFamily="34" charset="-122"/>
-                <a:cs typeface="Calibri" pitchFamily="34" charset="-120"/>
-              </a:rPr>
-              <a:t>Offer 1–4 seats at fair prices.</a:t>
-            </a:r>
-            <a:endParaRPr lang="en-US" sz="1100" dirty="0"/>
-          </a:p>
-        </p:txBody>
-      </p:sp>
-      <p:sp>
-        <p:nvSpPr>
-          <p:cNvPr id="19" name="Shape 15"/>
-          <p:cNvSpPr/>
-          <p:nvPr/>
-        </p:nvSpPr>
-        <p:spPr>
-          <a:xfrm>
-            <a:off x="4114800" y="3163824"/>
-            <a:ext cx="384048" cy="384048"/>
+              <a:t>Campus-verified riders</a:t>
+            </a:r>
+            <a:endParaRPr lang="en-US" sz="1300" dirty="0"/>
+          </a:p>
+        </p:txBody>
+      </p:sp>
+      <p:sp>
+        <p:nvSpPr>
+          <p:cNvPr id="11" name="Shape 7"/>
+          <p:cNvSpPr/>
+          <p:nvPr/>
+        </p:nvSpPr>
+        <p:spPr>
+          <a:xfrm>
+            <a:off x="6949440" y="2971800"/>
+            <a:ext cx="475488" cy="475488"/>
           </a:xfrm>
           <a:prstGeom prst="ellipse">
             <a:avLst/>
           </a:prstGeom>
           <a:solidFill>
-            <a:srgbClr val="1E1E3A"/>
+            <a:srgbClr val="1A1A38"/>
           </a:solidFill>
           <a:ln/>
         </p:spPr>
       </p:sp>
       <p:pic>
         <p:nvPicPr>
-          <p:cNvPr id="20" name="Image 2" descr="preencoded.png">    </p:cNvPr>
+          <p:cNvPr id="12" name="Image 2" descr="preencoded.png">    </p:cNvPr>
           <p:cNvPicPr>
             <a:picLocks noChangeAspect="1"/>
           </p:cNvPicPr>
@@ -5804,7 +6235,7 @@
         </p:blipFill>
         <p:spPr>
           <a:xfrm>
-            <a:off x="4178808" y="3227832"/>
+            <a:off x="7059168" y="3081528"/>
             <a:ext cx="256032" cy="256032"/>
           </a:xfrm>
           <a:prstGeom prst="rect">
@@ -5814,14 +6245,14 @@
       </p:pic>
       <p:sp>
         <p:nvSpPr>
-          <p:cNvPr id="21" name="Text 16"/>
-          <p:cNvSpPr/>
-          <p:nvPr/>
-        </p:nvSpPr>
-        <p:spPr>
-          <a:xfrm>
-            <a:off x="4608576" y="3163824"/>
-            <a:ext cx="3840480" cy="228600"/>
+          <p:cNvPr id="13" name="Text 8"/>
+          <p:cNvSpPr/>
+          <p:nvPr/>
+        </p:nvSpPr>
+        <p:spPr>
+          <a:xfrm>
+            <a:off x="6126480" y="3566160"/>
+            <a:ext cx="2286000" cy="329184"/>
           </a:xfrm>
           <a:prstGeom prst="rect">
             <a:avLst/>
@@ -5833,11 +6264,11 @@
           <a:bodyPr wrap="square" lIns="0" tIns="0" rIns="0" bIns="0" rtlCol="0" anchor="ctr"/>
           <a:lstStyle/>
           <a:p>
-            <a:pPr algn="l" indent="0" marL="0">
-              <a:buNone/>
-            </a:pPr>
-            <a:r>
-              <a:rPr lang="en-US" sz="1500" b="1" dirty="0">
+            <a:pPr algn="ctr" indent="0" marL="0">
+              <a:buNone/>
+            </a:pPr>
+            <a:r>
+              <a:rPr lang="en-US" sz="1300" b="1" dirty="0">
                 <a:solidFill>
                   <a:srgbClr val="FFFFFF"/>
                 </a:solidFill>
@@ -5845,48 +6276,9 @@
                 <a:ea typeface="Calibri" pitchFamily="34" charset="-122"/>
                 <a:cs typeface="Calibri" pitchFamily="34" charset="-120"/>
               </a:rPr>
-              <a:t>You approve every rider</a:t>
-            </a:r>
-            <a:endParaRPr lang="en-US" sz="1500" dirty="0"/>
-          </a:p>
-        </p:txBody>
-      </p:sp>
-      <p:sp>
-        <p:nvSpPr>
-          <p:cNvPr id="22" name="Text 17"/>
-          <p:cNvSpPr/>
-          <p:nvPr/>
-        </p:nvSpPr>
-        <p:spPr>
-          <a:xfrm>
-            <a:off x="4608576" y="3401568"/>
-            <a:ext cx="3840480" cy="201168"/>
-          </a:xfrm>
-          <a:prstGeom prst="rect">
-            <a:avLst/>
-          </a:prstGeom>
-          <a:noFill/>
-          <a:ln/>
-        </p:spPr>
-        <p:txBody>
-          <a:bodyPr wrap="square" lIns="0" tIns="0" rIns="0" bIns="0" rtlCol="0" anchor="ctr"/>
-          <a:lstStyle/>
-          <a:p>
-            <a:pPr algn="l" indent="0" marL="0">
-              <a:buNone/>
-            </a:pPr>
-            <a:r>
-              <a:rPr lang="en-US" sz="1100" dirty="0">
-                <a:solidFill>
-                  <a:srgbClr val="9CA3AF"/>
-                </a:solidFill>
-                <a:latin typeface="Calibri" pitchFamily="34" charset="0"/>
-                <a:ea typeface="Calibri" pitchFamily="34" charset="-122"/>
-                <a:cs typeface="Calibri" pitchFamily="34" charset="-120"/>
-              </a:rPr>
-              <a:t>Review profiles before confirming.</a:t>
-            </a:r>
-            <a:endParaRPr lang="en-US" sz="1100" dirty="0"/>
+              <a:t>Ratings after every ride</a:t>
+            </a:r>
+            <a:endParaRPr lang="en-US" sz="1300" dirty="0"/>
           </a:p>
         </p:txBody>
       </p:sp>
@@ -5924,14 +6316,43 @@
       </p:grpSpPr>
       <p:sp>
         <p:nvSpPr>
-          <p:cNvPr id="2" name="Text 0"/>
-          <p:cNvSpPr/>
-          <p:nvPr/>
-        </p:nvSpPr>
-        <p:spPr>
-          <a:xfrm>
-            <a:off x="548640" y="256032"/>
-            <a:ext cx="8046720" cy="594360"/>
+          <p:cNvPr id="2" name="Shape 0"/>
+          <p:cNvSpPr/>
+          <p:nvPr/>
+        </p:nvSpPr>
+        <p:spPr>
+          <a:xfrm>
+            <a:off x="5029200" y="457200"/>
+            <a:ext cx="4572000" cy="4572000"/>
+          </a:xfrm>
+          <a:prstGeom prst="ellipse">
+            <a:avLst/>
+          </a:prstGeom>
+          <a:solidFill>
+            <a:srgbClr val="10B981">
+              <a:alpha val="8000"/>
+            </a:srgbClr>
+          </a:solidFill>
+          <a:ln w="12700">
+            <a:solidFill>
+              <a:srgbClr val="10B981">
+                <a:alpha val="8000"/>
+              </a:srgbClr>
+            </a:solidFill>
+            <a:prstDash val="solid"/>
+          </a:ln>
+        </p:spPr>
+      </p:sp>
+      <p:sp>
+        <p:nvSpPr>
+          <p:cNvPr id="3" name="Text 1"/>
+          <p:cNvSpPr/>
+          <p:nvPr/>
+        </p:nvSpPr>
+        <p:spPr>
+          <a:xfrm>
+            <a:off x="914400" y="1188720"/>
+            <a:ext cx="7315200" cy="914400"/>
           </a:xfrm>
           <a:prstGeom prst="rect">
             <a:avLst/>
@@ -5947,7 +6368,7 @@
               <a:buNone/>
             </a:pPr>
             <a:r>
-              <a:rPr lang="en-US" sz="3400" b="1" dirty="0">
+              <a:rPr lang="en-US" sz="5600" b="1" dirty="0">
                 <a:solidFill>
                   <a:srgbClr val="FFFFFF"/>
                 </a:solidFill>
@@ -5955,22 +6376,22 @@
                 <a:ea typeface="Calibri" pitchFamily="34" charset="-122"/>
                 <a:cs typeface="Calibri" pitchFamily="34" charset="-120"/>
               </a:rPr>
-              <a:t>More than just a ride.</a:t>
-            </a:r>
-            <a:endParaRPr lang="en-US" sz="3400" dirty="0"/>
-          </a:p>
-        </p:txBody>
-      </p:sp>
-      <p:sp>
-        <p:nvSpPr>
-          <p:cNvPr id="3" name="Text 1"/>
-          <p:cNvSpPr/>
-          <p:nvPr/>
-        </p:nvSpPr>
-        <p:spPr>
-          <a:xfrm>
-            <a:off x="548640" y="886968"/>
-            <a:ext cx="8046720" cy="320040"/>
+              <a:t>Offer a Ride</a:t>
+            </a:r>
+            <a:endParaRPr lang="en-US" sz="5600" dirty="0"/>
+          </a:p>
+        </p:txBody>
+      </p:sp>
+      <p:sp>
+        <p:nvSpPr>
+          <p:cNvPr id="4" name="Text 2"/>
+          <p:cNvSpPr/>
+          <p:nvPr/>
+        </p:nvSpPr>
+        <p:spPr>
+          <a:xfrm>
+            <a:off x="914400" y="2194560"/>
+            <a:ext cx="7315200" cy="365760"/>
           </a:xfrm>
           <a:prstGeom prst="rect">
             <a:avLst/>
@@ -5986,46 +6407,19 @@
               <a:buNone/>
             </a:pPr>
             <a:r>
-              <a:rPr lang="en-US" sz="1300" dirty="0">
-                <a:solidFill>
-                  <a:srgbClr val="9CA3AF"/>
-                </a:solidFill>
-                <a:latin typeface="Calibri" pitchFamily="34" charset="0"/>
-                <a:ea typeface="Calibri" pitchFamily="34" charset="-122"/>
-                <a:cs typeface="Calibri" pitchFamily="34" charset="-120"/>
-              </a:rPr>
-              <a:t>UniRide connects your campus — beyond the commute.</a:t>
-            </a:r>
-            <a:endParaRPr lang="en-US" sz="1300" dirty="0"/>
-          </a:p>
-        </p:txBody>
-      </p:sp>
-      <p:sp>
-        <p:nvSpPr>
-          <p:cNvPr id="4" name="Shape 2"/>
-          <p:cNvSpPr/>
-          <p:nvPr/>
-        </p:nvSpPr>
-        <p:spPr>
-          <a:xfrm>
-            <a:off x="457200" y="1417320"/>
-            <a:ext cx="3931920" cy="3337560"/>
-          </a:xfrm>
-          <a:prstGeom prst="rect">
-            <a:avLst/>
-          </a:prstGeom>
-          <a:solidFill>
-            <a:srgbClr val="111124"/>
-          </a:solidFill>
-          <a:ln/>
-          <a:effectLst>
-            <a:outerShdw sx="100000" sy="100000" kx="0" ky="0" algn="bl" rotWithShape="0" blurRad="203200" dist="50800" dir="8100000">
-              <a:srgbClr val="000000">
-                <a:alpha val="35000"/>
-              </a:srgbClr>
-            </a:outerShdw>
-          </a:effectLst>
-        </p:spPr>
+              <a:rPr lang="en-US" sz="1600" dirty="0">
+                <a:solidFill>
+                  <a:srgbClr val="10B981"/>
+                </a:solidFill>
+                <a:latin typeface="Calibri" pitchFamily="34" charset="0"/>
+                <a:ea typeface="Calibri" pitchFamily="34" charset="-122"/>
+                <a:cs typeface="Calibri" pitchFamily="34" charset="-120"/>
+              </a:rPr>
+              <a:t>Turn your daily drive into shared value.</a:t>
+            </a:r>
+            <a:endParaRPr lang="en-US" sz="1600" dirty="0"/>
+          </a:p>
+        </p:txBody>
       </p:sp>
       <p:sp>
         <p:nvSpPr>
@@ -6035,14 +6429,14 @@
         </p:nvSpPr>
         <p:spPr>
           <a:xfrm>
-            <a:off x="457200" y="1417320"/>
-            <a:ext cx="3931920" cy="45720"/>
-          </a:xfrm>
-          <a:prstGeom prst="rect">
-            <a:avLst/>
-          </a:prstGeom>
-          <a:solidFill>
-            <a:srgbClr val="10B981"/>
+            <a:off x="1737360" y="2971800"/>
+            <a:ext cx="475488" cy="475488"/>
+          </a:xfrm>
+          <a:prstGeom prst="ellipse">
+            <a:avLst/>
+          </a:prstGeom>
+          <a:solidFill>
+            <a:srgbClr val="0D2420"/>
           </a:solidFill>
           <a:ln/>
         </p:spPr>
@@ -6063,8 +6457,8 @@
         </p:blipFill>
         <p:spPr>
           <a:xfrm>
-            <a:off x="640080" y="1600200"/>
-            <a:ext cx="347472" cy="347472"/>
+            <a:off x="1847088" y="3081528"/>
+            <a:ext cx="256032" cy="256032"/>
           </a:xfrm>
           <a:prstGeom prst="rect">
             <a:avLst/>
@@ -6079,8 +6473,8 @@
         </p:nvSpPr>
         <p:spPr>
           <a:xfrm>
-            <a:off x="1097280" y="1618488"/>
-            <a:ext cx="3108960" cy="320040"/>
+            <a:off x="914400" y="3566160"/>
+            <a:ext cx="2286000" cy="329184"/>
           </a:xfrm>
           <a:prstGeom prst="rect">
             <a:avLst/>
@@ -6092,11 +6486,11 @@
           <a:bodyPr wrap="square" lIns="0" tIns="0" rIns="0" bIns="0" rtlCol="0" anchor="ctr"/>
           <a:lstStyle/>
           <a:p>
-            <a:pPr algn="l" indent="0" marL="0">
-              <a:buNone/>
-            </a:pPr>
-            <a:r>
-              <a:rPr lang="en-US" sz="1700" b="1" dirty="0">
+            <a:pPr algn="ctr" indent="0" marL="0">
+              <a:buNone/>
+            </a:pPr>
+            <a:r>
+              <a:rPr lang="en-US" sz="1300" b="1" dirty="0">
                 <a:solidFill>
                   <a:srgbClr val="FFFFFF"/>
                 </a:solidFill>
@@ -6104,9 +6498,9 @@
                 <a:ea typeface="Calibri" pitchFamily="34" charset="-122"/>
                 <a:cs typeface="Calibri" pitchFamily="34" charset="-120"/>
               </a:rPr>
-              <a:t>Campus Community</a:t>
-            </a:r>
-            <a:endParaRPr lang="en-US" sz="1700" dirty="0"/>
+              <a:t>Set your route &amp; stops</a:t>
+            </a:r>
+            <a:endParaRPr lang="en-US" sz="1300" dirty="0"/>
           </a:p>
         </p:txBody>
       </p:sp>
@@ -6118,225 +6512,21 @@
         </p:nvSpPr>
         <p:spPr>
           <a:xfrm>
-            <a:off x="685800" y="2240280"/>
-            <a:ext cx="100584" cy="100584"/>
+            <a:off x="4343400" y="2971800"/>
+            <a:ext cx="475488" cy="475488"/>
           </a:xfrm>
           <a:prstGeom prst="ellipse">
             <a:avLst/>
           </a:prstGeom>
           <a:solidFill>
-            <a:srgbClr val="10B981"/>
-          </a:solidFill>
-          <a:ln/>
-        </p:spPr>
-      </p:sp>
-      <p:sp>
-        <p:nvSpPr>
-          <p:cNvPr id="9" name="Text 6"/>
-          <p:cNvSpPr/>
-          <p:nvPr/>
-        </p:nvSpPr>
-        <p:spPr>
-          <a:xfrm>
-            <a:off x="896112" y="2176272"/>
-            <a:ext cx="3291840" cy="274320"/>
-          </a:xfrm>
-          <a:prstGeom prst="rect">
-            <a:avLst/>
-          </a:prstGeom>
-          <a:noFill/>
-          <a:ln/>
-        </p:spPr>
-        <p:txBody>
-          <a:bodyPr wrap="square" lIns="0" tIns="0" rIns="0" bIns="0" rtlCol="0" anchor="ctr"/>
-          <a:lstStyle/>
-          <a:p>
-            <a:pPr algn="l" indent="0" marL="0">
-              <a:buNone/>
-            </a:pPr>
-            <a:r>
-              <a:rPr lang="en-US" sz="1300" dirty="0">
-                <a:solidFill>
-                  <a:srgbClr val="FFFFFF"/>
-                </a:solidFill>
-                <a:latin typeface="Calibri" pitchFamily="34" charset="0"/>
-                <a:ea typeface="Calibri" pitchFamily="34" charset="-122"/>
-                <a:cs typeface="Calibri" pitchFamily="34" charset="-120"/>
-              </a:rPr>
-              <a:t>Forum posts &amp; discussions</a:t>
-            </a:r>
-            <a:endParaRPr lang="en-US" sz="1300" dirty="0"/>
-          </a:p>
-        </p:txBody>
-      </p:sp>
-      <p:sp>
-        <p:nvSpPr>
-          <p:cNvPr id="10" name="Shape 7"/>
-          <p:cNvSpPr/>
-          <p:nvPr/>
-        </p:nvSpPr>
-        <p:spPr>
-          <a:xfrm>
-            <a:off x="685800" y="2898648"/>
-            <a:ext cx="100584" cy="100584"/>
-          </a:xfrm>
-          <a:prstGeom prst="ellipse">
-            <a:avLst/>
-          </a:prstGeom>
-          <a:solidFill>
-            <a:srgbClr val="10B981"/>
-          </a:solidFill>
-          <a:ln/>
-        </p:spPr>
-      </p:sp>
-      <p:sp>
-        <p:nvSpPr>
-          <p:cNvPr id="11" name="Text 8"/>
-          <p:cNvSpPr/>
-          <p:nvPr/>
-        </p:nvSpPr>
-        <p:spPr>
-          <a:xfrm>
-            <a:off x="896112" y="2834640"/>
-            <a:ext cx="3291840" cy="274320"/>
-          </a:xfrm>
-          <a:prstGeom prst="rect">
-            <a:avLst/>
-          </a:prstGeom>
-          <a:noFill/>
-          <a:ln/>
-        </p:spPr>
-        <p:txBody>
-          <a:bodyPr wrap="square" lIns="0" tIns="0" rIns="0" bIns="0" rtlCol="0" anchor="ctr"/>
-          <a:lstStyle/>
-          <a:p>
-            <a:pPr algn="l" indent="0" marL="0">
-              <a:buNone/>
-            </a:pPr>
-            <a:r>
-              <a:rPr lang="en-US" sz="1300" dirty="0">
-                <a:solidFill>
-                  <a:srgbClr val="FFFFFF"/>
-                </a:solidFill>
-                <a:latin typeface="Calibri" pitchFamily="34" charset="0"/>
-                <a:ea typeface="Calibri" pitchFamily="34" charset="-122"/>
-                <a:cs typeface="Calibri" pitchFamily="34" charset="-120"/>
-              </a:rPr>
-              <a:t>Share events &amp; opportunities</a:t>
-            </a:r>
-            <a:endParaRPr lang="en-US" sz="1300" dirty="0"/>
-          </a:p>
-        </p:txBody>
-      </p:sp>
-      <p:sp>
-        <p:nvSpPr>
-          <p:cNvPr id="12" name="Shape 9"/>
-          <p:cNvSpPr/>
-          <p:nvPr/>
-        </p:nvSpPr>
-        <p:spPr>
-          <a:xfrm>
-            <a:off x="685800" y="3557016"/>
-            <a:ext cx="100584" cy="100584"/>
-          </a:xfrm>
-          <a:prstGeom prst="ellipse">
-            <a:avLst/>
-          </a:prstGeom>
-          <a:solidFill>
-            <a:srgbClr val="10B981"/>
-          </a:solidFill>
-          <a:ln/>
-        </p:spPr>
-      </p:sp>
-      <p:sp>
-        <p:nvSpPr>
-          <p:cNvPr id="13" name="Text 10"/>
-          <p:cNvSpPr/>
-          <p:nvPr/>
-        </p:nvSpPr>
-        <p:spPr>
-          <a:xfrm>
-            <a:off x="896112" y="3493008"/>
-            <a:ext cx="3291840" cy="274320"/>
-          </a:xfrm>
-          <a:prstGeom prst="rect">
-            <a:avLst/>
-          </a:prstGeom>
-          <a:noFill/>
-          <a:ln/>
-        </p:spPr>
-        <p:txBody>
-          <a:bodyPr wrap="square" lIns="0" tIns="0" rIns="0" bIns="0" rtlCol="0" anchor="ctr"/>
-          <a:lstStyle/>
-          <a:p>
-            <a:pPr algn="l" indent="0" marL="0">
-              <a:buNone/>
-            </a:pPr>
-            <a:r>
-              <a:rPr lang="en-US" sz="1300" dirty="0">
-                <a:solidFill>
-                  <a:srgbClr val="FFFFFF"/>
-                </a:solidFill>
-                <a:latin typeface="Calibri" pitchFamily="34" charset="0"/>
-                <a:ea typeface="Calibri" pitchFamily="34" charset="-122"/>
-                <a:cs typeface="Calibri" pitchFamily="34" charset="-120"/>
-              </a:rPr>
-              <a:t>Build trust before riding</a:t>
-            </a:r>
-            <a:endParaRPr lang="en-US" sz="1300" dirty="0"/>
-          </a:p>
-        </p:txBody>
-      </p:sp>
-      <p:sp>
-        <p:nvSpPr>
-          <p:cNvPr id="14" name="Shape 11"/>
-          <p:cNvSpPr/>
-          <p:nvPr/>
-        </p:nvSpPr>
-        <p:spPr>
-          <a:xfrm>
-            <a:off x="4754880" y="1417320"/>
-            <a:ext cx="3931920" cy="3337560"/>
-          </a:xfrm>
-          <a:prstGeom prst="rect">
-            <a:avLst/>
-          </a:prstGeom>
-          <a:solidFill>
-            <a:srgbClr val="111124"/>
-          </a:solidFill>
-          <a:ln/>
-          <a:effectLst>
-            <a:outerShdw sx="100000" sy="100000" kx="0" ky="0" algn="bl" rotWithShape="0" blurRad="203200" dist="50800" dir="8100000">
-              <a:srgbClr val="000000">
-                <a:alpha val="35000"/>
-              </a:srgbClr>
-            </a:outerShdw>
-          </a:effectLst>
-        </p:spPr>
-      </p:sp>
-      <p:sp>
-        <p:nvSpPr>
-          <p:cNvPr id="15" name="Shape 12"/>
-          <p:cNvSpPr/>
-          <p:nvPr/>
-        </p:nvSpPr>
-        <p:spPr>
-          <a:xfrm>
-            <a:off x="4754880" y="1417320"/>
-            <a:ext cx="3931920" cy="45720"/>
-          </a:xfrm>
-          <a:prstGeom prst="rect">
-            <a:avLst/>
-          </a:prstGeom>
-          <a:solidFill>
-            <a:srgbClr val="6366F1"/>
+            <a:srgbClr val="0D2420"/>
           </a:solidFill>
           <a:ln/>
         </p:spPr>
       </p:sp>
       <p:pic>
         <p:nvPicPr>
-          <p:cNvPr id="16" name="Image 1" descr="preencoded.png">    </p:cNvPr>
+          <p:cNvPr id="9" name="Image 1" descr="preencoded.png">    </p:cNvPr>
           <p:cNvPicPr>
             <a:picLocks noChangeAspect="1"/>
           </p:cNvPicPr>
@@ -6350,8 +6540,8 @@
         </p:blipFill>
         <p:spPr>
           <a:xfrm>
-            <a:off x="4937760" y="1600200"/>
-            <a:ext cx="347472" cy="347472"/>
+            <a:off x="4453128" y="3081528"/>
+            <a:ext cx="256032" cy="256032"/>
           </a:xfrm>
           <a:prstGeom prst="rect">
             <a:avLst/>
@@ -6360,14 +6550,14 @@
       </p:pic>
       <p:sp>
         <p:nvSpPr>
-          <p:cNvPr id="17" name="Text 13"/>
-          <p:cNvSpPr/>
-          <p:nvPr/>
-        </p:nvSpPr>
-        <p:spPr>
-          <a:xfrm>
-            <a:off x="5394960" y="1618488"/>
-            <a:ext cx="3108960" cy="320040"/>
+          <p:cNvPr id="10" name="Text 6"/>
+          <p:cNvSpPr/>
+          <p:nvPr/>
+        </p:nvSpPr>
+        <p:spPr>
+          <a:xfrm>
+            <a:off x="3520440" y="3566160"/>
+            <a:ext cx="2286000" cy="329184"/>
           </a:xfrm>
           <a:prstGeom prst="rect">
             <a:avLst/>
@@ -6379,11 +6569,11 @@
           <a:bodyPr wrap="square" lIns="0" tIns="0" rIns="0" bIns="0" rtlCol="0" anchor="ctr"/>
           <a:lstStyle/>
           <a:p>
-            <a:pPr algn="l" indent="0" marL="0">
-              <a:buNone/>
-            </a:pPr>
-            <a:r>
-              <a:rPr lang="en-US" sz="1700" b="1" dirty="0">
+            <a:pPr algn="ctr" indent="0" marL="0">
+              <a:buNone/>
+            </a:pPr>
+            <a:r>
+              <a:rPr lang="en-US" sz="1300" b="1" dirty="0">
                 <a:solidFill>
                   <a:srgbClr val="FFFFFF"/>
                 </a:solidFill>
@@ -6391,42 +6581,66 @@
                 <a:ea typeface="Calibri" pitchFamily="34" charset="-122"/>
                 <a:cs typeface="Calibri" pitchFamily="34" charset="-120"/>
               </a:rPr>
-              <a:t>My Rides</a:t>
-            </a:r>
-            <a:endParaRPr lang="en-US" sz="1700" dirty="0"/>
-          </a:p>
-        </p:txBody>
-      </p:sp>
-      <p:sp>
-        <p:nvSpPr>
-          <p:cNvPr id="18" name="Shape 14"/>
-          <p:cNvSpPr/>
-          <p:nvPr/>
-        </p:nvSpPr>
-        <p:spPr>
-          <a:xfrm>
-            <a:off x="4983480" y="2240280"/>
-            <a:ext cx="100584" cy="100584"/>
+              <a:t>Split fuel costs fairly</a:t>
+            </a:r>
+            <a:endParaRPr lang="en-US" sz="1300" dirty="0"/>
+          </a:p>
+        </p:txBody>
+      </p:sp>
+      <p:sp>
+        <p:nvSpPr>
+          <p:cNvPr id="11" name="Shape 7"/>
+          <p:cNvSpPr/>
+          <p:nvPr/>
+        </p:nvSpPr>
+        <p:spPr>
+          <a:xfrm>
+            <a:off x="6949440" y="2971800"/>
+            <a:ext cx="475488" cy="475488"/>
           </a:xfrm>
           <a:prstGeom prst="ellipse">
             <a:avLst/>
           </a:prstGeom>
           <a:solidFill>
-            <a:srgbClr val="6366F1"/>
-          </a:solidFill>
-          <a:ln/>
-        </p:spPr>
-      </p:sp>
-      <p:sp>
-        <p:nvSpPr>
-          <p:cNvPr id="19" name="Text 15"/>
-          <p:cNvSpPr/>
-          <p:nvPr/>
-        </p:nvSpPr>
-        <p:spPr>
-          <a:xfrm>
-            <a:off x="5193792" y="2176272"/>
-            <a:ext cx="3291840" cy="274320"/>
+            <a:srgbClr val="0D2420"/>
+          </a:solidFill>
+          <a:ln/>
+        </p:spPr>
+      </p:sp>
+      <p:pic>
+        <p:nvPicPr>
+          <p:cNvPr id="12" name="Image 2" descr="preencoded.png">    </p:cNvPr>
+          <p:cNvPicPr>
+            <a:picLocks noChangeAspect="1"/>
+          </p:cNvPicPr>
+          <p:nvPr/>
+        </p:nvPicPr>
+        <p:blipFill>
+          <a:blip r:embed="rId3"/>
+          <a:stretch>
+            <a:fillRect/>
+          </a:stretch>
+        </p:blipFill>
+        <p:spPr>
+          <a:xfrm>
+            <a:off x="7059168" y="3081528"/>
+            <a:ext cx="256032" cy="256032"/>
+          </a:xfrm>
+          <a:prstGeom prst="rect">
+            <a:avLst/>
+          </a:prstGeom>
+        </p:spPr>
+      </p:pic>
+      <p:sp>
+        <p:nvSpPr>
+          <p:cNvPr id="13" name="Text 8"/>
+          <p:cNvSpPr/>
+          <p:nvPr/>
+        </p:nvSpPr>
+        <p:spPr>
+          <a:xfrm>
+            <a:off x="6126480" y="3566160"/>
+            <a:ext cx="2286000" cy="329184"/>
           </a:xfrm>
           <a:prstGeom prst="rect">
             <a:avLst/>
@@ -6438,11 +6652,11 @@
           <a:bodyPr wrap="square" lIns="0" tIns="0" rIns="0" bIns="0" rtlCol="0" anchor="ctr"/>
           <a:lstStyle/>
           <a:p>
-            <a:pPr algn="l" indent="0" marL="0">
-              <a:buNone/>
-            </a:pPr>
-            <a:r>
-              <a:rPr lang="en-US" sz="1300" dirty="0">
+            <a:pPr algn="ctr" indent="0" marL="0">
+              <a:buNone/>
+            </a:pPr>
+            <a:r>
+              <a:rPr lang="en-US" sz="1300" b="1" dirty="0">
                 <a:solidFill>
                   <a:srgbClr val="FFFFFF"/>
                 </a:solidFill>
@@ -6450,312 +6664,9 @@
                 <a:ea typeface="Calibri" pitchFamily="34" charset="-122"/>
                 <a:cs typeface="Calibri" pitchFamily="34" charset="-120"/>
               </a:rPr>
-              <a:t>Track upcoming &amp; past rides</a:t>
+              <a:t>Approve every rider</a:t>
             </a:r>
             <a:endParaRPr lang="en-US" sz="1300" dirty="0"/>
-          </a:p>
-        </p:txBody>
-      </p:sp>
-      <p:sp>
-        <p:nvSpPr>
-          <p:cNvPr id="20" name="Shape 16"/>
-          <p:cNvSpPr/>
-          <p:nvPr/>
-        </p:nvSpPr>
-        <p:spPr>
-          <a:xfrm>
-            <a:off x="4983480" y="2898648"/>
-            <a:ext cx="100584" cy="100584"/>
-          </a:xfrm>
-          <a:prstGeom prst="ellipse">
-            <a:avLst/>
-          </a:prstGeom>
-          <a:solidFill>
-            <a:srgbClr val="6366F1"/>
-          </a:solidFill>
-          <a:ln/>
-        </p:spPr>
-      </p:sp>
-      <p:sp>
-        <p:nvSpPr>
-          <p:cNvPr id="21" name="Text 17"/>
-          <p:cNvSpPr/>
-          <p:nvPr/>
-        </p:nvSpPr>
-        <p:spPr>
-          <a:xfrm>
-            <a:off x="5193792" y="2834640"/>
-            <a:ext cx="3291840" cy="274320"/>
-          </a:xfrm>
-          <a:prstGeom prst="rect">
-            <a:avLst/>
-          </a:prstGeom>
-          <a:noFill/>
-          <a:ln/>
-        </p:spPr>
-        <p:txBody>
-          <a:bodyPr wrap="square" lIns="0" tIns="0" rIns="0" bIns="0" rtlCol="0" anchor="ctr"/>
-          <a:lstStyle/>
-          <a:p>
-            <a:pPr algn="l" indent="0" marL="0">
-              <a:buNone/>
-            </a:pPr>
-            <a:r>
-              <a:rPr lang="en-US" sz="1300" dirty="0">
-                <a:solidFill>
-                  <a:srgbClr val="FFFFFF"/>
-                </a:solidFill>
-                <a:latin typeface="Calibri" pitchFamily="34" charset="0"/>
-                <a:ea typeface="Calibri" pitchFamily="34" charset="-122"/>
-                <a:cs typeface="Calibri" pitchFamily="34" charset="-120"/>
-              </a:rPr>
-              <a:t>Rate drivers &amp; passengers</a:t>
-            </a:r>
-            <a:endParaRPr lang="en-US" sz="1300" dirty="0"/>
-          </a:p>
-        </p:txBody>
-      </p:sp>
-      <p:sp>
-        <p:nvSpPr>
-          <p:cNvPr id="22" name="Shape 18"/>
-          <p:cNvSpPr/>
-          <p:nvPr/>
-        </p:nvSpPr>
-        <p:spPr>
-          <a:xfrm>
-            <a:off x="4983480" y="3557016"/>
-            <a:ext cx="100584" cy="100584"/>
-          </a:xfrm>
-          <a:prstGeom prst="ellipse">
-            <a:avLst/>
-          </a:prstGeom>
-          <a:solidFill>
-            <a:srgbClr val="6366F1"/>
-          </a:solidFill>
-          <a:ln/>
-        </p:spPr>
-      </p:sp>
-      <p:sp>
-        <p:nvSpPr>
-          <p:cNvPr id="23" name="Text 19"/>
-          <p:cNvSpPr/>
-          <p:nvPr/>
-        </p:nvSpPr>
-        <p:spPr>
-          <a:xfrm>
-            <a:off x="5193792" y="3493008"/>
-            <a:ext cx="3291840" cy="274320"/>
-          </a:xfrm>
-          <a:prstGeom prst="rect">
-            <a:avLst/>
-          </a:prstGeom>
-          <a:noFill/>
-          <a:ln/>
-        </p:spPr>
-        <p:txBody>
-          <a:bodyPr wrap="square" lIns="0" tIns="0" rIns="0" bIns="0" rtlCol="0" anchor="ctr"/>
-          <a:lstStyle/>
-          <a:p>
-            <a:pPr algn="l" indent="0" marL="0">
-              <a:buNone/>
-            </a:pPr>
-            <a:r>
-              <a:rPr lang="en-US" sz="1300" dirty="0">
-                <a:solidFill>
-                  <a:srgbClr val="FFFFFF"/>
-                </a:solidFill>
-                <a:latin typeface="Calibri" pitchFamily="34" charset="0"/>
-                <a:ea typeface="Calibri" pitchFamily="34" charset="-122"/>
-                <a:cs typeface="Calibri" pitchFamily="34" charset="-120"/>
-              </a:rPr>
-              <a:t>Full ride history</a:t>
-            </a:r>
-            <a:endParaRPr lang="en-US" sz="1300" dirty="0"/>
-          </a:p>
-        </p:txBody>
-      </p:sp>
-      <p:sp>
-        <p:nvSpPr>
-          <p:cNvPr id="24" name="Shape 20"/>
-          <p:cNvSpPr/>
-          <p:nvPr/>
-        </p:nvSpPr>
-        <p:spPr>
-          <a:xfrm>
-            <a:off x="4069080" y="1417320"/>
-            <a:ext cx="1005840" cy="3337560"/>
-          </a:xfrm>
-          <a:prstGeom prst="roundRect">
-            <a:avLst>
-              <a:gd name="adj" fmla="val 16364"/>
-            </a:avLst>
-          </a:prstGeom>
-          <a:solidFill>
-            <a:srgbClr val="1A1A32"/>
-          </a:solidFill>
-          <a:ln w="25400">
-            <a:solidFill>
-              <a:srgbClr val="2E2E50"/>
-            </a:solidFill>
-            <a:prstDash val="solid"/>
-          </a:ln>
-          <a:effectLst>
-            <a:outerShdw sx="100000" sy="100000" kx="0" ky="0" algn="bl" rotWithShape="0" blurRad="203200" dist="50800" dir="8100000">
-              <a:srgbClr val="000000">
-                <a:alpha val="35000"/>
-              </a:srgbClr>
-            </a:outerShdw>
-          </a:effectLst>
-        </p:spPr>
-      </p:sp>
-      <p:sp>
-        <p:nvSpPr>
-          <p:cNvPr id="25" name="Shape 21"/>
-          <p:cNvSpPr/>
-          <p:nvPr/>
-        </p:nvSpPr>
-        <p:spPr>
-          <a:xfrm>
-            <a:off x="4160520" y="1618488"/>
-            <a:ext cx="822960" cy="2953512"/>
-          </a:xfrm>
-          <a:prstGeom prst="rect">
-            <a:avLst/>
-          </a:prstGeom>
-          <a:solidFill>
-            <a:srgbClr val="0A0A1A"/>
-          </a:solidFill>
-          <a:ln/>
-        </p:spPr>
-      </p:sp>
-      <p:sp>
-        <p:nvSpPr>
-          <p:cNvPr id="26" name="Shape 22"/>
-          <p:cNvSpPr/>
-          <p:nvPr/>
-        </p:nvSpPr>
-        <p:spPr>
-          <a:xfrm>
-            <a:off x="4407408" y="1481328"/>
-            <a:ext cx="329184" cy="91440"/>
-          </a:xfrm>
-          <a:prstGeom prst="roundRect">
-            <a:avLst>
-              <a:gd name="adj" fmla="val 50000"/>
-            </a:avLst>
-          </a:prstGeom>
-          <a:solidFill>
-            <a:srgbClr val="2E2E50"/>
-          </a:solidFill>
-          <a:ln/>
-        </p:spPr>
-      </p:sp>
-      <p:sp>
-        <p:nvSpPr>
-          <p:cNvPr id="27" name="Shape 23"/>
-          <p:cNvSpPr/>
-          <p:nvPr/>
-        </p:nvSpPr>
-        <p:spPr>
-          <a:xfrm>
-            <a:off x="4297680" y="4626864"/>
-            <a:ext cx="548640" cy="54864"/>
-          </a:xfrm>
-          <a:prstGeom prst="roundRect">
-            <a:avLst>
-              <a:gd name="adj" fmla="val 50000"/>
-            </a:avLst>
-          </a:prstGeom>
-          <a:solidFill>
-            <a:srgbClr val="2E2E50"/>
-          </a:solidFill>
-          <a:ln/>
-        </p:spPr>
-      </p:sp>
-      <p:sp>
-        <p:nvSpPr>
-          <p:cNvPr id="28" name="Shape 24"/>
-          <p:cNvSpPr/>
-          <p:nvPr/>
-        </p:nvSpPr>
-        <p:spPr>
-          <a:xfrm>
-            <a:off x="4160520" y="1618488"/>
-            <a:ext cx="822960" cy="274320"/>
-          </a:xfrm>
-          <a:prstGeom prst="rect">
-            <a:avLst/>
-          </a:prstGeom>
-          <a:solidFill>
-            <a:srgbClr val="111130"/>
-          </a:solidFill>
-          <a:ln/>
-        </p:spPr>
-      </p:sp>
-      <p:sp>
-        <p:nvSpPr>
-          <p:cNvPr id="29" name="Text 25"/>
-          <p:cNvSpPr/>
-          <p:nvPr/>
-        </p:nvSpPr>
-        <p:spPr>
-          <a:xfrm>
-            <a:off x="4160520" y="1655064"/>
-            <a:ext cx="822960" cy="201168"/>
-          </a:xfrm>
-          <a:prstGeom prst="rect">
-            <a:avLst/>
-          </a:prstGeom>
-          <a:noFill/>
-          <a:ln/>
-        </p:spPr>
-        <p:txBody>
-          <a:bodyPr wrap="square" lIns="0" tIns="0" rIns="0" bIns="0" rtlCol="0" anchor="ctr"/>
-          <a:lstStyle/>
-          <a:p>
-            <a:pPr algn="ctr" indent="0" marL="0">
-              <a:buNone/>
-            </a:pPr>
-            <a:r>
-              <a:rPr lang="en-US" sz="800" b="1" dirty="0">
-                <a:solidFill>
-                  <a:srgbClr val="9CA3AF"/>
-                </a:solidFill>
-                <a:latin typeface="Calibri" pitchFamily="34" charset="0"/>
-                <a:ea typeface="Calibri" pitchFamily="34" charset="-122"/>
-                <a:cs typeface="Calibri" pitchFamily="34" charset="-120"/>
-              </a:rPr>
-              <a:t>UniRide</a:t>
-            </a:r>
-            <a:endParaRPr lang="en-US" sz="800" dirty="0"/>
-          </a:p>
-        </p:txBody>
-      </p:sp>
-      <p:sp>
-        <p:nvSpPr>
-          <p:cNvPr id="30" name="Text 26"/>
-          <p:cNvSpPr/>
-          <p:nvPr/>
-        </p:nvSpPr>
-        <p:spPr>
-          <a:xfrm>
-            <a:off x="4160520" y="2866644"/>
-            <a:ext cx="822960" cy="457200"/>
-          </a:xfrm>
-          <a:prstGeom prst="rect">
-            <a:avLst/>
-          </a:prstGeom>
-          <a:noFill/>
-          <a:ln/>
-        </p:spPr>
-        <p:txBody>
-          <a:bodyPr wrap="square" lIns="0" tIns="0" rIns="0" bIns="0" rtlCol="0" anchor="ctr"/>
-          <a:lstStyle/>
-          <a:p>
-            <a:pPr algn="ctr" indent="0" marL="0">
-              <a:buNone/>
-            </a:pPr>
-            <a:endParaRPr lang="en-US" sz="900" dirty="0"/>
           </a:p>
         </p:txBody>
       </p:sp>

--- a/UniRide_Pitch.pptx
+++ b/UniRide_Pitch.pptx
@@ -14,10 +14,9 @@
     <p:sldId id="262" r:id="rId8"/>
     <p:sldId id="263" r:id="rId9"/>
     <p:sldId id="264" r:id="rId10"/>
-    <p:sldId id="265" r:id="rId11"/>
   </p:sldIdLst>
   <p:notesMasterIdLst>
-    <p:notesMasterId r:id="rId12"/>
+    <p:notesMasterId r:id="rId11"/>
   </p:notesMasterIdLst>
   <p:sldSz cx="9144000" cy="5143500"/>
   <p:notesSz cx="5143500" cy="9144000"/>
@@ -553,94 +552,6 @@
 </p:notes>
 </file>
 
-<file path=ppt/notesSlides/notesSlide10.xml><?xml version="1.0" encoding="utf-8"?>
-<p:notes xmlns:a="http://schemas.openxmlformats.org/drawingml/2006/main" xmlns:r="http://schemas.openxmlformats.org/officeDocument/2006/relationships" xmlns:p="http://schemas.openxmlformats.org/presentationml/2006/main">
-  <p:cSld>
-    <p:spTree>
-      <p:nvGrpSpPr>
-        <p:cNvPr id="1" name=""/>
-        <p:cNvGrpSpPr/>
-        <p:nvPr/>
-      </p:nvGrpSpPr>
-      <p:grpSpPr>
-        <a:xfrm>
-          <a:off x="0" y="0"/>
-          <a:ext cx="0" cy="0"/>
-          <a:chOff x="0" y="0"/>
-          <a:chExt cx="0" cy="0"/>
-        </a:xfrm>
-      </p:grpSpPr>
-      <p:sp>
-        <p:nvSpPr>
-          <p:cNvPr id="2" name="Slide Image Placeholder 1"/>
-          <p:cNvSpPr>
-            <a:spLocks noGrp="1" noRot="1" noChangeAspect="1"/>
-          </p:cNvSpPr>
-          <p:nvPr>
-            <p:ph type="sldImg"/>
-          </p:nvPr>
-        </p:nvSpPr>
-        <p:spPr/>
-      </p:sp>
-      <p:sp>
-        <p:nvSpPr>
-          <p:cNvPr id="3" name="Notes Placeholder 2"/>
-          <p:cNvSpPr>
-            <a:spLocks noGrp="1"/>
-          </p:cNvSpPr>
-          <p:nvPr>
-            <p:ph type="body" idx="1"/>
-          </p:nvPr>
-        </p:nvSpPr>
-        <p:spPr/>
-        <p:txBody>
-          <a:bodyPr/>
-          <a:lstStyle/>
-          <a:p>
-            <a:r>
-              <a:rPr lang="en-US" dirty="0"/>
-              <a:t/>
-            </a:r>
-            <a:endParaRPr lang="en-US" dirty="0"/>
-          </a:p>
-        </p:txBody>
-      </p:sp>
-      <p:sp>
-        <p:nvSpPr>
-          <p:cNvPr id="4" name="Slide Number Placeholder 3"/>
-          <p:cNvSpPr>
-            <a:spLocks noGrp="1"/>
-          </p:cNvSpPr>
-          <p:nvPr>
-            <p:ph type="sldNum" sz="quarter" idx="10"/>
-          </p:nvPr>
-        </p:nvSpPr>
-        <p:spPr/>
-        <p:txBody>
-          <a:bodyPr/>
-          <a:lstStyle/>
-          <a:p>
-            <a:fld id="{F7021451-1387-4CA6-816F-3879F97B5CBC}" type="slidenum">
-              <a:rPr lang="en-US"/>
-              <a:t>10</a:t>
-            </a:fld>
-            <a:endParaRPr lang="en-US"/>
-          </a:p>
-        </p:txBody>
-      </p:sp>
-    </p:spTree>
-    <p:extLst>
-      <p:ext uri="{BB962C8B-B14F-4D97-AF65-F5344CB8AC3E}">
-        <p14:creationId xmlns:p14="http://schemas.microsoft.com/office/powerpoint/2010/main" val="1024086991"/>
-      </p:ext>
-    </p:extLst>
-  </p:cSld>
-  <p:clrMapOvr>
-    <a:masterClrMapping/>
-  </p:clrMapOvr>
-</p:notes>
-</file>
-
 <file path=ppt/notesSlides/notesSlide2.xml><?xml version="1.0" encoding="utf-8"?>
 <p:notes xmlns:a="http://schemas.openxmlformats.org/drawingml/2006/main" xmlns:r="http://schemas.openxmlformats.org/officeDocument/2006/relationships" xmlns:p="http://schemas.openxmlformats.org/presentationml/2006/main">
   <p:cSld>
@@ -1879,394 +1790,6 @@
 </p:sld>
 </file>
 
-<file path=ppt/slides/slide10.xml><?xml version="1.0" encoding="utf-8"?>
-<p:sld xmlns:a="http://schemas.openxmlformats.org/drawingml/2006/main" xmlns:r="http://schemas.openxmlformats.org/officeDocument/2006/relationships" xmlns:p="http://schemas.openxmlformats.org/presentationml/2006/main">
-  <p:cSld name="Slide 10">
-    <p:bg>
-      <p:bgPr>
-        <a:solidFill>
-          <a:srgbClr val="07070F"/>
-        </a:solidFill>
-      </p:bgPr>
-    </p:bg>
-    <p:spTree>
-      <p:nvGrpSpPr>
-        <p:cNvPr id="1" name=""/>
-        <p:cNvGrpSpPr/>
-        <p:nvPr/>
-      </p:nvGrpSpPr>
-      <p:grpSpPr>
-        <a:xfrm>
-          <a:off x="0" y="0"/>
-          <a:ext cx="0" cy="0"/>
-          <a:chOff x="0" y="0"/>
-          <a:chExt cx="0" cy="0"/>
-        </a:xfrm>
-      </p:grpSpPr>
-      <p:sp>
-        <p:nvSpPr>
-          <p:cNvPr id="2" name="Shape 0"/>
-          <p:cNvSpPr/>
-          <p:nvPr/>
-        </p:nvSpPr>
-        <p:spPr>
-          <a:xfrm>
-            <a:off x="5029200" y="457200"/>
-            <a:ext cx="4572000" cy="4572000"/>
-          </a:xfrm>
-          <a:prstGeom prst="ellipse">
-            <a:avLst/>
-          </a:prstGeom>
-          <a:solidFill>
-            <a:srgbClr val="FBBF24">
-              <a:alpha val="7000"/>
-            </a:srgbClr>
-          </a:solidFill>
-          <a:ln w="12700">
-            <a:solidFill>
-              <a:srgbClr val="FBBF24">
-                <a:alpha val="7000"/>
-              </a:srgbClr>
-            </a:solidFill>
-            <a:prstDash val="solid"/>
-          </a:ln>
-        </p:spPr>
-      </p:sp>
-      <p:sp>
-        <p:nvSpPr>
-          <p:cNvPr id="3" name="Text 1"/>
-          <p:cNvSpPr/>
-          <p:nvPr/>
-        </p:nvSpPr>
-        <p:spPr>
-          <a:xfrm>
-            <a:off x="914400" y="1188720"/>
-            <a:ext cx="7315200" cy="914400"/>
-          </a:xfrm>
-          <a:prstGeom prst="rect">
-            <a:avLst/>
-          </a:prstGeom>
-          <a:noFill/>
-          <a:ln/>
-        </p:spPr>
-        <p:txBody>
-          <a:bodyPr wrap="square" lIns="0" tIns="0" rIns="0" bIns="0" rtlCol="0" anchor="ctr"/>
-          <a:lstStyle/>
-          <a:p>
-            <a:pPr algn="ctr" indent="0" marL="0">
-              <a:buNone/>
-            </a:pPr>
-            <a:r>
-              <a:rPr lang="en-US" sz="5600" b="1" dirty="0">
-                <a:solidFill>
-                  <a:srgbClr val="FFFFFF"/>
-                </a:solidFill>
-                <a:latin typeface="Calibri" pitchFamily="34" charset="0"/>
-                <a:ea typeface="Calibri" pitchFamily="34" charset="-122"/>
-                <a:cs typeface="Calibri" pitchFamily="34" charset="-120"/>
-              </a:rPr>
-              <a:t>More than just a ride.</a:t>
-            </a:r>
-            <a:endParaRPr lang="en-US" sz="5600" dirty="0"/>
-          </a:p>
-        </p:txBody>
-      </p:sp>
-      <p:sp>
-        <p:nvSpPr>
-          <p:cNvPr id="4" name="Text 2"/>
-          <p:cNvSpPr/>
-          <p:nvPr/>
-        </p:nvSpPr>
-        <p:spPr>
-          <a:xfrm>
-            <a:off x="914400" y="2194560"/>
-            <a:ext cx="7315200" cy="365760"/>
-          </a:xfrm>
-          <a:prstGeom prst="rect">
-            <a:avLst/>
-          </a:prstGeom>
-          <a:noFill/>
-          <a:ln/>
-        </p:spPr>
-        <p:txBody>
-          <a:bodyPr wrap="square" lIns="0" tIns="0" rIns="0" bIns="0" rtlCol="0" anchor="ctr"/>
-          <a:lstStyle/>
-          <a:p>
-            <a:pPr algn="ctr" indent="0" marL="0">
-              <a:buNone/>
-            </a:pPr>
-            <a:r>
-              <a:rPr lang="en-US" sz="1600" dirty="0">
-                <a:solidFill>
-                  <a:srgbClr val="9CA3AF"/>
-                </a:solidFill>
-                <a:latin typeface="Calibri" pitchFamily="34" charset="0"/>
-                <a:ea typeface="Calibri" pitchFamily="34" charset="-122"/>
-                <a:cs typeface="Calibri" pitchFamily="34" charset="-120"/>
-              </a:rPr>
-              <a:t>UniRide connects your campus beyond the commute.</a:t>
-            </a:r>
-            <a:endParaRPr lang="en-US" sz="1600" dirty="0"/>
-          </a:p>
-        </p:txBody>
-      </p:sp>
-      <p:sp>
-        <p:nvSpPr>
-          <p:cNvPr id="5" name="Shape 3"/>
-          <p:cNvSpPr/>
-          <p:nvPr/>
-        </p:nvSpPr>
-        <p:spPr>
-          <a:xfrm>
-            <a:off x="1737360" y="2971800"/>
-            <a:ext cx="475488" cy="475488"/>
-          </a:xfrm>
-          <a:prstGeom prst="ellipse">
-            <a:avLst/>
-          </a:prstGeom>
-          <a:solidFill>
-            <a:srgbClr val="1A1600"/>
-          </a:solidFill>
-          <a:ln/>
-        </p:spPr>
-      </p:sp>
-      <p:pic>
-        <p:nvPicPr>
-          <p:cNvPr id="6" name="Image 0" descr="preencoded.png">    </p:cNvPr>
-          <p:cNvPicPr>
-            <a:picLocks noChangeAspect="1"/>
-          </p:cNvPicPr>
-          <p:nvPr/>
-        </p:nvPicPr>
-        <p:blipFill>
-          <a:blip r:embed="rId1"/>
-          <a:stretch>
-            <a:fillRect/>
-          </a:stretch>
-        </p:blipFill>
-        <p:spPr>
-          <a:xfrm>
-            <a:off x="1847088" y="3081528"/>
-            <a:ext cx="256032" cy="256032"/>
-          </a:xfrm>
-          <a:prstGeom prst="rect">
-            <a:avLst/>
-          </a:prstGeom>
-        </p:spPr>
-      </p:pic>
-      <p:sp>
-        <p:nvSpPr>
-          <p:cNvPr id="7" name="Text 4"/>
-          <p:cNvSpPr/>
-          <p:nvPr/>
-        </p:nvSpPr>
-        <p:spPr>
-          <a:xfrm>
-            <a:off x="914400" y="3566160"/>
-            <a:ext cx="2286000" cy="329184"/>
-          </a:xfrm>
-          <a:prstGeom prst="rect">
-            <a:avLst/>
-          </a:prstGeom>
-          <a:noFill/>
-          <a:ln/>
-        </p:spPr>
-        <p:txBody>
-          <a:bodyPr wrap="square" lIns="0" tIns="0" rIns="0" bIns="0" rtlCol="0" anchor="ctr"/>
-          <a:lstStyle/>
-          <a:p>
-            <a:pPr algn="ctr" indent="0" marL="0">
-              <a:buNone/>
-            </a:pPr>
-            <a:r>
-              <a:rPr lang="en-US" sz="1300" b="1" dirty="0">
-                <a:solidFill>
-                  <a:srgbClr val="FFFFFF"/>
-                </a:solidFill>
-                <a:latin typeface="Calibri" pitchFamily="34" charset="0"/>
-                <a:ea typeface="Calibri" pitchFamily="34" charset="-122"/>
-                <a:cs typeface="Calibri" pitchFamily="34" charset="-120"/>
-              </a:rPr>
-              <a:t>Campus Community</a:t>
-            </a:r>
-            <a:endParaRPr lang="en-US" sz="1300" dirty="0"/>
-          </a:p>
-        </p:txBody>
-      </p:sp>
-      <p:sp>
-        <p:nvSpPr>
-          <p:cNvPr id="8" name="Shape 5"/>
-          <p:cNvSpPr/>
-          <p:nvPr/>
-        </p:nvSpPr>
-        <p:spPr>
-          <a:xfrm>
-            <a:off x="4343400" y="2971800"/>
-            <a:ext cx="475488" cy="475488"/>
-          </a:xfrm>
-          <a:prstGeom prst="ellipse">
-            <a:avLst/>
-          </a:prstGeom>
-          <a:solidFill>
-            <a:srgbClr val="1A1600"/>
-          </a:solidFill>
-          <a:ln/>
-        </p:spPr>
-      </p:sp>
-      <p:pic>
-        <p:nvPicPr>
-          <p:cNvPr id="9" name="Image 1" descr="preencoded.png">    </p:cNvPr>
-          <p:cNvPicPr>
-            <a:picLocks noChangeAspect="1"/>
-          </p:cNvPicPr>
-          <p:nvPr/>
-        </p:nvPicPr>
-        <p:blipFill>
-          <a:blip r:embed="rId2"/>
-          <a:stretch>
-            <a:fillRect/>
-          </a:stretch>
-        </p:blipFill>
-        <p:spPr>
-          <a:xfrm>
-            <a:off x="4453128" y="3081528"/>
-            <a:ext cx="256032" cy="256032"/>
-          </a:xfrm>
-          <a:prstGeom prst="rect">
-            <a:avLst/>
-          </a:prstGeom>
-        </p:spPr>
-      </p:pic>
-      <p:sp>
-        <p:nvSpPr>
-          <p:cNvPr id="10" name="Text 6"/>
-          <p:cNvSpPr/>
-          <p:nvPr/>
-        </p:nvSpPr>
-        <p:spPr>
-          <a:xfrm>
-            <a:off x="3520440" y="3566160"/>
-            <a:ext cx="2286000" cy="329184"/>
-          </a:xfrm>
-          <a:prstGeom prst="rect">
-            <a:avLst/>
-          </a:prstGeom>
-          <a:noFill/>
-          <a:ln/>
-        </p:spPr>
-        <p:txBody>
-          <a:bodyPr wrap="square" lIns="0" tIns="0" rIns="0" bIns="0" rtlCol="0" anchor="ctr"/>
-          <a:lstStyle/>
-          <a:p>
-            <a:pPr algn="ctr" indent="0" marL="0">
-              <a:buNone/>
-            </a:pPr>
-            <a:r>
-              <a:rPr lang="en-US" sz="1300" b="1" dirty="0">
-                <a:solidFill>
-                  <a:srgbClr val="FFFFFF"/>
-                </a:solidFill>
-                <a:latin typeface="Calibri" pitchFamily="34" charset="0"/>
-                <a:ea typeface="Calibri" pitchFamily="34" charset="-122"/>
-                <a:cs typeface="Calibri" pitchFamily="34" charset="-120"/>
-              </a:rPr>
-              <a:t>Ride History &amp; Ratings</a:t>
-            </a:r>
-            <a:endParaRPr lang="en-US" sz="1300" dirty="0"/>
-          </a:p>
-        </p:txBody>
-      </p:sp>
-      <p:sp>
-        <p:nvSpPr>
-          <p:cNvPr id="11" name="Shape 7"/>
-          <p:cNvSpPr/>
-          <p:nvPr/>
-        </p:nvSpPr>
-        <p:spPr>
-          <a:xfrm>
-            <a:off x="6949440" y="2971800"/>
-            <a:ext cx="475488" cy="475488"/>
-          </a:xfrm>
-          <a:prstGeom prst="ellipse">
-            <a:avLst/>
-          </a:prstGeom>
-          <a:solidFill>
-            <a:srgbClr val="1A1600"/>
-          </a:solidFill>
-          <a:ln/>
-        </p:spPr>
-      </p:sp>
-      <p:pic>
-        <p:nvPicPr>
-          <p:cNvPr id="12" name="Image 2" descr="preencoded.png">    </p:cNvPr>
-          <p:cNvPicPr>
-            <a:picLocks noChangeAspect="1"/>
-          </p:cNvPicPr>
-          <p:nvPr/>
-        </p:nvPicPr>
-        <p:blipFill>
-          <a:blip r:embed="rId3"/>
-          <a:stretch>
-            <a:fillRect/>
-          </a:stretch>
-        </p:blipFill>
-        <p:spPr>
-          <a:xfrm>
-            <a:off x="7059168" y="3081528"/>
-            <a:ext cx="256032" cy="256032"/>
-          </a:xfrm>
-          <a:prstGeom prst="rect">
-            <a:avLst/>
-          </a:prstGeom>
-        </p:spPr>
-      </p:pic>
-      <p:sp>
-        <p:nvSpPr>
-          <p:cNvPr id="13" name="Text 8"/>
-          <p:cNvSpPr/>
-          <p:nvPr/>
-        </p:nvSpPr>
-        <p:spPr>
-          <a:xfrm>
-            <a:off x="6126480" y="3566160"/>
-            <a:ext cx="2286000" cy="329184"/>
-          </a:xfrm>
-          <a:prstGeom prst="rect">
-            <a:avLst/>
-          </a:prstGeom>
-          <a:noFill/>
-          <a:ln/>
-        </p:spPr>
-        <p:txBody>
-          <a:bodyPr wrap="square" lIns="0" tIns="0" rIns="0" bIns="0" rtlCol="0" anchor="ctr"/>
-          <a:lstStyle/>
-          <a:p>
-            <a:pPr algn="ctr" indent="0" marL="0">
-              <a:buNone/>
-            </a:pPr>
-            <a:r>
-              <a:rPr lang="en-US" sz="1300" b="1" dirty="0">
-                <a:solidFill>
-                  <a:srgbClr val="FFFFFF"/>
-                </a:solidFill>
-                <a:latin typeface="Calibri" pitchFamily="34" charset="0"/>
-                <a:ea typeface="Calibri" pitchFamily="34" charset="-122"/>
-                <a:cs typeface="Calibri" pitchFamily="34" charset="-120"/>
-              </a:rPr>
-              <a:t>Events &amp; Announcements</a:t>
-            </a:r>
-            <a:endParaRPr lang="en-US" sz="1300" dirty="0"/>
-          </a:p>
-        </p:txBody>
-      </p:sp>
-    </p:spTree>
-  </p:cSld>
-  <p:clrMapOvr>
-    <a:masterClrMapping/>
-  </p:clrMapOvr>
-</p:sld>
-</file>
-
 <file path=ppt/slides/slide2.xml><?xml version="1.0" encoding="utf-8"?>
 <p:sld xmlns:a="http://schemas.openxmlformats.org/drawingml/2006/main" xmlns:r="http://schemas.openxmlformats.org/officeDocument/2006/relationships" xmlns:p="http://schemas.openxmlformats.org/presentationml/2006/main">
   <p:cSld name="Slide 2">
@@ -2319,7 +1842,7 @@
         </p:nvSpPr>
         <p:spPr>
           <a:xfrm>
-            <a:off x="457200" y="45720"/>
+            <a:off x="457200" y="548640"/>
             <a:ext cx="1280160" cy="1097280"/>
           </a:xfrm>
           <a:prstGeom prst="rect">
@@ -2358,8 +1881,8 @@
         </p:nvSpPr>
         <p:spPr>
           <a:xfrm>
-            <a:off x="457200" y="868680"/>
-            <a:ext cx="5303520" cy="685800"/>
+            <a:off x="457200" y="1371600"/>
+            <a:ext cx="7772400" cy="777240"/>
           </a:xfrm>
           <a:prstGeom prst="rect">
             <a:avLst/>
@@ -2375,7 +1898,7 @@
               <a:buNone/>
             </a:pPr>
             <a:r>
-              <a:rPr lang="en-US" sz="3800" b="1" dirty="0">
+              <a:rPr lang="en-US" sz="4400" b="1" dirty="0">
                 <a:solidFill>
                   <a:srgbClr val="FFFFFF"/>
                 </a:solidFill>
@@ -2385,7 +1908,7 @@
               </a:rPr>
               <a:t>Every day was a battle.</a:t>
             </a:r>
-            <a:endParaRPr lang="en-US" sz="3800" dirty="0"/>
+            <a:endParaRPr lang="en-US" sz="4400" dirty="0"/>
           </a:p>
         </p:txBody>
       </p:sp>
@@ -2397,8 +1920,8 @@
         </p:nvSpPr>
         <p:spPr>
           <a:xfrm>
-            <a:off x="457200" y="1691640"/>
-            <a:ext cx="5120640" cy="822960"/>
+            <a:off x="457200" y="2240280"/>
+            <a:ext cx="7315200" cy="822960"/>
           </a:xfrm>
           <a:prstGeom prst="rect">
             <a:avLst/>
@@ -2414,7 +1937,7 @@
               <a:buNone/>
             </a:pPr>
             <a:r>
-              <a:rPr lang="en-US" sz="1800" dirty="0">
+              <a:rPr lang="en-US" sz="2000" dirty="0">
                 <a:solidFill>
                   <a:srgbClr val="9CA3AF"/>
                 </a:solidFill>
@@ -2424,14 +1947,14 @@
               </a:rPr>
               <a:t>Stranded at the gate. Late again.</a:t>
             </a:r>
-            <a:endParaRPr lang="en-US" sz="1800" dirty="0"/>
+            <a:endParaRPr lang="en-US" sz="2000" dirty="0"/>
           </a:p>
           <a:p>
             <a:pPr algn="l" indent="0" marL="0">
               <a:buNone/>
             </a:pPr>
             <a:r>
-              <a:rPr lang="en-US" sz="1800" dirty="0">
+              <a:rPr lang="en-US" sz="2000" dirty="0">
                 <a:solidFill>
                   <a:srgbClr val="9CA3AF"/>
                 </a:solidFill>
@@ -2441,7 +1964,7 @@
               </a:rPr>
               <a:t>No ride. No plan. No choice.</a:t>
             </a:r>
-            <a:endParaRPr lang="en-US" sz="1800" dirty="0"/>
+            <a:endParaRPr lang="en-US" sz="2000" dirty="0"/>
           </a:p>
         </p:txBody>
       </p:sp>
@@ -2453,7 +1976,7 @@
         </p:nvSpPr>
         <p:spPr>
           <a:xfrm>
-            <a:off x="457200" y="2788920"/>
+            <a:off x="457200" y="3246120"/>
             <a:ext cx="3657600" cy="274320"/>
           </a:xfrm>
           <a:prstGeom prst="rect">
@@ -2470,7 +1993,7 @@
               <a:buNone/>
             </a:pPr>
             <a:r>
-              <a:rPr lang="en-US" sz="1100" i="1" dirty="0">
+              <a:rPr lang="en-US" sz="1200" i="1" dirty="0">
                 <a:solidFill>
                   <a:srgbClr val="6B7280"/>
                 </a:solidFill>
@@ -2480,254 +2003,7 @@
               </a:rPr>
               <a:t>— Krish, Founder</a:t>
             </a:r>
-            <a:endParaRPr lang="en-US" sz="1100" dirty="0"/>
-          </a:p>
-        </p:txBody>
-      </p:sp>
-      <p:sp>
-        <p:nvSpPr>
-          <p:cNvPr id="7" name="Shape 5"/>
-          <p:cNvSpPr/>
-          <p:nvPr/>
-        </p:nvSpPr>
-        <p:spPr>
-          <a:xfrm>
-            <a:off x="6492240" y="731520"/>
-            <a:ext cx="2286000" cy="3657600"/>
-          </a:xfrm>
-          <a:prstGeom prst="rect">
-            <a:avLst/>
-          </a:prstGeom>
-          <a:solidFill>
-            <a:srgbClr val="111124"/>
-          </a:solidFill>
-          <a:ln/>
-          <a:effectLst>
-            <a:outerShdw sx="100000" sy="100000" kx="0" ky="0" algn="bl" rotWithShape="0" blurRad="203200" dist="50800" dir="8100000">
-              <a:srgbClr val="000000">
-                <a:alpha val="35000"/>
-              </a:srgbClr>
-            </a:outerShdw>
-          </a:effectLst>
-        </p:spPr>
-      </p:sp>
-      <p:sp>
-        <p:nvSpPr>
-          <p:cNvPr id="8" name="Shape 6"/>
-          <p:cNvSpPr/>
-          <p:nvPr/>
-        </p:nvSpPr>
-        <p:spPr>
-          <a:xfrm>
-            <a:off x="6492240" y="731520"/>
-            <a:ext cx="2286000" cy="45720"/>
-          </a:xfrm>
-          <a:prstGeom prst="rect">
-            <a:avLst/>
-          </a:prstGeom>
-          <a:solidFill>
-            <a:srgbClr val="F87171"/>
-          </a:solidFill>
-          <a:ln/>
-        </p:spPr>
-      </p:sp>
-      <p:pic>
-        <p:nvPicPr>
-          <p:cNvPr id="9" name="Image 0" descr="preencoded.png">    </p:cNvPr>
-          <p:cNvPicPr>
-            <a:picLocks noChangeAspect="1"/>
-          </p:cNvPicPr>
-          <p:nvPr/>
-        </p:nvPicPr>
-        <p:blipFill>
-          <a:blip r:embed="rId1"/>
-          <a:stretch>
-            <a:fillRect/>
-          </a:stretch>
-        </p:blipFill>
-        <p:spPr>
-          <a:xfrm>
-            <a:off x="7269480" y="1188720"/>
-            <a:ext cx="640080" cy="640080"/>
-          </a:xfrm>
-          <a:prstGeom prst="rect">
-            <a:avLst/>
-          </a:prstGeom>
-        </p:spPr>
-      </p:pic>
-      <p:sp>
-        <p:nvSpPr>
-          <p:cNvPr id="10" name="Text 7"/>
-          <p:cNvSpPr/>
-          <p:nvPr/>
-        </p:nvSpPr>
-        <p:spPr>
-          <a:xfrm>
-            <a:off x="6537960" y="2011680"/>
-            <a:ext cx="2194560" cy="457200"/>
-          </a:xfrm>
-          <a:prstGeom prst="rect">
-            <a:avLst/>
-          </a:prstGeom>
-          <a:noFill/>
-          <a:ln/>
-        </p:spPr>
-        <p:txBody>
-          <a:bodyPr wrap="square" lIns="0" tIns="0" rIns="0" bIns="0" rtlCol="0" anchor="ctr"/>
-          <a:lstStyle/>
-          <a:p>
-            <a:pPr algn="ctr" indent="0" marL="0">
-              <a:buNone/>
-            </a:pPr>
-            <a:r>
-              <a:rPr lang="en-US" sz="2400" b="1" dirty="0">
-                <a:solidFill>
-                  <a:srgbClr val="FFFFFF"/>
-                </a:solidFill>
-                <a:latin typeface="Calibri" pitchFamily="34" charset="0"/>
-                <a:ea typeface="Calibri" pitchFamily="34" charset="-122"/>
-                <a:cs typeface="Calibri" pitchFamily="34" charset="-120"/>
-              </a:rPr>
-              <a:t>50+ Hrs</a:t>
-            </a:r>
-            <a:endParaRPr lang="en-US" sz="2400" dirty="0"/>
-          </a:p>
-        </p:txBody>
-      </p:sp>
-      <p:sp>
-        <p:nvSpPr>
-          <p:cNvPr id="11" name="Text 8"/>
-          <p:cNvSpPr/>
-          <p:nvPr/>
-        </p:nvSpPr>
-        <p:spPr>
-          <a:xfrm>
-            <a:off x="6537960" y="2487168"/>
-            <a:ext cx="2194560" cy="256032"/>
-          </a:xfrm>
-          <a:prstGeom prst="rect">
-            <a:avLst/>
-          </a:prstGeom>
-          <a:noFill/>
-          <a:ln/>
-        </p:spPr>
-        <p:txBody>
-          <a:bodyPr wrap="square" lIns="0" tIns="0" rIns="0" bIns="0" rtlCol="0" anchor="ctr"/>
-          <a:lstStyle/>
-          <a:p>
-            <a:pPr algn="ctr" indent="0" marL="0">
-              <a:buNone/>
-            </a:pPr>
-            <a:r>
-              <a:rPr lang="en-US" sz="1000" dirty="0">
-                <a:solidFill>
-                  <a:srgbClr val="6B7280"/>
-                </a:solidFill>
-                <a:latin typeface="Calibri" pitchFamily="34" charset="0"/>
-                <a:ea typeface="Calibri" pitchFamily="34" charset="-122"/>
-                <a:cs typeface="Calibri" pitchFamily="34" charset="-120"/>
-              </a:rPr>
-              <a:t>avg monthly commute</a:t>
-            </a:r>
-            <a:endParaRPr lang="en-US" sz="1000" dirty="0"/>
-          </a:p>
-        </p:txBody>
-      </p:sp>
-      <p:sp>
-        <p:nvSpPr>
-          <p:cNvPr id="12" name="Shape 9"/>
-          <p:cNvSpPr/>
-          <p:nvPr/>
-        </p:nvSpPr>
-        <p:spPr>
-          <a:xfrm>
-            <a:off x="6903720" y="2880360"/>
-            <a:ext cx="1463040" cy="27432"/>
-          </a:xfrm>
-          <a:prstGeom prst="rect">
-            <a:avLst/>
-          </a:prstGeom>
-          <a:solidFill>
-            <a:srgbClr val="2A2A44"/>
-          </a:solidFill>
-          <a:ln/>
-        </p:spPr>
-      </p:sp>
-      <p:sp>
-        <p:nvSpPr>
-          <p:cNvPr id="13" name="Text 10"/>
-          <p:cNvSpPr/>
-          <p:nvPr/>
-        </p:nvSpPr>
-        <p:spPr>
-          <a:xfrm>
-            <a:off x="6537960" y="3017520"/>
-            <a:ext cx="2194560" cy="347472"/>
-          </a:xfrm>
-          <a:prstGeom prst="rect">
-            <a:avLst/>
-          </a:prstGeom>
-          <a:noFill/>
-          <a:ln/>
-        </p:spPr>
-        <p:txBody>
-          <a:bodyPr wrap="square" lIns="0" tIns="0" rIns="0" bIns="0" rtlCol="0" anchor="ctr"/>
-          <a:lstStyle/>
-          <a:p>
-            <a:pPr algn="ctr" indent="0" marL="0">
-              <a:buNone/>
-            </a:pPr>
-            <a:r>
-              <a:rPr lang="en-US" sz="1300" b="1" dirty="0">
-                <a:solidFill>
-                  <a:srgbClr val="F87171"/>
-                </a:solidFill>
-                <a:latin typeface="Calibri" pitchFamily="34" charset="0"/>
-                <a:ea typeface="Calibri" pitchFamily="34" charset="-122"/>
-                <a:cs typeface="Calibri" pitchFamily="34" charset="-120"/>
-              </a:rPr>
-              <a:t>Month after month.</a:t>
-            </a:r>
-            <a:endParaRPr lang="en-US" sz="1300" dirty="0"/>
-          </a:p>
-        </p:txBody>
-      </p:sp>
-      <p:sp>
-        <p:nvSpPr>
-          <p:cNvPr id="14" name="Text 11"/>
-          <p:cNvSpPr/>
-          <p:nvPr/>
-        </p:nvSpPr>
-        <p:spPr>
-          <a:xfrm>
-            <a:off x="6537960" y="3429000"/>
-            <a:ext cx="2194560" cy="640080"/>
-          </a:xfrm>
-          <a:prstGeom prst="rect">
-            <a:avLst/>
-          </a:prstGeom>
-          <a:noFill/>
-          <a:ln/>
-        </p:spPr>
-        <p:txBody>
-          <a:bodyPr wrap="square" lIns="0" tIns="0" rIns="0" bIns="0" rtlCol="0" anchor="ctr"/>
-          <a:lstStyle/>
-          <a:p>
-            <a:pPr algn="ctr" indent="0" marL="0">
-              <a:buNone/>
-            </a:pPr>
-            <a:r>
-              <a:rPr lang="en-US" sz="1100" dirty="0">
-                <a:solidFill>
-                  <a:srgbClr val="6B7280"/>
-                </a:solidFill>
-                <a:latin typeface="Calibri" pitchFamily="34" charset="0"/>
-                <a:ea typeface="Calibri" pitchFamily="34" charset="-122"/>
-                <a:cs typeface="Calibri" pitchFamily="34" charset="-120"/>
-              </a:rPr>
-              <a:t>for millions of students</a:t>
-            </a:r>
-            <a:endParaRPr lang="en-US" sz="1100" dirty="0"/>
+            <a:endParaRPr lang="en-US" sz="1200" dirty="0"/>
           </a:p>
         </p:txBody>
       </p:sp>
@@ -2765,13 +2041,42 @@
       </p:grpSpPr>
       <p:sp>
         <p:nvSpPr>
-          <p:cNvPr id="2" name="Text 0"/>
-          <p:cNvSpPr/>
-          <p:nvPr/>
-        </p:nvSpPr>
-        <p:spPr>
-          <a:xfrm>
-            <a:off x="548640" y="320040"/>
+          <p:cNvPr id="2" name="Shape 0"/>
+          <p:cNvSpPr/>
+          <p:nvPr/>
+        </p:nvSpPr>
+        <p:spPr>
+          <a:xfrm>
+            <a:off x="2743200" y="-1371600"/>
+            <a:ext cx="4572000" cy="4572000"/>
+          </a:xfrm>
+          <a:prstGeom prst="ellipse">
+            <a:avLst/>
+          </a:prstGeom>
+          <a:solidFill>
+            <a:srgbClr val="6366F1">
+              <a:alpha val="8000"/>
+            </a:srgbClr>
+          </a:solidFill>
+          <a:ln w="12700">
+            <a:solidFill>
+              <a:srgbClr val="6366F1">
+                <a:alpha val="8000"/>
+              </a:srgbClr>
+            </a:solidFill>
+            <a:prstDash val="solid"/>
+          </a:ln>
+        </p:spPr>
+      </p:sp>
+      <p:sp>
+        <p:nvSpPr>
+          <p:cNvPr id="3" name="Text 1"/>
+          <p:cNvSpPr/>
+          <p:nvPr/>
+        </p:nvSpPr>
+        <p:spPr>
+          <a:xfrm>
+            <a:off x="548640" y="256032"/>
             <a:ext cx="8046720" cy="566928"/>
           </a:xfrm>
           <a:prstGeom prst="rect">
@@ -2796,7 +2101,7 @@
                 <a:ea typeface="Calibri" pitchFamily="34" charset="-122"/>
                 <a:cs typeface="Calibri" pitchFamily="34" charset="-120"/>
               </a:rPr>
-              <a:t>And it's not just me.</a:t>
+              <a:t>The scale of the problem.</a:t>
             </a:r>
             <a:endParaRPr lang="en-US" sz="3400" dirty="0"/>
           </a:p>
@@ -2804,14 +2109,14 @@
       </p:sp>
       <p:sp>
         <p:nvSpPr>
-          <p:cNvPr id="3" name="Shape 1"/>
-          <p:cNvSpPr/>
-          <p:nvPr/>
-        </p:nvSpPr>
-        <p:spPr>
-          <a:xfrm>
-            <a:off x="365760" y="1143000"/>
-            <a:ext cx="2651760" cy="3566160"/>
+          <p:cNvPr id="4" name="Shape 2"/>
+          <p:cNvSpPr/>
+          <p:nvPr/>
+        </p:nvSpPr>
+        <p:spPr>
+          <a:xfrm>
+            <a:off x="365760" y="1051560"/>
+            <a:ext cx="2651760" cy="3611880"/>
           </a:xfrm>
           <a:prstGeom prst="rect">
             <a:avLst/>
@@ -2831,13 +2136,13 @@
       </p:sp>
       <p:sp>
         <p:nvSpPr>
-          <p:cNvPr id="4" name="Shape 2"/>
-          <p:cNvSpPr/>
-          <p:nvPr/>
-        </p:nvSpPr>
-        <p:spPr>
-          <a:xfrm>
-            <a:off x="365760" y="1143000"/>
+          <p:cNvPr id="5" name="Shape 3"/>
+          <p:cNvSpPr/>
+          <p:nvPr/>
+        </p:nvSpPr>
+        <p:spPr>
+          <a:xfrm>
+            <a:off x="365760" y="1051560"/>
             <a:ext cx="2651760" cy="45720"/>
           </a:xfrm>
           <a:prstGeom prst="rect">
@@ -2851,7 +2156,7 @@
       </p:sp>
       <p:pic>
         <p:nvPicPr>
-          <p:cNvPr id="5" name="Image 0" descr="preencoded.png">    </p:cNvPr>
+          <p:cNvPr id="6" name="Image 0" descr="preencoded.png">    </p:cNvPr>
           <p:cNvPicPr>
             <a:picLocks noChangeAspect="1"/>
           </p:cNvPicPr>
@@ -2865,7 +2170,7 @@
         </p:blipFill>
         <p:spPr>
           <a:xfrm>
-            <a:off x="1417320" y="1371600"/>
+            <a:off x="1417320" y="1325880"/>
             <a:ext cx="548640" cy="548640"/>
           </a:xfrm>
           <a:prstGeom prst="rect">
@@ -2875,7 +2180,7 @@
       </p:pic>
       <p:sp>
         <p:nvSpPr>
-          <p:cNvPr id="6" name="Text 3"/>
+          <p:cNvPr id="7" name="Text 4"/>
           <p:cNvSpPr/>
           <p:nvPr/>
         </p:nvSpPr>
@@ -2914,14 +2219,14 @@
       </p:sp>
       <p:sp>
         <p:nvSpPr>
-          <p:cNvPr id="7" name="Text 4"/>
+          <p:cNvPr id="8" name="Text 5"/>
           <p:cNvSpPr/>
           <p:nvPr/>
         </p:nvSpPr>
         <p:spPr>
           <a:xfrm>
             <a:off x="502920" y="2807208"/>
-            <a:ext cx="2377440" cy="685800"/>
+            <a:ext cx="2377440" cy="640080"/>
           </a:xfrm>
           <a:prstGeom prst="rect">
             <a:avLst/>
@@ -2970,14 +2275,14 @@
       </p:sp>
       <p:sp>
         <p:nvSpPr>
-          <p:cNvPr id="8" name="Shape 5"/>
-          <p:cNvSpPr/>
-          <p:nvPr/>
-        </p:nvSpPr>
-        <p:spPr>
-          <a:xfrm>
-            <a:off x="3200400" y="1143000"/>
-            <a:ext cx="2651760" cy="3566160"/>
+          <p:cNvPr id="9" name="Shape 6"/>
+          <p:cNvSpPr/>
+          <p:nvPr/>
+        </p:nvSpPr>
+        <p:spPr>
+          <a:xfrm>
+            <a:off x="3200400" y="1051560"/>
+            <a:ext cx="2651760" cy="3611880"/>
           </a:xfrm>
           <a:prstGeom prst="rect">
             <a:avLst/>
@@ -2997,13 +2302,13 @@
       </p:sp>
       <p:sp>
         <p:nvSpPr>
-          <p:cNvPr id="9" name="Shape 6"/>
-          <p:cNvSpPr/>
-          <p:nvPr/>
-        </p:nvSpPr>
-        <p:spPr>
-          <a:xfrm>
-            <a:off x="3200400" y="1143000"/>
+          <p:cNvPr id="10" name="Shape 7"/>
+          <p:cNvSpPr/>
+          <p:nvPr/>
+        </p:nvSpPr>
+        <p:spPr>
+          <a:xfrm>
+            <a:off x="3200400" y="1051560"/>
             <a:ext cx="2651760" cy="45720"/>
           </a:xfrm>
           <a:prstGeom prst="rect">
@@ -3017,7 +2322,7 @@
       </p:sp>
       <p:pic>
         <p:nvPicPr>
-          <p:cNvPr id="10" name="Image 1" descr="preencoded.png">    </p:cNvPr>
+          <p:cNvPr id="11" name="Image 1" descr="preencoded.png">    </p:cNvPr>
           <p:cNvPicPr>
             <a:picLocks noChangeAspect="1"/>
           </p:cNvPicPr>
@@ -3031,7 +2336,7 @@
         </p:blipFill>
         <p:spPr>
           <a:xfrm>
-            <a:off x="4251960" y="1371600"/>
+            <a:off x="4251960" y="1325880"/>
             <a:ext cx="548640" cy="548640"/>
           </a:xfrm>
           <a:prstGeom prst="rect">
@@ -3041,7 +2346,7 @@
       </p:pic>
       <p:sp>
         <p:nvSpPr>
-          <p:cNvPr id="11" name="Text 7"/>
+          <p:cNvPr id="12" name="Text 8"/>
           <p:cNvSpPr/>
           <p:nvPr/>
         </p:nvSpPr>
@@ -3072,7 +2377,7 @@
                 <a:ea typeface="Calibri" pitchFamily="34" charset="-122"/>
                 <a:cs typeface="Calibri" pitchFamily="34" charset="-120"/>
               </a:rPr>
-              <a:t>59 Min</a:t>
+              <a:t>50+ Hrs</a:t>
             </a:r>
             <a:endParaRPr lang="en-US" sz="4000" dirty="0"/>
           </a:p>
@@ -3080,14 +2385,14 @@
       </p:sp>
       <p:sp>
         <p:nvSpPr>
-          <p:cNvPr id="12" name="Text 8"/>
+          <p:cNvPr id="13" name="Text 9"/>
           <p:cNvSpPr/>
           <p:nvPr/>
         </p:nvSpPr>
         <p:spPr>
           <a:xfrm>
             <a:off x="3337560" y="2807208"/>
-            <a:ext cx="2377440" cy="685800"/>
+            <a:ext cx="2377440" cy="640080"/>
           </a:xfrm>
           <a:prstGeom prst="rect">
             <a:avLst/>
@@ -3111,7 +2416,7 @@
                 <a:ea typeface="Calibri" pitchFamily="34" charset="-122"/>
                 <a:cs typeface="Calibri" pitchFamily="34" charset="-120"/>
               </a:rPr>
-              <a:t>Average one-way commute</a:t>
+              <a:t>Average monthly</a:t>
             </a:r>
             <a:endParaRPr lang="en-US" sz="1300" dirty="0"/>
           </a:p>
@@ -3128,7 +2433,7 @@
                 <a:ea typeface="Calibri" pitchFamily="34" charset="-122"/>
                 <a:cs typeface="Calibri" pitchFamily="34" charset="-120"/>
               </a:rPr>
-              <a:t>(MoveInSync 2023)</a:t>
+              <a:t>commute time</a:t>
             </a:r>
             <a:endParaRPr lang="en-US" sz="1300" dirty="0"/>
           </a:p>
@@ -3136,14 +2441,14 @@
       </p:sp>
       <p:sp>
         <p:nvSpPr>
-          <p:cNvPr id="13" name="Shape 9"/>
-          <p:cNvSpPr/>
-          <p:nvPr/>
-        </p:nvSpPr>
-        <p:spPr>
-          <a:xfrm>
-            <a:off x="6035040" y="1143000"/>
-            <a:ext cx="2651760" cy="3566160"/>
+          <p:cNvPr id="14" name="Shape 10"/>
+          <p:cNvSpPr/>
+          <p:nvPr/>
+        </p:nvSpPr>
+        <p:spPr>
+          <a:xfrm>
+            <a:off x="6035040" y="1051560"/>
+            <a:ext cx="2651760" cy="3611880"/>
           </a:xfrm>
           <a:prstGeom prst="rect">
             <a:avLst/>
@@ -3163,27 +2468,27 @@
       </p:sp>
       <p:sp>
         <p:nvSpPr>
-          <p:cNvPr id="14" name="Shape 10"/>
-          <p:cNvSpPr/>
-          <p:nvPr/>
-        </p:nvSpPr>
-        <p:spPr>
-          <a:xfrm>
-            <a:off x="6035040" y="1143000"/>
+          <p:cNvPr id="15" name="Shape 11"/>
+          <p:cNvSpPr/>
+          <p:nvPr/>
+        </p:nvSpPr>
+        <p:spPr>
+          <a:xfrm>
+            <a:off x="6035040" y="1051560"/>
             <a:ext cx="2651760" cy="45720"/>
           </a:xfrm>
           <a:prstGeom prst="rect">
             <a:avLst/>
           </a:prstGeom>
           <a:solidFill>
-            <a:srgbClr val="A5B4FC"/>
+            <a:srgbClr val="6366F1"/>
           </a:solidFill>
           <a:ln/>
         </p:spPr>
       </p:sp>
       <p:pic>
         <p:nvPicPr>
-          <p:cNvPr id="15" name="Image 2" descr="preencoded.png">    </p:cNvPr>
+          <p:cNvPr id="16" name="Image 2" descr="preencoded.png">    </p:cNvPr>
           <p:cNvPicPr>
             <a:picLocks noChangeAspect="1"/>
           </p:cNvPicPr>
@@ -3197,7 +2502,7 @@
         </p:blipFill>
         <p:spPr>
           <a:xfrm>
-            <a:off x="7086600" y="1371600"/>
+            <a:off x="7086600" y="1325880"/>
             <a:ext cx="548640" cy="548640"/>
           </a:xfrm>
           <a:prstGeom prst="rect">
@@ -3207,7 +2512,7 @@
       </p:pic>
       <p:sp>
         <p:nvSpPr>
-          <p:cNvPr id="16" name="Text 11"/>
+          <p:cNvPr id="17" name="Text 12"/>
           <p:cNvSpPr/>
           <p:nvPr/>
         </p:nvSpPr>
@@ -3238,7 +2543,7 @@
                 <a:ea typeface="Calibri" pitchFamily="34" charset="-122"/>
                 <a:cs typeface="Calibri" pitchFamily="34" charset="-120"/>
               </a:rPr>
-              <a:t>80%</a:t>
+              <a:t>₹1.2L Cr</a:t>
             </a:r>
             <a:endParaRPr lang="en-US" sz="4000" dirty="0"/>
           </a:p>
@@ -3246,14 +2551,14 @@
       </p:sp>
       <p:sp>
         <p:nvSpPr>
-          <p:cNvPr id="17" name="Text 12"/>
+          <p:cNvPr id="18" name="Text 13"/>
           <p:cNvSpPr/>
           <p:nvPr/>
         </p:nvSpPr>
         <p:spPr>
           <a:xfrm>
             <a:off x="6172200" y="2807208"/>
-            <a:ext cx="2377440" cy="685800"/>
+            <a:ext cx="2377440" cy="640080"/>
           </a:xfrm>
           <a:prstGeom prst="rect">
             <a:avLst/>
@@ -3277,7 +2582,7 @@
                 <a:ea typeface="Calibri" pitchFamily="34" charset="-122"/>
                 <a:cs typeface="Calibri" pitchFamily="34" charset="-120"/>
               </a:rPr>
-              <a:t>Students have no hostel —</a:t>
+              <a:t>Annual campus</a:t>
             </a:r>
             <a:endParaRPr lang="en-US" sz="1300" dirty="0"/>
           </a:p>
@@ -3294,7 +2599,7 @@
                 <a:ea typeface="Calibri" pitchFamily="34" charset="-122"/>
                 <a:cs typeface="Calibri" pitchFamily="34" charset="-120"/>
               </a:rPr>
-              <a:t>forced to commute daily</a:t>
+              <a:t>commute market</a:t>
             </a:r>
             <a:endParaRPr lang="en-US" sz="1300" dirty="0"/>
           </a:p>
@@ -3302,7 +2607,7 @@
       </p:sp>
       <p:sp>
         <p:nvSpPr>
-          <p:cNvPr id="18" name="Text 13"/>
+          <p:cNvPr id="19" name="Text 14"/>
           <p:cNvSpPr/>
           <p:nvPr/>
         </p:nvSpPr>
@@ -3333,7 +2638,7 @@
                 <a:ea typeface="Calibri" pitchFamily="34" charset="-122"/>
                 <a:cs typeface="Calibri" pitchFamily="34" charset="-120"/>
               </a:rPr>
-              <a:t>Sources: AISHE 2022–23 (education.gov.in)  ·  MoveInSync Urban Mobility Report 2023 (moveinsync.com)  ·  UGC Annual Report 2023–24 (ugc.ac.in)</a:t>
+              <a:t>Sources: AISHE 2022–23 (education.gov.in)  ·  MoveInSync Urban Mobility Report 2023  ·  UGC Annual Report 2023–24 (ugc.ac.in)  ·  Market sizing estimated</a:t>
             </a:r>
             <a:endParaRPr lang="en-US" sz="800" dirty="0"/>
           </a:p>
@@ -3373,32 +2678,42 @@
       </p:grpSpPr>
       <p:sp>
         <p:nvSpPr>
-          <p:cNvPr id="2" name="Shape 0"/>
-          <p:cNvSpPr/>
-          <p:nvPr/>
-        </p:nvSpPr>
-        <p:spPr>
-          <a:xfrm>
-            <a:off x="3200400" y="-1371600"/>
-            <a:ext cx="4572000" cy="4572000"/>
-          </a:xfrm>
-          <a:prstGeom prst="ellipse">
-            <a:avLst/>
-          </a:prstGeom>
-          <a:solidFill>
-            <a:srgbClr val="6366F1">
-              <a:alpha val="8000"/>
-            </a:srgbClr>
-          </a:solidFill>
-          <a:ln w="12700">
-            <a:solidFill>
-              <a:srgbClr val="6366F1">
-                <a:alpha val="8000"/>
-              </a:srgbClr>
-            </a:solidFill>
-            <a:prstDash val="solid"/>
-          </a:ln>
-        </p:spPr>
+          <p:cNvPr id="2" name="Text 0"/>
+          <p:cNvSpPr/>
+          <p:nvPr/>
+        </p:nvSpPr>
+        <p:spPr>
+          <a:xfrm>
+            <a:off x="457200" y="182880"/>
+            <a:ext cx="4572000" cy="530352"/>
+          </a:xfrm>
+          <a:prstGeom prst="rect">
+            <a:avLst/>
+          </a:prstGeom>
+          <a:noFill/>
+          <a:ln/>
+        </p:spPr>
+        <p:txBody>
+          <a:bodyPr wrap="square" lIns="0" tIns="0" rIns="0" bIns="0" rtlCol="0" anchor="ctr"/>
+          <a:lstStyle/>
+          <a:p>
+            <a:pPr algn="l" indent="0" marL="0">
+              <a:buNone/>
+            </a:pPr>
+            <a:r>
+              <a:rPr lang="en-US" sz="3200" b="1" dirty="0">
+                <a:solidFill>
+                  <a:srgbClr val="FFFFFF"/>
+                </a:solidFill>
+                <a:latin typeface="Calibri" pitchFamily="34" charset="0"/>
+                <a:ea typeface="Calibri" pitchFamily="34" charset="-122"/>
+                <a:cs typeface="Calibri" pitchFamily="34" charset="-120"/>
+              </a:rPr>
+              <a:t>A market built to scale.</a:t>
+            </a:r>
+            <a:endParaRPr lang="en-US" sz="3200" dirty="0"/>
+          </a:p>
+        </p:txBody>
       </p:sp>
       <p:sp>
         <p:nvSpPr>
@@ -3408,8 +2723,8 @@
         </p:nvSpPr>
         <p:spPr>
           <a:xfrm>
-            <a:off x="548640" y="274320"/>
-            <a:ext cx="8046720" cy="566928"/>
+            <a:off x="457200" y="749808"/>
+            <a:ext cx="4389120" cy="384048"/>
           </a:xfrm>
           <a:prstGeom prst="rect">
             <a:avLst/>
@@ -3425,17 +2740,17 @@
               <a:buNone/>
             </a:pPr>
             <a:r>
-              <a:rPr lang="en-US" sz="3400" b="1" dirty="0">
-                <a:solidFill>
-                  <a:srgbClr val="FFFFFF"/>
-                </a:solidFill>
-                <a:latin typeface="Calibri" pitchFamily="34" charset="0"/>
-                <a:ea typeface="Calibri" pitchFamily="34" charset="-122"/>
-                <a:cs typeface="Calibri" pitchFamily="34" charset="-120"/>
-              </a:rPr>
-              <a:t>The opportunity is massive.</a:t>
-            </a:r>
-            <a:endParaRPr lang="en-US" sz="3400" dirty="0"/>
+              <a:rPr lang="en-US" sz="1200" dirty="0">
+                <a:solidFill>
+                  <a:srgbClr val="9CA3AF"/>
+                </a:solidFill>
+                <a:latin typeface="Calibri" pitchFamily="34" charset="0"/>
+                <a:ea typeface="Calibri" pitchFamily="34" charset="-122"/>
+                <a:cs typeface="Calibri" pitchFamily="34" charset="-120"/>
+              </a:rPr>
+              <a:t>Starting campus-native, expanding across India's 1,000+ universities.</a:t>
+            </a:r>
+            <a:endParaRPr lang="en-US" sz="1200" dirty="0"/>
           </a:p>
         </p:txBody>
       </p:sp>
@@ -3447,8 +2762,8 @@
         </p:nvSpPr>
         <p:spPr>
           <a:xfrm>
-            <a:off x="365760" y="1051560"/>
-            <a:ext cx="2651760" cy="1920240"/>
+            <a:off x="365760" y="1325880"/>
+            <a:ext cx="4389120" cy="1051560"/>
           </a:xfrm>
           <a:prstGeom prst="rect">
             <a:avLst/>
@@ -3474,8 +2789,8 @@
         </p:nvSpPr>
         <p:spPr>
           <a:xfrm>
-            <a:off x="365760" y="1051560"/>
-            <a:ext cx="2651760" cy="45720"/>
+            <a:off x="365760" y="1325880"/>
+            <a:ext cx="54864" cy="1051560"/>
           </a:xfrm>
           <a:prstGeom prst="rect">
             <a:avLst/>
@@ -3488,14 +2803,34 @@
       </p:sp>
       <p:sp>
         <p:nvSpPr>
-          <p:cNvPr id="6" name="Text 4"/>
-          <p:cNvSpPr/>
-          <p:nvPr/>
-        </p:nvSpPr>
-        <p:spPr>
-          <a:xfrm>
-            <a:off x="457200" y="1234440"/>
-            <a:ext cx="2468880" cy="685800"/>
+          <p:cNvPr id="6" name="Shape 4"/>
+          <p:cNvSpPr/>
+          <p:nvPr/>
+        </p:nvSpPr>
+        <p:spPr>
+          <a:xfrm>
+            <a:off x="566928" y="1481328"/>
+            <a:ext cx="621792" cy="256032"/>
+          </a:xfrm>
+          <a:prstGeom prst="rect">
+            <a:avLst/>
+          </a:prstGeom>
+          <a:solidFill>
+            <a:srgbClr val="6366F1"/>
+          </a:solidFill>
+          <a:ln/>
+        </p:spPr>
+      </p:sp>
+      <p:sp>
+        <p:nvSpPr>
+          <p:cNvPr id="7" name="Text 5"/>
+          <p:cNvSpPr/>
+          <p:nvPr/>
+        </p:nvSpPr>
+        <p:spPr>
+          <a:xfrm>
+            <a:off x="566928" y="1481328"/>
+            <a:ext cx="621792" cy="256032"/>
           </a:xfrm>
           <a:prstGeom prst="rect">
             <a:avLst/>
@@ -3511,7 +2846,46 @@
               <a:buNone/>
             </a:pPr>
             <a:r>
-              <a:rPr lang="en-US" sz="3800" b="1" dirty="0">
+              <a:rPr lang="en-US" sz="1100" b="1" dirty="0">
+                <a:solidFill>
+                  <a:srgbClr val="07070F"/>
+                </a:solidFill>
+                <a:latin typeface="Calibri" pitchFamily="34" charset="0"/>
+                <a:ea typeface="Calibri" pitchFamily="34" charset="-122"/>
+                <a:cs typeface="Calibri" pitchFamily="34" charset="-120"/>
+              </a:rPr>
+              <a:t>TAM</a:t>
+            </a:r>
+            <a:endParaRPr lang="en-US" sz="1100" dirty="0"/>
+          </a:p>
+        </p:txBody>
+      </p:sp>
+      <p:sp>
+        <p:nvSpPr>
+          <p:cNvPr id="8" name="Text 6"/>
+          <p:cNvSpPr/>
+          <p:nvPr/>
+        </p:nvSpPr>
+        <p:spPr>
+          <a:xfrm>
+            <a:off x="1316736" y="1417320"/>
+            <a:ext cx="3291840" cy="457200"/>
+          </a:xfrm>
+          <a:prstGeom prst="rect">
+            <a:avLst/>
+          </a:prstGeom>
+          <a:noFill/>
+          <a:ln/>
+        </p:spPr>
+        <p:txBody>
+          <a:bodyPr wrap="square" lIns="0" tIns="0" rIns="0" bIns="0" rtlCol="0" anchor="ctr"/>
+          <a:lstStyle/>
+          <a:p>
+            <a:pPr algn="l" indent="0" marL="0">
+              <a:buNone/>
+            </a:pPr>
+            <a:r>
+              <a:rPr lang="en-US" sz="2800" b="1" dirty="0">
                 <a:solidFill>
                   <a:srgbClr val="FFFFFF"/>
                 </a:solidFill>
@@ -3519,22 +2893,22 @@
                 <a:ea typeface="Calibri" pitchFamily="34" charset="-122"/>
                 <a:cs typeface="Calibri" pitchFamily="34" charset="-120"/>
               </a:rPr>
-              <a:t>40M+</a:t>
-            </a:r>
-            <a:endParaRPr lang="en-US" sz="3800" dirty="0"/>
-          </a:p>
-        </p:txBody>
-      </p:sp>
-      <p:sp>
-        <p:nvSpPr>
-          <p:cNvPr id="7" name="Text 5"/>
-          <p:cNvSpPr/>
-          <p:nvPr/>
-        </p:nvSpPr>
-        <p:spPr>
-          <a:xfrm>
-            <a:off x="457200" y="1965960"/>
-            <a:ext cx="2468880" cy="594360"/>
+              <a:t>₹1.2L Cr</a:t>
+            </a:r>
+            <a:endParaRPr lang="en-US" sz="2800" dirty="0"/>
+          </a:p>
+        </p:txBody>
+      </p:sp>
+      <p:sp>
+        <p:nvSpPr>
+          <p:cNvPr id="9" name="Text 7"/>
+          <p:cNvSpPr/>
+          <p:nvPr/>
+        </p:nvSpPr>
+        <p:spPr>
+          <a:xfrm>
+            <a:off x="1316736" y="1920240"/>
+            <a:ext cx="3291840" cy="274320"/>
           </a:xfrm>
           <a:prstGeom prst="rect">
             <a:avLst/>
@@ -3546,51 +2920,34 @@
           <a:bodyPr wrap="square" lIns="0" tIns="0" rIns="0" bIns="0" rtlCol="0" anchor="ctr"/>
           <a:lstStyle/>
           <a:p>
-            <a:pPr algn="ctr" indent="0" marL="0">
-              <a:buNone/>
-            </a:pPr>
-            <a:r>
-              <a:rPr lang="en-US" sz="1200" dirty="0">
-                <a:solidFill>
-                  <a:srgbClr val="9CA3AF"/>
-                </a:solidFill>
-                <a:latin typeface="Calibri" pitchFamily="34" charset="0"/>
-                <a:ea typeface="Calibri" pitchFamily="34" charset="-122"/>
-                <a:cs typeface="Calibri" pitchFamily="34" charset="-120"/>
-              </a:rPr>
-              <a:t>College students</a:t>
-            </a:r>
-            <a:endParaRPr lang="en-US" sz="1200" dirty="0"/>
-          </a:p>
-          <a:p>
-            <a:pPr algn="ctr" indent="0" marL="0">
-              <a:buNone/>
-            </a:pPr>
-            <a:r>
-              <a:rPr lang="en-US" sz="1200" dirty="0">
-                <a:solidFill>
-                  <a:srgbClr val="9CA3AF"/>
-                </a:solidFill>
-                <a:latin typeface="Calibri" pitchFamily="34" charset="0"/>
-                <a:ea typeface="Calibri" pitchFamily="34" charset="-122"/>
-                <a:cs typeface="Calibri" pitchFamily="34" charset="-120"/>
-              </a:rPr>
-              <a:t>in India</a:t>
-            </a:r>
-            <a:endParaRPr lang="en-US" sz="1200" dirty="0"/>
-          </a:p>
-        </p:txBody>
-      </p:sp>
-      <p:sp>
-        <p:nvSpPr>
-          <p:cNvPr id="8" name="Shape 6"/>
-          <p:cNvSpPr/>
-          <p:nvPr/>
-        </p:nvSpPr>
-        <p:spPr>
-          <a:xfrm>
-            <a:off x="3200400" y="1051560"/>
-            <a:ext cx="2651760" cy="1920240"/>
+            <a:pPr algn="l" indent="0" marL="0">
+              <a:buNone/>
+            </a:pPr>
+            <a:r>
+              <a:rPr lang="en-US" sz="1100" dirty="0">
+                <a:solidFill>
+                  <a:srgbClr val="6B7280"/>
+                </a:solidFill>
+                <a:latin typeface="Calibri" pitchFamily="34" charset="0"/>
+                <a:ea typeface="Calibri" pitchFamily="34" charset="-122"/>
+                <a:cs typeface="Calibri" pitchFamily="34" charset="-120"/>
+              </a:rPr>
+              <a:t>40M+ students × ₹2,500/mo</a:t>
+            </a:r>
+            <a:endParaRPr lang="en-US" sz="1100" dirty="0"/>
+          </a:p>
+        </p:txBody>
+      </p:sp>
+      <p:sp>
+        <p:nvSpPr>
+          <p:cNvPr id="10" name="Shape 8"/>
+          <p:cNvSpPr/>
+          <p:nvPr/>
+        </p:nvSpPr>
+        <p:spPr>
+          <a:xfrm>
+            <a:off x="365760" y="2560320"/>
+            <a:ext cx="4389120" cy="1051560"/>
           </a:xfrm>
           <a:prstGeom prst="rect">
             <a:avLst/>
@@ -3610,14 +2967,14 @@
       </p:sp>
       <p:sp>
         <p:nvSpPr>
-          <p:cNvPr id="9" name="Shape 7"/>
-          <p:cNvSpPr/>
-          <p:nvPr/>
-        </p:nvSpPr>
-        <p:spPr>
-          <a:xfrm>
-            <a:off x="3200400" y="1051560"/>
-            <a:ext cx="2651760" cy="45720"/>
+          <p:cNvPr id="11" name="Shape 9"/>
+          <p:cNvSpPr/>
+          <p:nvPr/>
+        </p:nvSpPr>
+        <p:spPr>
+          <a:xfrm>
+            <a:off x="365760" y="2560320"/>
+            <a:ext cx="54864" cy="1051560"/>
           </a:xfrm>
           <a:prstGeom prst="rect">
             <a:avLst/>
@@ -3630,14 +2987,34 @@
       </p:sp>
       <p:sp>
         <p:nvSpPr>
-          <p:cNvPr id="10" name="Text 8"/>
-          <p:cNvSpPr/>
-          <p:nvPr/>
-        </p:nvSpPr>
-        <p:spPr>
-          <a:xfrm>
-            <a:off x="3291840" y="1234440"/>
-            <a:ext cx="2468880" cy="685800"/>
+          <p:cNvPr id="12" name="Shape 10"/>
+          <p:cNvSpPr/>
+          <p:nvPr/>
+        </p:nvSpPr>
+        <p:spPr>
+          <a:xfrm>
+            <a:off x="566928" y="2715768"/>
+            <a:ext cx="621792" cy="256032"/>
+          </a:xfrm>
+          <a:prstGeom prst="rect">
+            <a:avLst/>
+          </a:prstGeom>
+          <a:solidFill>
+            <a:srgbClr val="10B981"/>
+          </a:solidFill>
+          <a:ln/>
+        </p:spPr>
+      </p:sp>
+      <p:sp>
+        <p:nvSpPr>
+          <p:cNvPr id="13" name="Text 11"/>
+          <p:cNvSpPr/>
+          <p:nvPr/>
+        </p:nvSpPr>
+        <p:spPr>
+          <a:xfrm>
+            <a:off x="566928" y="2715768"/>
+            <a:ext cx="621792" cy="256032"/>
           </a:xfrm>
           <a:prstGeom prst="rect">
             <a:avLst/>
@@ -3653,7 +3030,46 @@
               <a:buNone/>
             </a:pPr>
             <a:r>
-              <a:rPr lang="en-US" sz="3800" b="1" dirty="0">
+              <a:rPr lang="en-US" sz="1100" b="1" dirty="0">
+                <a:solidFill>
+                  <a:srgbClr val="07070F"/>
+                </a:solidFill>
+                <a:latin typeface="Calibri" pitchFamily="34" charset="0"/>
+                <a:ea typeface="Calibri" pitchFamily="34" charset="-122"/>
+                <a:cs typeface="Calibri" pitchFamily="34" charset="-120"/>
+              </a:rPr>
+              <a:t>SAM</a:t>
+            </a:r>
+            <a:endParaRPr lang="en-US" sz="1100" dirty="0"/>
+          </a:p>
+        </p:txBody>
+      </p:sp>
+      <p:sp>
+        <p:nvSpPr>
+          <p:cNvPr id="14" name="Text 12"/>
+          <p:cNvSpPr/>
+          <p:nvPr/>
+        </p:nvSpPr>
+        <p:spPr>
+          <a:xfrm>
+            <a:off x="1316736" y="2651760"/>
+            <a:ext cx="3291840" cy="457200"/>
+          </a:xfrm>
+          <a:prstGeom prst="rect">
+            <a:avLst/>
+          </a:prstGeom>
+          <a:noFill/>
+          <a:ln/>
+        </p:spPr>
+        <p:txBody>
+          <a:bodyPr wrap="square" lIns="0" tIns="0" rIns="0" bIns="0" rtlCol="0" anchor="ctr"/>
+          <a:lstStyle/>
+          <a:p>
+            <a:pPr algn="l" indent="0" marL="0">
+              <a:buNone/>
+            </a:pPr>
+            <a:r>
+              <a:rPr lang="en-US" sz="2800" b="1" dirty="0">
                 <a:solidFill>
                   <a:srgbClr val="FFFFFF"/>
                 </a:solidFill>
@@ -3661,22 +3077,22 @@
                 <a:ea typeface="Calibri" pitchFamily="34" charset="-122"/>
                 <a:cs typeface="Calibri" pitchFamily="34" charset="-120"/>
               </a:rPr>
-              <a:t>₹2,500</a:t>
-            </a:r>
-            <a:endParaRPr lang="en-US" sz="3800" dirty="0"/>
-          </a:p>
-        </p:txBody>
-      </p:sp>
-      <p:sp>
-        <p:nvSpPr>
-          <p:cNvPr id="11" name="Text 9"/>
-          <p:cNvSpPr/>
-          <p:nvPr/>
-        </p:nvSpPr>
-        <p:spPr>
-          <a:xfrm>
-            <a:off x="3291840" y="1965960"/>
-            <a:ext cx="2468880" cy="594360"/>
+              <a:t>₹15,000 Cr</a:t>
+            </a:r>
+            <a:endParaRPr lang="en-US" sz="2800" dirty="0"/>
+          </a:p>
+        </p:txBody>
+      </p:sp>
+      <p:sp>
+        <p:nvSpPr>
+          <p:cNvPr id="15" name="Text 13"/>
+          <p:cNvSpPr/>
+          <p:nvPr/>
+        </p:nvSpPr>
+        <p:spPr>
+          <a:xfrm>
+            <a:off x="1316736" y="3154680"/>
+            <a:ext cx="3291840" cy="274320"/>
           </a:xfrm>
           <a:prstGeom prst="rect">
             <a:avLst/>
@@ -3688,51 +3104,34 @@
           <a:bodyPr wrap="square" lIns="0" tIns="0" rIns="0" bIns="0" rtlCol="0" anchor="ctr"/>
           <a:lstStyle/>
           <a:p>
-            <a:pPr algn="ctr" indent="0" marL="0">
-              <a:buNone/>
-            </a:pPr>
-            <a:r>
-              <a:rPr lang="en-US" sz="1200" dirty="0">
-                <a:solidFill>
-                  <a:srgbClr val="9CA3AF"/>
-                </a:solidFill>
-                <a:latin typeface="Calibri" pitchFamily="34" charset="0"/>
-                <a:ea typeface="Calibri" pitchFamily="34" charset="-122"/>
-                <a:cs typeface="Calibri" pitchFamily="34" charset="-120"/>
-              </a:rPr>
-              <a:t>Avg monthly</a:t>
-            </a:r>
-            <a:endParaRPr lang="en-US" sz="1200" dirty="0"/>
-          </a:p>
-          <a:p>
-            <a:pPr algn="ctr" indent="0" marL="0">
-              <a:buNone/>
-            </a:pPr>
-            <a:r>
-              <a:rPr lang="en-US" sz="1200" dirty="0">
-                <a:solidFill>
-                  <a:srgbClr val="9CA3AF"/>
-                </a:solidFill>
-                <a:latin typeface="Calibri" pitchFamily="34" charset="0"/>
-                <a:ea typeface="Calibri" pitchFamily="34" charset="-122"/>
-                <a:cs typeface="Calibri" pitchFamily="34" charset="-120"/>
-              </a:rPr>
-              <a:t>transport spend</a:t>
-            </a:r>
-            <a:endParaRPr lang="en-US" sz="1200" dirty="0"/>
-          </a:p>
-        </p:txBody>
-      </p:sp>
-      <p:sp>
-        <p:nvSpPr>
-          <p:cNvPr id="12" name="Shape 10"/>
-          <p:cNvSpPr/>
-          <p:nvPr/>
-        </p:nvSpPr>
-        <p:spPr>
-          <a:xfrm>
-            <a:off x="6035040" y="1051560"/>
-            <a:ext cx="2651760" cy="1920240"/>
+            <a:pPr algn="l" indent="0" marL="0">
+              <a:buNone/>
+            </a:pPr>
+            <a:r>
+              <a:rPr lang="en-US" sz="1100" dirty="0">
+                <a:solidFill>
+                  <a:srgbClr val="6B7280"/>
+                </a:solidFill>
+                <a:latin typeface="Calibri" pitchFamily="34" charset="0"/>
+                <a:ea typeface="Calibri" pitchFamily="34" charset="-122"/>
+                <a:cs typeface="Calibri" pitchFamily="34" charset="-120"/>
+              </a:rPr>
+              <a:t>10M urban day scholars, Tier 1 &amp; 2</a:t>
+            </a:r>
+            <a:endParaRPr lang="en-US" sz="1100" dirty="0"/>
+          </a:p>
+        </p:txBody>
+      </p:sp>
+      <p:sp>
+        <p:nvSpPr>
+          <p:cNvPr id="16" name="Shape 14"/>
+          <p:cNvSpPr/>
+          <p:nvPr/>
+        </p:nvSpPr>
+        <p:spPr>
+          <a:xfrm>
+            <a:off x="365760" y="3794760"/>
+            <a:ext cx="4389120" cy="1051560"/>
           </a:xfrm>
           <a:prstGeom prst="rect">
             <a:avLst/>
@@ -3752,14 +3151,14 @@
       </p:sp>
       <p:sp>
         <p:nvSpPr>
-          <p:cNvPr id="13" name="Shape 11"/>
-          <p:cNvSpPr/>
-          <p:nvPr/>
-        </p:nvSpPr>
-        <p:spPr>
-          <a:xfrm>
-            <a:off x="6035040" y="1051560"/>
-            <a:ext cx="2651760" cy="45720"/>
+          <p:cNvPr id="17" name="Shape 15"/>
+          <p:cNvSpPr/>
+          <p:nvPr/>
+        </p:nvSpPr>
+        <p:spPr>
+          <a:xfrm>
+            <a:off x="365760" y="3794760"/>
+            <a:ext cx="54864" cy="1051560"/>
           </a:xfrm>
           <a:prstGeom prst="rect">
             <a:avLst/>
@@ -3772,14 +3171,34 @@
       </p:sp>
       <p:sp>
         <p:nvSpPr>
-          <p:cNvPr id="14" name="Text 12"/>
-          <p:cNvSpPr/>
-          <p:nvPr/>
-        </p:nvSpPr>
-        <p:spPr>
-          <a:xfrm>
-            <a:off x="6126480" y="1234440"/>
-            <a:ext cx="2468880" cy="685800"/>
+          <p:cNvPr id="18" name="Shape 16"/>
+          <p:cNvSpPr/>
+          <p:nvPr/>
+        </p:nvSpPr>
+        <p:spPr>
+          <a:xfrm>
+            <a:off x="566928" y="3950208"/>
+            <a:ext cx="621792" cy="256032"/>
+          </a:xfrm>
+          <a:prstGeom prst="rect">
+            <a:avLst/>
+          </a:prstGeom>
+          <a:solidFill>
+            <a:srgbClr val="FBBF24"/>
+          </a:solidFill>
+          <a:ln/>
+        </p:spPr>
+      </p:sp>
+      <p:sp>
+        <p:nvSpPr>
+          <p:cNvPr id="19" name="Text 17"/>
+          <p:cNvSpPr/>
+          <p:nvPr/>
+        </p:nvSpPr>
+        <p:spPr>
+          <a:xfrm>
+            <a:off x="566928" y="3950208"/>
+            <a:ext cx="621792" cy="256032"/>
           </a:xfrm>
           <a:prstGeom prst="rect">
             <a:avLst/>
@@ -3795,7 +3214,46 @@
               <a:buNone/>
             </a:pPr>
             <a:r>
-              <a:rPr lang="en-US" sz="3800" b="1" dirty="0">
+              <a:rPr lang="en-US" sz="1100" b="1" dirty="0">
+                <a:solidFill>
+                  <a:srgbClr val="07070F"/>
+                </a:solidFill>
+                <a:latin typeface="Calibri" pitchFamily="34" charset="0"/>
+                <a:ea typeface="Calibri" pitchFamily="34" charset="-122"/>
+                <a:cs typeface="Calibri" pitchFamily="34" charset="-120"/>
+              </a:rPr>
+              <a:t>SOM</a:t>
+            </a:r>
+            <a:endParaRPr lang="en-US" sz="1100" dirty="0"/>
+          </a:p>
+        </p:txBody>
+      </p:sp>
+      <p:sp>
+        <p:nvSpPr>
+          <p:cNvPr id="20" name="Text 18"/>
+          <p:cNvSpPr/>
+          <p:nvPr/>
+        </p:nvSpPr>
+        <p:spPr>
+          <a:xfrm>
+            <a:off x="1316736" y="3886200"/>
+            <a:ext cx="3291840" cy="457200"/>
+          </a:xfrm>
+          <a:prstGeom prst="rect">
+            <a:avLst/>
+          </a:prstGeom>
+          <a:noFill/>
+          <a:ln/>
+        </p:spPr>
+        <p:txBody>
+          <a:bodyPr wrap="square" lIns="0" tIns="0" rIns="0" bIns="0" rtlCol="0" anchor="ctr"/>
+          <a:lstStyle/>
+          <a:p>
+            <a:pPr algn="l" indent="0" marL="0">
+              <a:buNone/>
+            </a:pPr>
+            <a:r>
+              <a:rPr lang="en-US" sz="2800" b="1" dirty="0">
                 <a:solidFill>
                   <a:srgbClr val="FFFFFF"/>
                 </a:solidFill>
@@ -3803,22 +3261,22 @@
                 <a:ea typeface="Calibri" pitchFamily="34" charset="-122"/>
                 <a:cs typeface="Calibri" pitchFamily="34" charset="-120"/>
               </a:rPr>
-              <a:t>₹1.2L Cr</a:t>
-            </a:r>
-            <a:endParaRPr lang="en-US" sz="3800" dirty="0"/>
-          </a:p>
-        </p:txBody>
-      </p:sp>
-      <p:sp>
-        <p:nvSpPr>
-          <p:cNvPr id="15" name="Text 13"/>
-          <p:cNvSpPr/>
-          <p:nvPr/>
-        </p:nvSpPr>
-        <p:spPr>
-          <a:xfrm>
-            <a:off x="6126480" y="1965960"/>
-            <a:ext cx="2468880" cy="594360"/>
+              <a:t>₹600 Cr</a:t>
+            </a:r>
+            <a:endParaRPr lang="en-US" sz="2800" dirty="0"/>
+          </a:p>
+        </p:txBody>
+      </p:sp>
+      <p:sp>
+        <p:nvSpPr>
+          <p:cNvPr id="21" name="Text 19"/>
+          <p:cNvSpPr/>
+          <p:nvPr/>
+        </p:nvSpPr>
+        <p:spPr>
+          <a:xfrm>
+            <a:off x="1316736" y="4389120"/>
+            <a:ext cx="3291840" cy="274320"/>
           </a:xfrm>
           <a:prstGeom prst="rect">
             <a:avLst/>
@@ -3830,91 +3288,199 @@
           <a:bodyPr wrap="square" lIns="0" tIns="0" rIns="0" bIns="0" rtlCol="0" anchor="ctr"/>
           <a:lstStyle/>
           <a:p>
+            <a:pPr algn="l" indent="0" marL="0">
+              <a:buNone/>
+            </a:pPr>
+            <a:r>
+              <a:rPr lang="en-US" sz="1100" dirty="0">
+                <a:solidFill>
+                  <a:srgbClr val="6B7280"/>
+                </a:solidFill>
+                <a:latin typeface="Calibri" pitchFamily="34" charset="0"/>
+                <a:ea typeface="Calibri" pitchFamily="34" charset="-122"/>
+                <a:cs typeface="Calibri" pitchFamily="34" charset="-120"/>
+              </a:rPr>
+              <a:t>500K MAU · 50 campuses · Year 3</a:t>
+            </a:r>
+            <a:endParaRPr lang="en-US" sz="1100" dirty="0"/>
+          </a:p>
+        </p:txBody>
+      </p:sp>
+      <p:sp>
+        <p:nvSpPr>
+          <p:cNvPr id="22" name="Shape 20"/>
+          <p:cNvSpPr/>
+          <p:nvPr/>
+        </p:nvSpPr>
+        <p:spPr>
+          <a:xfrm>
+            <a:off x="4937760" y="822960"/>
+            <a:ext cx="3931920" cy="3749040"/>
+          </a:xfrm>
+          <a:prstGeom prst="ellipse">
+            <a:avLst/>
+          </a:prstGeom>
+          <a:solidFill>
+            <a:srgbClr val="6366F1">
+              <a:alpha val="16000"/>
+            </a:srgbClr>
+          </a:solidFill>
+          <a:ln w="19050">
+            <a:solidFill>
+              <a:srgbClr val="6366F1">
+                <a:alpha val="45000"/>
+              </a:srgbClr>
+            </a:solidFill>
+            <a:prstDash val="solid"/>
+          </a:ln>
+        </p:spPr>
+      </p:sp>
+      <p:sp>
+        <p:nvSpPr>
+          <p:cNvPr id="23" name="Text 21"/>
+          <p:cNvSpPr/>
+          <p:nvPr/>
+        </p:nvSpPr>
+        <p:spPr>
+          <a:xfrm>
+            <a:off x="4983480" y="868680"/>
+            <a:ext cx="1005840" cy="256032"/>
+          </a:xfrm>
+          <a:prstGeom prst="rect">
+            <a:avLst/>
+          </a:prstGeom>
+          <a:noFill/>
+          <a:ln/>
+        </p:spPr>
+        <p:txBody>
+          <a:bodyPr wrap="square" lIns="0" tIns="0" rIns="0" bIns="0" rtlCol="0" anchor="ctr"/>
+          <a:lstStyle/>
+          <a:p>
             <a:pPr algn="ctr" indent="0" marL="0">
               <a:buNone/>
             </a:pPr>
             <a:r>
-              <a:rPr lang="en-US" sz="1200" dirty="0">
-                <a:solidFill>
-                  <a:srgbClr val="9CA3AF"/>
-                </a:solidFill>
-                <a:latin typeface="Calibri" pitchFamily="34" charset="0"/>
-                <a:ea typeface="Calibri" pitchFamily="34" charset="-122"/>
-                <a:cs typeface="Calibri" pitchFamily="34" charset="-120"/>
-              </a:rPr>
-              <a:t>Annual campus</a:t>
-            </a:r>
-            <a:endParaRPr lang="en-US" sz="1200" dirty="0"/>
-          </a:p>
+              <a:rPr lang="en-US" sz="1000" b="1" dirty="0">
+                <a:solidFill>
+                  <a:srgbClr val="A5B4FC"/>
+                </a:solidFill>
+                <a:latin typeface="Calibri" pitchFamily="34" charset="0"/>
+                <a:ea typeface="Calibri" pitchFamily="34" charset="-122"/>
+                <a:cs typeface="Calibri" pitchFamily="34" charset="-120"/>
+              </a:rPr>
+              <a:t>TAM</a:t>
+            </a:r>
+            <a:endParaRPr lang="en-US" sz="1000" dirty="0"/>
+          </a:p>
+        </p:txBody>
+      </p:sp>
+      <p:sp>
+        <p:nvSpPr>
+          <p:cNvPr id="24" name="Shape 22"/>
+          <p:cNvSpPr/>
+          <p:nvPr/>
+        </p:nvSpPr>
+        <p:spPr>
+          <a:xfrm>
+            <a:off x="5513832" y="1399032"/>
+            <a:ext cx="2779776" cy="2596896"/>
+          </a:xfrm>
+          <a:prstGeom prst="ellipse">
+            <a:avLst/>
+          </a:prstGeom>
+          <a:solidFill>
+            <a:srgbClr val="10B981">
+              <a:alpha val="16000"/>
+            </a:srgbClr>
+          </a:solidFill>
+          <a:ln w="19050">
+            <a:solidFill>
+              <a:srgbClr val="10B981">
+                <a:alpha val="45000"/>
+              </a:srgbClr>
+            </a:solidFill>
+            <a:prstDash val="solid"/>
+          </a:ln>
+        </p:spPr>
+      </p:sp>
+      <p:sp>
+        <p:nvSpPr>
+          <p:cNvPr id="25" name="Text 23"/>
+          <p:cNvSpPr/>
+          <p:nvPr/>
+        </p:nvSpPr>
+        <p:spPr>
+          <a:xfrm>
+            <a:off x="5550408" y="1435608"/>
+            <a:ext cx="914400" cy="256032"/>
+          </a:xfrm>
+          <a:prstGeom prst="rect">
+            <a:avLst/>
+          </a:prstGeom>
+          <a:noFill/>
+          <a:ln/>
+        </p:spPr>
+        <p:txBody>
+          <a:bodyPr wrap="square" lIns="0" tIns="0" rIns="0" bIns="0" rtlCol="0" anchor="ctr"/>
+          <a:lstStyle/>
           <a:p>
             <a:pPr algn="ctr" indent="0" marL="0">
               <a:buNone/>
             </a:pPr>
             <a:r>
-              <a:rPr lang="en-US" sz="1200" dirty="0">
-                <a:solidFill>
-                  <a:srgbClr val="9CA3AF"/>
-                </a:solidFill>
-                <a:latin typeface="Calibri" pitchFamily="34" charset="0"/>
-                <a:ea typeface="Calibri" pitchFamily="34" charset="-122"/>
-                <a:cs typeface="Calibri" pitchFamily="34" charset="-120"/>
-              </a:rPr>
-              <a:t>commute market</a:t>
-            </a:r>
-            <a:endParaRPr lang="en-US" sz="1200" dirty="0"/>
-          </a:p>
-        </p:txBody>
-      </p:sp>
-      <p:sp>
-        <p:nvSpPr>
-          <p:cNvPr id="16" name="Shape 14"/>
-          <p:cNvSpPr/>
-          <p:nvPr/>
-        </p:nvSpPr>
-        <p:spPr>
-          <a:xfrm>
-            <a:off x="365760" y="3246120"/>
-            <a:ext cx="8412480" cy="1005840"/>
-          </a:xfrm>
-          <a:prstGeom prst="rect">
-            <a:avLst/>
-          </a:prstGeom>
-          <a:solidFill>
-            <a:srgbClr val="111124"/>
-          </a:solidFill>
-          <a:ln/>
-        </p:spPr>
-      </p:sp>
-      <p:sp>
-        <p:nvSpPr>
-          <p:cNvPr id="17" name="Shape 15"/>
-          <p:cNvSpPr/>
-          <p:nvPr/>
-        </p:nvSpPr>
-        <p:spPr>
-          <a:xfrm>
-            <a:off x="365760" y="3246120"/>
-            <a:ext cx="54864" cy="1005840"/>
-          </a:xfrm>
-          <a:prstGeom prst="rect">
-            <a:avLst/>
-          </a:prstGeom>
-          <a:solidFill>
-            <a:srgbClr val="6366F1"/>
-          </a:solidFill>
-          <a:ln/>
-        </p:spPr>
-      </p:sp>
-      <p:sp>
-        <p:nvSpPr>
-          <p:cNvPr id="18" name="Text 16"/>
-          <p:cNvSpPr/>
-          <p:nvPr/>
-        </p:nvSpPr>
-        <p:spPr>
-          <a:xfrm>
-            <a:off x="594360" y="3337560"/>
-            <a:ext cx="7955280" cy="822960"/>
+              <a:rPr lang="en-US" sz="1000" b="1" dirty="0">
+                <a:solidFill>
+                  <a:srgbClr val="10B981"/>
+                </a:solidFill>
+                <a:latin typeface="Calibri" pitchFamily="34" charset="0"/>
+                <a:ea typeface="Calibri" pitchFamily="34" charset="-122"/>
+                <a:cs typeface="Calibri" pitchFamily="34" charset="-120"/>
+              </a:rPr>
+              <a:t>SAM</a:t>
+            </a:r>
+            <a:endParaRPr lang="en-US" sz="1000" dirty="0"/>
+          </a:p>
+        </p:txBody>
+      </p:sp>
+      <p:sp>
+        <p:nvSpPr>
+          <p:cNvPr id="26" name="Shape 24"/>
+          <p:cNvSpPr/>
+          <p:nvPr/>
+        </p:nvSpPr>
+        <p:spPr>
+          <a:xfrm>
+            <a:off x="6099048" y="1965960"/>
+            <a:ext cx="1609344" cy="1463040"/>
+          </a:xfrm>
+          <a:prstGeom prst="ellipse">
+            <a:avLst/>
+          </a:prstGeom>
+          <a:solidFill>
+            <a:srgbClr val="FBBF24">
+              <a:alpha val="28000"/>
+            </a:srgbClr>
+          </a:solidFill>
+          <a:ln w="19050">
+            <a:solidFill>
+              <a:srgbClr val="FBBF24">
+                <a:alpha val="55000"/>
+              </a:srgbClr>
+            </a:solidFill>
+            <a:prstDash val="solid"/>
+          </a:ln>
+        </p:spPr>
+      </p:sp>
+      <p:sp>
+        <p:nvSpPr>
+          <p:cNvPr id="27" name="Text 25"/>
+          <p:cNvSpPr/>
+          <p:nvPr/>
+        </p:nvSpPr>
+        <p:spPr>
+          <a:xfrm>
+            <a:off x="6135624" y="2011680"/>
+            <a:ext cx="914400" cy="256032"/>
           </a:xfrm>
           <a:prstGeom prst="rect">
             <a:avLst/>
@@ -3926,27 +3492,27 @@
           <a:bodyPr wrap="square" lIns="0" tIns="0" rIns="0" bIns="0" rtlCol="0" anchor="ctr"/>
           <a:lstStyle/>
           <a:p>
-            <a:pPr algn="l" indent="0" marL="0">
-              <a:buNone/>
-            </a:pPr>
-            <a:r>
-              <a:rPr lang="en-US" sz="1500" dirty="0">
-                <a:solidFill>
-                  <a:srgbClr val="FFFFFF"/>
-                </a:solidFill>
-                <a:latin typeface="Calibri" pitchFamily="34" charset="0"/>
-                <a:ea typeface="Calibri" pitchFamily="34" charset="-122"/>
-                <a:cs typeface="Calibri" pitchFamily="34" charset="-120"/>
-              </a:rPr>
-              <a:t>India already has 11M pooled-ride users — yet zero platforms are built for campus commuters.</a:t>
-            </a:r>
-            <a:endParaRPr lang="en-US" sz="1500" dirty="0"/>
-          </a:p>
-        </p:txBody>
-      </p:sp>
-      <p:sp>
-        <p:nvSpPr>
-          <p:cNvPr id="19" name="Text 17"/>
+            <a:pPr algn="ctr" indent="0" marL="0">
+              <a:buNone/>
+            </a:pPr>
+            <a:r>
+              <a:rPr lang="en-US" sz="1000" b="1" dirty="0">
+                <a:solidFill>
+                  <a:srgbClr val="FBBF24"/>
+                </a:solidFill>
+                <a:latin typeface="Calibri" pitchFamily="34" charset="0"/>
+                <a:ea typeface="Calibri" pitchFamily="34" charset="-122"/>
+                <a:cs typeface="Calibri" pitchFamily="34" charset="-120"/>
+              </a:rPr>
+              <a:t>SOM</a:t>
+            </a:r>
+            <a:endParaRPr lang="en-US" sz="1000" dirty="0"/>
+          </a:p>
+        </p:txBody>
+      </p:sp>
+      <p:sp>
+        <p:nvSpPr>
+          <p:cNvPr id="28" name="Text 26"/>
           <p:cNvSpPr/>
           <p:nvPr/>
         </p:nvSpPr>
@@ -3977,7 +3543,7 @@
                 <a:ea typeface="Calibri" pitchFamily="34" charset="-122"/>
                 <a:cs typeface="Calibri" pitchFamily="34" charset="-120"/>
               </a:rPr>
-              <a:t>Sources: AISHE 2022–23 (education.gov.in)  ·  UGC Annual Report 2023–24 (ugc.ac.in)  ·  PS Market Research — India Ride-Hailing Q1 2024  ·  Market sizing estimated</a:t>
+              <a:t>Sources: AISHE 2022–23 (education.gov.in)  ·  UGC Annual Report 2023–24 (ugc.ac.in)  ·  Market sizing estimated</a:t>
             </a:r>
             <a:endParaRPr lang="en-US" sz="800" dirty="0"/>
           </a:p>
@@ -4023,8 +3589,8 @@
         </p:nvSpPr>
         <p:spPr>
           <a:xfrm>
-            <a:off x="457200" y="182880"/>
-            <a:ext cx="4572000" cy="530352"/>
+            <a:off x="457200" y="164592"/>
+            <a:ext cx="8229600" cy="530352"/>
           </a:xfrm>
           <a:prstGeom prst="rect">
             <a:avLst/>
@@ -4048,7 +3614,7 @@
                 <a:ea typeface="Calibri" pitchFamily="34" charset="-122"/>
                 <a:cs typeface="Calibri" pitchFamily="34" charset="-120"/>
               </a:rPr>
-              <a:t>A market built to scale.</a:t>
+              <a:t>Everything your commute has been missing.</a:t>
             </a:r>
             <a:endParaRPr lang="en-US" sz="3200" dirty="0"/>
           </a:p>
@@ -4062,8 +3628,8 @@
         </p:nvSpPr>
         <p:spPr>
           <a:xfrm>
-            <a:off x="457200" y="749808"/>
-            <a:ext cx="4389120" cy="384048"/>
+            <a:off x="457200" y="713232"/>
+            <a:ext cx="8229600" cy="274320"/>
           </a:xfrm>
           <a:prstGeom prst="rect">
             <a:avLst/>
@@ -4079,7 +3645,7 @@
               <a:buNone/>
             </a:pPr>
             <a:r>
-              <a:rPr lang="en-US" sz="1200" dirty="0">
+              <a:rPr lang="en-US" sz="1300" dirty="0">
                 <a:solidFill>
                   <a:srgbClr val="9CA3AF"/>
                 </a:solidFill>
@@ -4087,9 +3653,9 @@
                 <a:ea typeface="Calibri" pitchFamily="34" charset="-122"/>
                 <a:cs typeface="Calibri" pitchFamily="34" charset="-120"/>
               </a:rPr>
-              <a:t>Starting campus-native, expanding across India's 1,000+ universities.</a:t>
-            </a:r>
-            <a:endParaRPr lang="en-US" sz="1200" dirty="0"/>
+              <a:t>Built exclusively for campus commuters — riders and drivers alike.</a:t>
+            </a:r>
+            <a:endParaRPr lang="en-US" sz="1300" dirty="0"/>
           </a:p>
         </p:txBody>
       </p:sp>
@@ -4101,8 +3667,8 @@
         </p:nvSpPr>
         <p:spPr>
           <a:xfrm>
-            <a:off x="365760" y="1325880"/>
-            <a:ext cx="4389120" cy="1051560"/>
+            <a:off x="411480" y="914400"/>
+            <a:ext cx="2651760" cy="3474720"/>
           </a:xfrm>
           <a:prstGeom prst="rect">
             <a:avLst/>
@@ -4128,8 +3694,8 @@
         </p:nvSpPr>
         <p:spPr>
           <a:xfrm>
-            <a:off x="365760" y="1325880"/>
-            <a:ext cx="54864" cy="1051560"/>
+            <a:off x="411480" y="914400"/>
+            <a:ext cx="2651760" cy="45720"/>
           </a:xfrm>
           <a:prstGeom prst="rect">
             <a:avLst/>
@@ -4148,28 +3714,52 @@
         </p:nvSpPr>
         <p:spPr>
           <a:xfrm>
-            <a:off x="566928" y="1481328"/>
-            <a:ext cx="621792" cy="256032"/>
-          </a:xfrm>
-          <a:prstGeom prst="rect">
-            <a:avLst/>
-          </a:prstGeom>
-          <a:solidFill>
-            <a:srgbClr val="6366F1"/>
-          </a:solidFill>
-          <a:ln/>
-        </p:spPr>
-      </p:sp>
-      <p:sp>
-        <p:nvSpPr>
-          <p:cNvPr id="7" name="Text 5"/>
-          <p:cNvSpPr/>
-          <p:nvPr/>
-        </p:nvSpPr>
-        <p:spPr>
-          <a:xfrm>
-            <a:off x="566928" y="1481328"/>
-            <a:ext cx="621792" cy="256032"/>
+            <a:off x="1389888" y="1554480"/>
+            <a:ext cx="694944" cy="694944"/>
+          </a:xfrm>
+          <a:prstGeom prst="ellipse">
+            <a:avLst/>
+          </a:prstGeom>
+          <a:solidFill>
+            <a:srgbClr val="1A1A38"/>
+          </a:solidFill>
+          <a:ln/>
+        </p:spPr>
+      </p:sp>
+      <p:pic>
+        <p:nvPicPr>
+          <p:cNvPr id="7" name="Image 0" descr="preencoded.png">    </p:cNvPr>
+          <p:cNvPicPr>
+            <a:picLocks noChangeAspect="1"/>
+          </p:cNvPicPr>
+          <p:nvPr/>
+        </p:nvPicPr>
+        <p:blipFill>
+          <a:blip r:embed="rId1"/>
+          <a:stretch>
+            <a:fillRect/>
+          </a:stretch>
+        </p:blipFill>
+        <p:spPr>
+          <a:xfrm>
+            <a:off x="1536192" y="1700784"/>
+            <a:ext cx="402336" cy="402336"/>
+          </a:xfrm>
+          <a:prstGeom prst="rect">
+            <a:avLst/>
+          </a:prstGeom>
+        </p:spPr>
+      </p:pic>
+      <p:sp>
+        <p:nvSpPr>
+          <p:cNvPr id="8" name="Text 5"/>
+          <p:cNvSpPr/>
+          <p:nvPr/>
+        </p:nvSpPr>
+        <p:spPr>
+          <a:xfrm>
+            <a:off x="548640" y="2450592"/>
+            <a:ext cx="2377440" cy="685800"/>
           </a:xfrm>
           <a:prstGeom prst="rect">
             <a:avLst/>
@@ -4178,53 +3768,14 @@
           <a:ln/>
         </p:spPr>
         <p:txBody>
-          <a:bodyPr wrap="square" lIns="0" tIns="0" rIns="0" bIns="0" rtlCol="0" anchor="ctr"/>
+          <a:bodyPr wrap="square" lIns="0" tIns="0" rIns="0" bIns="0" rtlCol="0" anchor="t"/>
           <a:lstStyle/>
           <a:p>
             <a:pPr algn="ctr" indent="0" marL="0">
               <a:buNone/>
             </a:pPr>
             <a:r>
-              <a:rPr lang="en-US" sz="1100" b="1" dirty="0">
-                <a:solidFill>
-                  <a:srgbClr val="07070F"/>
-                </a:solidFill>
-                <a:latin typeface="Calibri" pitchFamily="34" charset="0"/>
-                <a:ea typeface="Calibri" pitchFamily="34" charset="-122"/>
-                <a:cs typeface="Calibri" pitchFamily="34" charset="-120"/>
-              </a:rPr>
-              <a:t>TAM</a:t>
-            </a:r>
-            <a:endParaRPr lang="en-US" sz="1100" dirty="0"/>
-          </a:p>
-        </p:txBody>
-      </p:sp>
-      <p:sp>
-        <p:nvSpPr>
-          <p:cNvPr id="8" name="Text 6"/>
-          <p:cNvSpPr/>
-          <p:nvPr/>
-        </p:nvSpPr>
-        <p:spPr>
-          <a:xfrm>
-            <a:off x="1316736" y="1417320"/>
-            <a:ext cx="3291840" cy="457200"/>
-          </a:xfrm>
-          <a:prstGeom prst="rect">
-            <a:avLst/>
-          </a:prstGeom>
-          <a:noFill/>
-          <a:ln/>
-        </p:spPr>
-        <p:txBody>
-          <a:bodyPr wrap="square" lIns="0" tIns="0" rIns="0" bIns="0" rtlCol="0" anchor="ctr"/>
-          <a:lstStyle/>
-          <a:p>
-            <a:pPr algn="l" indent="0" marL="0">
-              <a:buNone/>
-            </a:pPr>
-            <a:r>
-              <a:rPr lang="en-US" sz="2800" b="1" dirty="0">
+              <a:rPr lang="en-US" sz="1800" b="1" dirty="0">
                 <a:solidFill>
                   <a:srgbClr val="FFFFFF"/>
                 </a:solidFill>
@@ -4232,61 +3783,39 @@
                 <a:ea typeface="Calibri" pitchFamily="34" charset="-122"/>
                 <a:cs typeface="Calibri" pitchFamily="34" charset="-120"/>
               </a:rPr>
-              <a:t>₹1.2L Cr</a:t>
-            </a:r>
-            <a:endParaRPr lang="en-US" sz="2800" dirty="0"/>
-          </a:p>
-        </p:txBody>
-      </p:sp>
-      <p:sp>
-        <p:nvSpPr>
-          <p:cNvPr id="9" name="Text 7"/>
-          <p:cNvSpPr/>
-          <p:nvPr/>
-        </p:nvSpPr>
-        <p:spPr>
-          <a:xfrm>
-            <a:off x="1316736" y="1920240"/>
-            <a:ext cx="3291840" cy="274320"/>
-          </a:xfrm>
-          <a:prstGeom prst="rect">
-            <a:avLst/>
-          </a:prstGeom>
-          <a:noFill/>
-          <a:ln/>
-        </p:spPr>
-        <p:txBody>
-          <a:bodyPr wrap="square" lIns="0" tIns="0" rIns="0" bIns="0" rtlCol="0" anchor="ctr"/>
-          <a:lstStyle/>
-          <a:p>
-            <a:pPr algn="l" indent="0" marL="0">
-              <a:buNone/>
-            </a:pPr>
-            <a:r>
-              <a:rPr lang="en-US" sz="1100" dirty="0">
-                <a:solidFill>
-                  <a:srgbClr val="6B7280"/>
-                </a:solidFill>
-                <a:latin typeface="Calibri" pitchFamily="34" charset="0"/>
-                <a:ea typeface="Calibri" pitchFamily="34" charset="-122"/>
-                <a:cs typeface="Calibri" pitchFamily="34" charset="-120"/>
-              </a:rPr>
-              <a:t>40M+ students × ₹2,500/mo</a:t>
-            </a:r>
-            <a:endParaRPr lang="en-US" sz="1100" dirty="0"/>
-          </a:p>
-        </p:txBody>
-      </p:sp>
-      <p:sp>
-        <p:nvSpPr>
-          <p:cNvPr id="10" name="Shape 8"/>
-          <p:cNvSpPr/>
-          <p:nvPr/>
-        </p:nvSpPr>
-        <p:spPr>
-          <a:xfrm>
-            <a:off x="365760" y="2560320"/>
-            <a:ext cx="4389120" cy="1051560"/>
+              <a:t>Campus-Verified</a:t>
+            </a:r>
+            <a:endParaRPr lang="en-US" sz="1800" dirty="0"/>
+          </a:p>
+          <a:p>
+            <a:pPr algn="ctr" indent="0" marL="0">
+              <a:buNone/>
+            </a:pPr>
+            <a:r>
+              <a:rPr lang="en-US" sz="1800" b="1" dirty="0">
+                <a:solidFill>
+                  <a:srgbClr val="FFFFFF"/>
+                </a:solidFill>
+                <a:latin typeface="Calibri" pitchFamily="34" charset="0"/>
+                <a:ea typeface="Calibri" pitchFamily="34" charset="-122"/>
+                <a:cs typeface="Calibri" pitchFamily="34" charset="-120"/>
+              </a:rPr>
+              <a:t>Community</a:t>
+            </a:r>
+            <a:endParaRPr lang="en-US" sz="1800" dirty="0"/>
+          </a:p>
+        </p:txBody>
+      </p:sp>
+      <p:sp>
+        <p:nvSpPr>
+          <p:cNvPr id="9" name="Shape 6"/>
+          <p:cNvSpPr/>
+          <p:nvPr/>
+        </p:nvSpPr>
+        <p:spPr>
+          <a:xfrm>
+            <a:off x="3218688" y="914400"/>
+            <a:ext cx="2651760" cy="3474720"/>
           </a:xfrm>
           <a:prstGeom prst="rect">
             <a:avLst/>
@@ -4306,54 +3835,78 @@
       </p:sp>
       <p:sp>
         <p:nvSpPr>
-          <p:cNvPr id="11" name="Shape 9"/>
-          <p:cNvSpPr/>
-          <p:nvPr/>
-        </p:nvSpPr>
-        <p:spPr>
-          <a:xfrm>
-            <a:off x="365760" y="2560320"/>
-            <a:ext cx="54864" cy="1051560"/>
-          </a:xfrm>
-          <a:prstGeom prst="rect">
-            <a:avLst/>
-          </a:prstGeom>
-          <a:solidFill>
-            <a:srgbClr val="10B981"/>
-          </a:solidFill>
-          <a:ln/>
-        </p:spPr>
-      </p:sp>
-      <p:sp>
-        <p:nvSpPr>
-          <p:cNvPr id="12" name="Shape 10"/>
-          <p:cNvSpPr/>
-          <p:nvPr/>
-        </p:nvSpPr>
-        <p:spPr>
-          <a:xfrm>
-            <a:off x="566928" y="2715768"/>
-            <a:ext cx="621792" cy="256032"/>
-          </a:xfrm>
-          <a:prstGeom prst="rect">
-            <a:avLst/>
-          </a:prstGeom>
-          <a:solidFill>
-            <a:srgbClr val="10B981"/>
-          </a:solidFill>
-          <a:ln/>
-        </p:spPr>
-      </p:sp>
-      <p:sp>
-        <p:nvSpPr>
-          <p:cNvPr id="13" name="Text 11"/>
-          <p:cNvSpPr/>
-          <p:nvPr/>
-        </p:nvSpPr>
-        <p:spPr>
-          <a:xfrm>
-            <a:off x="566928" y="2715768"/>
-            <a:ext cx="621792" cy="256032"/>
+          <p:cNvPr id="10" name="Shape 7"/>
+          <p:cNvSpPr/>
+          <p:nvPr/>
+        </p:nvSpPr>
+        <p:spPr>
+          <a:xfrm>
+            <a:off x="3218688" y="914400"/>
+            <a:ext cx="2651760" cy="45720"/>
+          </a:xfrm>
+          <a:prstGeom prst="rect">
+            <a:avLst/>
+          </a:prstGeom>
+          <a:solidFill>
+            <a:srgbClr val="FBBF24"/>
+          </a:solidFill>
+          <a:ln/>
+        </p:spPr>
+      </p:sp>
+      <p:sp>
+        <p:nvSpPr>
+          <p:cNvPr id="11" name="Shape 8"/>
+          <p:cNvSpPr/>
+          <p:nvPr/>
+        </p:nvSpPr>
+        <p:spPr>
+          <a:xfrm>
+            <a:off x="4197096" y="1554480"/>
+            <a:ext cx="694944" cy="694944"/>
+          </a:xfrm>
+          <a:prstGeom prst="ellipse">
+            <a:avLst/>
+          </a:prstGeom>
+          <a:solidFill>
+            <a:srgbClr val="1A1A38"/>
+          </a:solidFill>
+          <a:ln/>
+        </p:spPr>
+      </p:sp>
+      <p:pic>
+        <p:nvPicPr>
+          <p:cNvPr id="12" name="Image 1" descr="preencoded.png">    </p:cNvPr>
+          <p:cNvPicPr>
+            <a:picLocks noChangeAspect="1"/>
+          </p:cNvPicPr>
+          <p:nvPr/>
+        </p:nvPicPr>
+        <p:blipFill>
+          <a:blip r:embed="rId2"/>
+          <a:stretch>
+            <a:fillRect/>
+          </a:stretch>
+        </p:blipFill>
+        <p:spPr>
+          <a:xfrm>
+            <a:off x="4343400" y="1700784"/>
+            <a:ext cx="402336" cy="402336"/>
+          </a:xfrm>
+          <a:prstGeom prst="rect">
+            <a:avLst/>
+          </a:prstGeom>
+        </p:spPr>
+      </p:pic>
+      <p:sp>
+        <p:nvSpPr>
+          <p:cNvPr id="13" name="Text 9"/>
+          <p:cNvSpPr/>
+          <p:nvPr/>
+        </p:nvSpPr>
+        <p:spPr>
+          <a:xfrm>
+            <a:off x="3355848" y="2450592"/>
+            <a:ext cx="2377440" cy="685800"/>
           </a:xfrm>
           <a:prstGeom prst="rect">
             <a:avLst/>
@@ -4362,53 +3915,14 @@
           <a:ln/>
         </p:spPr>
         <p:txBody>
-          <a:bodyPr wrap="square" lIns="0" tIns="0" rIns="0" bIns="0" rtlCol="0" anchor="ctr"/>
+          <a:bodyPr wrap="square" lIns="0" tIns="0" rIns="0" bIns="0" rtlCol="0" anchor="t"/>
           <a:lstStyle/>
           <a:p>
             <a:pPr algn="ctr" indent="0" marL="0">
               <a:buNone/>
             </a:pPr>
             <a:r>
-              <a:rPr lang="en-US" sz="1100" b="1" dirty="0">
-                <a:solidFill>
-                  <a:srgbClr val="07070F"/>
-                </a:solidFill>
-                <a:latin typeface="Calibri" pitchFamily="34" charset="0"/>
-                <a:ea typeface="Calibri" pitchFamily="34" charset="-122"/>
-                <a:cs typeface="Calibri" pitchFamily="34" charset="-120"/>
-              </a:rPr>
-              <a:t>SAM</a:t>
-            </a:r>
-            <a:endParaRPr lang="en-US" sz="1100" dirty="0"/>
-          </a:p>
-        </p:txBody>
-      </p:sp>
-      <p:sp>
-        <p:nvSpPr>
-          <p:cNvPr id="14" name="Text 12"/>
-          <p:cNvSpPr/>
-          <p:nvPr/>
-        </p:nvSpPr>
-        <p:spPr>
-          <a:xfrm>
-            <a:off x="1316736" y="2651760"/>
-            <a:ext cx="3291840" cy="457200"/>
-          </a:xfrm>
-          <a:prstGeom prst="rect">
-            <a:avLst/>
-          </a:prstGeom>
-          <a:noFill/>
-          <a:ln/>
-        </p:spPr>
-        <p:txBody>
-          <a:bodyPr wrap="square" lIns="0" tIns="0" rIns="0" bIns="0" rtlCol="0" anchor="ctr"/>
-          <a:lstStyle/>
-          <a:p>
-            <a:pPr algn="l" indent="0" marL="0">
-              <a:buNone/>
-            </a:pPr>
-            <a:r>
-              <a:rPr lang="en-US" sz="2800" b="1" dirty="0">
+              <a:rPr lang="en-US" sz="1800" b="1" dirty="0">
                 <a:solidFill>
                   <a:srgbClr val="FFFFFF"/>
                 </a:solidFill>
@@ -4416,61 +3930,39 @@
                 <a:ea typeface="Calibri" pitchFamily="34" charset="-122"/>
                 <a:cs typeface="Calibri" pitchFamily="34" charset="-120"/>
               </a:rPr>
-              <a:t>₹15,000 Cr</a:t>
-            </a:r>
-            <a:endParaRPr lang="en-US" sz="2800" dirty="0"/>
-          </a:p>
-        </p:txBody>
-      </p:sp>
-      <p:sp>
-        <p:nvSpPr>
-          <p:cNvPr id="15" name="Text 13"/>
-          <p:cNvSpPr/>
-          <p:nvPr/>
-        </p:nvSpPr>
-        <p:spPr>
-          <a:xfrm>
-            <a:off x="1316736" y="3154680"/>
-            <a:ext cx="3291840" cy="274320"/>
-          </a:xfrm>
-          <a:prstGeom prst="rect">
-            <a:avLst/>
-          </a:prstGeom>
-          <a:noFill/>
-          <a:ln/>
-        </p:spPr>
-        <p:txBody>
-          <a:bodyPr wrap="square" lIns="0" tIns="0" rIns="0" bIns="0" rtlCol="0" anchor="ctr"/>
-          <a:lstStyle/>
-          <a:p>
-            <a:pPr algn="l" indent="0" marL="0">
-              <a:buNone/>
-            </a:pPr>
-            <a:r>
-              <a:rPr lang="en-US" sz="1100" dirty="0">
-                <a:solidFill>
-                  <a:srgbClr val="6B7280"/>
-                </a:solidFill>
-                <a:latin typeface="Calibri" pitchFamily="34" charset="0"/>
-                <a:ea typeface="Calibri" pitchFamily="34" charset="-122"/>
-                <a:cs typeface="Calibri" pitchFamily="34" charset="-120"/>
-              </a:rPr>
-              <a:t>10M urban day scholars, Tier 1 &amp; 2</a:t>
-            </a:r>
-            <a:endParaRPr lang="en-US" sz="1100" dirty="0"/>
-          </a:p>
-        </p:txBody>
-      </p:sp>
-      <p:sp>
-        <p:nvSpPr>
-          <p:cNvPr id="16" name="Shape 14"/>
-          <p:cNvSpPr/>
-          <p:nvPr/>
-        </p:nvSpPr>
-        <p:spPr>
-          <a:xfrm>
-            <a:off x="365760" y="3794760"/>
-            <a:ext cx="4389120" cy="1051560"/>
+              <a:t>Student-First</a:t>
+            </a:r>
+            <a:endParaRPr lang="en-US" sz="1800" dirty="0"/>
+          </a:p>
+          <a:p>
+            <a:pPr algn="ctr" indent="0" marL="0">
+              <a:buNone/>
+            </a:pPr>
+            <a:r>
+              <a:rPr lang="en-US" sz="1800" b="1" dirty="0">
+                <a:solidFill>
+                  <a:srgbClr val="FFFFFF"/>
+                </a:solidFill>
+                <a:latin typeface="Calibri" pitchFamily="34" charset="0"/>
+                <a:ea typeface="Calibri" pitchFamily="34" charset="-122"/>
+                <a:cs typeface="Calibri" pitchFamily="34" charset="-120"/>
+              </a:rPr>
+              <a:t>Pricing</a:t>
+            </a:r>
+            <a:endParaRPr lang="en-US" sz="1800" dirty="0"/>
+          </a:p>
+        </p:txBody>
+      </p:sp>
+      <p:sp>
+        <p:nvSpPr>
+          <p:cNvPr id="14" name="Shape 10"/>
+          <p:cNvSpPr/>
+          <p:nvPr/>
+        </p:nvSpPr>
+        <p:spPr>
+          <a:xfrm>
+            <a:off x="6025896" y="914400"/>
+            <a:ext cx="2651760" cy="3474720"/>
           </a:xfrm>
           <a:prstGeom prst="rect">
             <a:avLst/>
@@ -4490,54 +3982,78 @@
       </p:sp>
       <p:sp>
         <p:nvSpPr>
-          <p:cNvPr id="17" name="Shape 15"/>
-          <p:cNvSpPr/>
-          <p:nvPr/>
-        </p:nvSpPr>
-        <p:spPr>
-          <a:xfrm>
-            <a:off x="365760" y="3794760"/>
-            <a:ext cx="54864" cy="1051560"/>
-          </a:xfrm>
-          <a:prstGeom prst="rect">
-            <a:avLst/>
-          </a:prstGeom>
-          <a:solidFill>
-            <a:srgbClr val="FBBF24"/>
-          </a:solidFill>
-          <a:ln/>
-        </p:spPr>
-      </p:sp>
-      <p:sp>
-        <p:nvSpPr>
-          <p:cNvPr id="18" name="Shape 16"/>
-          <p:cNvSpPr/>
-          <p:nvPr/>
-        </p:nvSpPr>
-        <p:spPr>
-          <a:xfrm>
-            <a:off x="566928" y="3950208"/>
-            <a:ext cx="621792" cy="256032"/>
-          </a:xfrm>
-          <a:prstGeom prst="rect">
-            <a:avLst/>
-          </a:prstGeom>
-          <a:solidFill>
-            <a:srgbClr val="FBBF24"/>
-          </a:solidFill>
-          <a:ln/>
-        </p:spPr>
-      </p:sp>
-      <p:sp>
-        <p:nvSpPr>
-          <p:cNvPr id="19" name="Text 17"/>
-          <p:cNvSpPr/>
-          <p:nvPr/>
-        </p:nvSpPr>
-        <p:spPr>
-          <a:xfrm>
-            <a:off x="566928" y="3950208"/>
-            <a:ext cx="621792" cy="256032"/>
+          <p:cNvPr id="15" name="Shape 11"/>
+          <p:cNvSpPr/>
+          <p:nvPr/>
+        </p:nvSpPr>
+        <p:spPr>
+          <a:xfrm>
+            <a:off x="6025896" y="914400"/>
+            <a:ext cx="2651760" cy="45720"/>
+          </a:xfrm>
+          <a:prstGeom prst="rect">
+            <a:avLst/>
+          </a:prstGeom>
+          <a:solidFill>
+            <a:srgbClr val="10B981"/>
+          </a:solidFill>
+          <a:ln/>
+        </p:spPr>
+      </p:sp>
+      <p:sp>
+        <p:nvSpPr>
+          <p:cNvPr id="16" name="Shape 12"/>
+          <p:cNvSpPr/>
+          <p:nvPr/>
+        </p:nvSpPr>
+        <p:spPr>
+          <a:xfrm>
+            <a:off x="7004304" y="1554480"/>
+            <a:ext cx="694944" cy="694944"/>
+          </a:xfrm>
+          <a:prstGeom prst="ellipse">
+            <a:avLst/>
+          </a:prstGeom>
+          <a:solidFill>
+            <a:srgbClr val="1A1A38"/>
+          </a:solidFill>
+          <a:ln/>
+        </p:spPr>
+      </p:sp>
+      <p:pic>
+        <p:nvPicPr>
+          <p:cNvPr id="17" name="Image 2" descr="preencoded.png">    </p:cNvPr>
+          <p:cNvPicPr>
+            <a:picLocks noChangeAspect="1"/>
+          </p:cNvPicPr>
+          <p:nvPr/>
+        </p:nvPicPr>
+        <p:blipFill>
+          <a:blip r:embed="rId3"/>
+          <a:stretch>
+            <a:fillRect/>
+          </a:stretch>
+        </p:blipFill>
+        <p:spPr>
+          <a:xfrm>
+            <a:off x="7150608" y="1700784"/>
+            <a:ext cx="402336" cy="402336"/>
+          </a:xfrm>
+          <a:prstGeom prst="rect">
+            <a:avLst/>
+          </a:prstGeom>
+        </p:spPr>
+      </p:pic>
+      <p:sp>
+        <p:nvSpPr>
+          <p:cNvPr id="18" name="Text 13"/>
+          <p:cNvSpPr/>
+          <p:nvPr/>
+        </p:nvSpPr>
+        <p:spPr>
+          <a:xfrm>
+            <a:off x="6163056" y="2450592"/>
+            <a:ext cx="2377440" cy="685800"/>
           </a:xfrm>
           <a:prstGeom prst="rect">
             <a:avLst/>
@@ -4546,53 +4062,14 @@
           <a:ln/>
         </p:spPr>
         <p:txBody>
-          <a:bodyPr wrap="square" lIns="0" tIns="0" rIns="0" bIns="0" rtlCol="0" anchor="ctr"/>
+          <a:bodyPr wrap="square" lIns="0" tIns="0" rIns="0" bIns="0" rtlCol="0" anchor="t"/>
           <a:lstStyle/>
           <a:p>
             <a:pPr algn="ctr" indent="0" marL="0">
               <a:buNone/>
             </a:pPr>
             <a:r>
-              <a:rPr lang="en-US" sz="1100" b="1" dirty="0">
-                <a:solidFill>
-                  <a:srgbClr val="07070F"/>
-                </a:solidFill>
-                <a:latin typeface="Calibri" pitchFamily="34" charset="0"/>
-                <a:ea typeface="Calibri" pitchFamily="34" charset="-122"/>
-                <a:cs typeface="Calibri" pitchFamily="34" charset="-120"/>
-              </a:rPr>
-              <a:t>SOM</a:t>
-            </a:r>
-            <a:endParaRPr lang="en-US" sz="1100" dirty="0"/>
-          </a:p>
-        </p:txBody>
-      </p:sp>
-      <p:sp>
-        <p:nvSpPr>
-          <p:cNvPr id="20" name="Text 18"/>
-          <p:cNvSpPr/>
-          <p:nvPr/>
-        </p:nvSpPr>
-        <p:spPr>
-          <a:xfrm>
-            <a:off x="1316736" y="3886200"/>
-            <a:ext cx="3291840" cy="457200"/>
-          </a:xfrm>
-          <a:prstGeom prst="rect">
-            <a:avLst/>
-          </a:prstGeom>
-          <a:noFill/>
-          <a:ln/>
-        </p:spPr>
-        <p:txBody>
-          <a:bodyPr wrap="square" lIns="0" tIns="0" rIns="0" bIns="0" rtlCol="0" anchor="ctr"/>
-          <a:lstStyle/>
-          <a:p>
-            <a:pPr algn="l" indent="0" marL="0">
-              <a:buNone/>
-            </a:pPr>
-            <a:r>
-              <a:rPr lang="en-US" sz="2800" b="1" dirty="0">
+              <a:rPr lang="en-US" sz="1800" b="1" dirty="0">
                 <a:solidFill>
                   <a:srgbClr val="FFFFFF"/>
                 </a:solidFill>
@@ -4600,291 +4077,26 @@
                 <a:ea typeface="Calibri" pitchFamily="34" charset="-122"/>
                 <a:cs typeface="Calibri" pitchFamily="34" charset="-120"/>
               </a:rPr>
-              <a:t>₹600 Cr</a:t>
-            </a:r>
-            <a:endParaRPr lang="en-US" sz="2800" dirty="0"/>
-          </a:p>
-        </p:txBody>
-      </p:sp>
-      <p:sp>
-        <p:nvSpPr>
-          <p:cNvPr id="21" name="Text 19"/>
-          <p:cNvSpPr/>
-          <p:nvPr/>
-        </p:nvSpPr>
-        <p:spPr>
-          <a:xfrm>
-            <a:off x="1316736" y="4389120"/>
-            <a:ext cx="3291840" cy="274320"/>
-          </a:xfrm>
-          <a:prstGeom prst="rect">
-            <a:avLst/>
-          </a:prstGeom>
-          <a:noFill/>
-          <a:ln/>
-        </p:spPr>
-        <p:txBody>
-          <a:bodyPr wrap="square" lIns="0" tIns="0" rIns="0" bIns="0" rtlCol="0" anchor="ctr"/>
-          <a:lstStyle/>
-          <a:p>
-            <a:pPr algn="l" indent="0" marL="0">
-              <a:buNone/>
-            </a:pPr>
-            <a:r>
-              <a:rPr lang="en-US" sz="1100" dirty="0">
-                <a:solidFill>
-                  <a:srgbClr val="6B7280"/>
-                </a:solidFill>
-                <a:latin typeface="Calibri" pitchFamily="34" charset="0"/>
-                <a:ea typeface="Calibri" pitchFamily="34" charset="-122"/>
-                <a:cs typeface="Calibri" pitchFamily="34" charset="-120"/>
-              </a:rPr>
-              <a:t>500K MAU · 50 campuses · Year 3</a:t>
-            </a:r>
-            <a:endParaRPr lang="en-US" sz="1100" dirty="0"/>
-          </a:p>
-        </p:txBody>
-      </p:sp>
-      <p:sp>
-        <p:nvSpPr>
-          <p:cNvPr id="22" name="Shape 20"/>
-          <p:cNvSpPr/>
-          <p:nvPr/>
-        </p:nvSpPr>
-        <p:spPr>
-          <a:xfrm>
-            <a:off x="4937760" y="822960"/>
-            <a:ext cx="3931920" cy="3749040"/>
-          </a:xfrm>
-          <a:prstGeom prst="ellipse">
-            <a:avLst/>
-          </a:prstGeom>
-          <a:solidFill>
-            <a:srgbClr val="6366F1">
-              <a:alpha val="16000"/>
-            </a:srgbClr>
-          </a:solidFill>
-          <a:ln w="19050">
-            <a:solidFill>
-              <a:srgbClr val="6366F1">
-                <a:alpha val="45000"/>
-              </a:srgbClr>
-            </a:solidFill>
-            <a:prstDash val="solid"/>
-          </a:ln>
-        </p:spPr>
-      </p:sp>
-      <p:sp>
-        <p:nvSpPr>
-          <p:cNvPr id="23" name="Text 21"/>
-          <p:cNvSpPr/>
-          <p:nvPr/>
-        </p:nvSpPr>
-        <p:spPr>
-          <a:xfrm>
-            <a:off x="4983480" y="868680"/>
-            <a:ext cx="1005840" cy="256032"/>
-          </a:xfrm>
-          <a:prstGeom prst="rect">
-            <a:avLst/>
-          </a:prstGeom>
-          <a:noFill/>
-          <a:ln/>
-        </p:spPr>
-        <p:txBody>
-          <a:bodyPr wrap="square" lIns="0" tIns="0" rIns="0" bIns="0" rtlCol="0" anchor="ctr"/>
-          <a:lstStyle/>
+              <a:t>Smart Daily</a:t>
+            </a:r>
+            <a:endParaRPr lang="en-US" sz="1800" dirty="0"/>
+          </a:p>
           <a:p>
             <a:pPr algn="ctr" indent="0" marL="0">
               <a:buNone/>
             </a:pPr>
             <a:r>
-              <a:rPr lang="en-US" sz="1000" b="1" dirty="0">
-                <a:solidFill>
-                  <a:srgbClr val="A5B4FC"/>
-                </a:solidFill>
-                <a:latin typeface="Calibri" pitchFamily="34" charset="0"/>
-                <a:ea typeface="Calibri" pitchFamily="34" charset="-122"/>
-                <a:cs typeface="Calibri" pitchFamily="34" charset="-120"/>
-              </a:rPr>
-              <a:t>TAM</a:t>
-            </a:r>
-            <a:endParaRPr lang="en-US" sz="1000" dirty="0"/>
-          </a:p>
-        </p:txBody>
-      </p:sp>
-      <p:sp>
-        <p:nvSpPr>
-          <p:cNvPr id="24" name="Shape 22"/>
-          <p:cNvSpPr/>
-          <p:nvPr/>
-        </p:nvSpPr>
-        <p:spPr>
-          <a:xfrm>
-            <a:off x="5513832" y="1399032"/>
-            <a:ext cx="2779776" cy="2596896"/>
-          </a:xfrm>
-          <a:prstGeom prst="ellipse">
-            <a:avLst/>
-          </a:prstGeom>
-          <a:solidFill>
-            <a:srgbClr val="10B981">
-              <a:alpha val="16000"/>
-            </a:srgbClr>
-          </a:solidFill>
-          <a:ln w="19050">
-            <a:solidFill>
-              <a:srgbClr val="10B981">
-                <a:alpha val="45000"/>
-              </a:srgbClr>
-            </a:solidFill>
-            <a:prstDash val="solid"/>
-          </a:ln>
-        </p:spPr>
-      </p:sp>
-      <p:sp>
-        <p:nvSpPr>
-          <p:cNvPr id="25" name="Text 23"/>
-          <p:cNvSpPr/>
-          <p:nvPr/>
-        </p:nvSpPr>
-        <p:spPr>
-          <a:xfrm>
-            <a:off x="5550408" y="1435608"/>
-            <a:ext cx="914400" cy="256032"/>
-          </a:xfrm>
-          <a:prstGeom prst="rect">
-            <a:avLst/>
-          </a:prstGeom>
-          <a:noFill/>
-          <a:ln/>
-        </p:spPr>
-        <p:txBody>
-          <a:bodyPr wrap="square" lIns="0" tIns="0" rIns="0" bIns="0" rtlCol="0" anchor="ctr"/>
-          <a:lstStyle/>
-          <a:p>
-            <a:pPr algn="ctr" indent="0" marL="0">
-              <a:buNone/>
-            </a:pPr>
-            <a:r>
-              <a:rPr lang="en-US" sz="1000" b="1" dirty="0">
-                <a:solidFill>
-                  <a:srgbClr val="10B981"/>
-                </a:solidFill>
-                <a:latin typeface="Calibri" pitchFamily="34" charset="0"/>
-                <a:ea typeface="Calibri" pitchFamily="34" charset="-122"/>
-                <a:cs typeface="Calibri" pitchFamily="34" charset="-120"/>
-              </a:rPr>
-              <a:t>SAM</a:t>
-            </a:r>
-            <a:endParaRPr lang="en-US" sz="1000" dirty="0"/>
-          </a:p>
-        </p:txBody>
-      </p:sp>
-      <p:sp>
-        <p:nvSpPr>
-          <p:cNvPr id="26" name="Shape 24"/>
-          <p:cNvSpPr/>
-          <p:nvPr/>
-        </p:nvSpPr>
-        <p:spPr>
-          <a:xfrm>
-            <a:off x="6099048" y="1965960"/>
-            <a:ext cx="1609344" cy="1463040"/>
-          </a:xfrm>
-          <a:prstGeom prst="ellipse">
-            <a:avLst/>
-          </a:prstGeom>
-          <a:solidFill>
-            <a:srgbClr val="FBBF24">
-              <a:alpha val="28000"/>
-            </a:srgbClr>
-          </a:solidFill>
-          <a:ln w="19050">
-            <a:solidFill>
-              <a:srgbClr val="FBBF24">
-                <a:alpha val="55000"/>
-              </a:srgbClr>
-            </a:solidFill>
-            <a:prstDash val="solid"/>
-          </a:ln>
-        </p:spPr>
-      </p:sp>
-      <p:sp>
-        <p:nvSpPr>
-          <p:cNvPr id="27" name="Text 25"/>
-          <p:cNvSpPr/>
-          <p:nvPr/>
-        </p:nvSpPr>
-        <p:spPr>
-          <a:xfrm>
-            <a:off x="6135624" y="2011680"/>
-            <a:ext cx="914400" cy="256032"/>
-          </a:xfrm>
-          <a:prstGeom prst="rect">
-            <a:avLst/>
-          </a:prstGeom>
-          <a:noFill/>
-          <a:ln/>
-        </p:spPr>
-        <p:txBody>
-          <a:bodyPr wrap="square" lIns="0" tIns="0" rIns="0" bIns="0" rtlCol="0" anchor="ctr"/>
-          <a:lstStyle/>
-          <a:p>
-            <a:pPr algn="ctr" indent="0" marL="0">
-              <a:buNone/>
-            </a:pPr>
-            <a:r>
-              <a:rPr lang="en-US" sz="1000" b="1" dirty="0">
-                <a:solidFill>
-                  <a:srgbClr val="FBBF24"/>
-                </a:solidFill>
-                <a:latin typeface="Calibri" pitchFamily="34" charset="0"/>
-                <a:ea typeface="Calibri" pitchFamily="34" charset="-122"/>
-                <a:cs typeface="Calibri" pitchFamily="34" charset="-120"/>
-              </a:rPr>
-              <a:t>SOM</a:t>
-            </a:r>
-            <a:endParaRPr lang="en-US" sz="1000" dirty="0"/>
-          </a:p>
-        </p:txBody>
-      </p:sp>
-      <p:sp>
-        <p:nvSpPr>
-          <p:cNvPr id="28" name="Text 26"/>
-          <p:cNvSpPr/>
-          <p:nvPr/>
-        </p:nvSpPr>
-        <p:spPr>
-          <a:xfrm>
-            <a:off x="365760" y="4828032"/>
-            <a:ext cx="8412480" cy="201168"/>
-          </a:xfrm>
-          <a:prstGeom prst="rect">
-            <a:avLst/>
-          </a:prstGeom>
-          <a:noFill/>
-          <a:ln/>
-        </p:spPr>
-        <p:txBody>
-          <a:bodyPr wrap="square" lIns="0" tIns="0" rIns="0" bIns="0" rtlCol="0" anchor="ctr"/>
-          <a:lstStyle/>
-          <a:p>
-            <a:pPr algn="l" indent="0" marL="0">
-              <a:buNone/>
-            </a:pPr>
-            <a:r>
-              <a:rPr lang="en-US" sz="800" i="1" dirty="0">
-                <a:solidFill>
-                  <a:srgbClr val="3A3A5A"/>
-                </a:solidFill>
-                <a:latin typeface="Calibri" pitchFamily="34" charset="0"/>
-                <a:ea typeface="Calibri" pitchFamily="34" charset="-122"/>
-                <a:cs typeface="Calibri" pitchFamily="34" charset="-120"/>
-              </a:rPr>
-              <a:t>Sources: AISHE 2022–23 (education.gov.in)  ·  UGC Annual Report 2023–24 (ugc.ac.in)  ·  Market sizing estimated</a:t>
-            </a:r>
-            <a:endParaRPr lang="en-US" sz="800" dirty="0"/>
+              <a:rPr lang="en-US" sz="1800" b="1" dirty="0">
+                <a:solidFill>
+                  <a:srgbClr val="FFFFFF"/>
+                </a:solidFill>
+                <a:latin typeface="Calibri" pitchFamily="34" charset="0"/>
+                <a:ea typeface="Calibri" pitchFamily="34" charset="-122"/>
+                <a:cs typeface="Calibri" pitchFamily="34" charset="-120"/>
+              </a:rPr>
+              <a:t>Route Matching</a:t>
+            </a:r>
+            <a:endParaRPr lang="en-US" sz="1800" dirty="0"/>
           </a:p>
         </p:txBody>
       </p:sp>
@@ -4922,14 +4134,43 @@
       </p:grpSpPr>
       <p:sp>
         <p:nvSpPr>
-          <p:cNvPr id="2" name="Text 0"/>
-          <p:cNvSpPr/>
-          <p:nvPr/>
-        </p:nvSpPr>
-        <p:spPr>
-          <a:xfrm>
-            <a:off x="457200" y="164592"/>
-            <a:ext cx="8229600" cy="530352"/>
+          <p:cNvPr id="2" name="Shape 0"/>
+          <p:cNvSpPr/>
+          <p:nvPr/>
+        </p:nvSpPr>
+        <p:spPr>
+          <a:xfrm>
+            <a:off x="2286000" y="457200"/>
+            <a:ext cx="4572000" cy="4572000"/>
+          </a:xfrm>
+          <a:prstGeom prst="ellipse">
+            <a:avLst/>
+          </a:prstGeom>
+          <a:solidFill>
+            <a:srgbClr val="6366F1">
+              <a:alpha val="15000"/>
+            </a:srgbClr>
+          </a:solidFill>
+          <a:ln w="12700">
+            <a:solidFill>
+              <a:srgbClr val="6366F1">
+                <a:alpha val="15000"/>
+              </a:srgbClr>
+            </a:solidFill>
+            <a:prstDash val="solid"/>
+          </a:ln>
+        </p:spPr>
+      </p:sp>
+      <p:sp>
+        <p:nvSpPr>
+          <p:cNvPr id="3" name="Text 1"/>
+          <p:cNvSpPr/>
+          <p:nvPr/>
+        </p:nvSpPr>
+        <p:spPr>
+          <a:xfrm>
+            <a:off x="914400" y="1005840"/>
+            <a:ext cx="7315200" cy="457200"/>
           </a:xfrm>
           <a:prstGeom prst="rect">
             <a:avLst/>
@@ -4941,11 +4182,50 @@
           <a:bodyPr wrap="square" lIns="0" tIns="0" rIns="0" bIns="0" rtlCol="0" anchor="ctr"/>
           <a:lstStyle/>
           <a:p>
-            <a:pPr algn="l" indent="0" marL="0">
-              <a:buNone/>
-            </a:pPr>
-            <a:r>
-              <a:rPr lang="en-US" sz="3200" b="1" dirty="0">
+            <a:pPr algn="ctr" indent="0" marL="0">
+              <a:buNone/>
+            </a:pPr>
+            <a:r>
+              <a:rPr lang="en-US" sz="2000" spc="800" kern="0" dirty="0">
+                <a:solidFill>
+                  <a:srgbClr val="A5B4FC"/>
+                </a:solidFill>
+                <a:latin typeface="Calibri" pitchFamily="34" charset="0"/>
+                <a:ea typeface="Calibri" pitchFamily="34" charset="-122"/>
+                <a:cs typeface="Calibri" pitchFamily="34" charset="-120"/>
+              </a:rPr>
+              <a:t>Introducing</a:t>
+            </a:r>
+            <a:endParaRPr lang="en-US" sz="2000" dirty="0"/>
+          </a:p>
+        </p:txBody>
+      </p:sp>
+      <p:sp>
+        <p:nvSpPr>
+          <p:cNvPr id="4" name="Text 2"/>
+          <p:cNvSpPr/>
+          <p:nvPr/>
+        </p:nvSpPr>
+        <p:spPr>
+          <a:xfrm>
+            <a:off x="914400" y="1508760"/>
+            <a:ext cx="7315200" cy="1188720"/>
+          </a:xfrm>
+          <a:prstGeom prst="rect">
+            <a:avLst/>
+          </a:prstGeom>
+          <a:noFill/>
+          <a:ln/>
+        </p:spPr>
+        <p:txBody>
+          <a:bodyPr wrap="square" lIns="0" tIns="0" rIns="0" bIns="0" rtlCol="0" anchor="ctr"/>
+          <a:lstStyle/>
+          <a:p>
+            <a:pPr algn="ctr" indent="0" marL="0">
+              <a:buNone/>
+            </a:pPr>
+            <a:r>
+              <a:rPr lang="en-US" sz="8000" b="1" dirty="0">
                 <a:solidFill>
                   <a:srgbClr val="FFFFFF"/>
                 </a:solidFill>
@@ -4953,22 +4233,22 @@
                 <a:ea typeface="Calibri" pitchFamily="34" charset="-122"/>
                 <a:cs typeface="Calibri" pitchFamily="34" charset="-120"/>
               </a:rPr>
-              <a:t>Everything your commute has been missing.</a:t>
-            </a:r>
-            <a:endParaRPr lang="en-US" sz="3200" dirty="0"/>
-          </a:p>
-        </p:txBody>
-      </p:sp>
-      <p:sp>
-        <p:nvSpPr>
-          <p:cNvPr id="3" name="Text 1"/>
-          <p:cNvSpPr/>
-          <p:nvPr/>
-        </p:nvSpPr>
-        <p:spPr>
-          <a:xfrm>
-            <a:off x="457200" y="713232"/>
-            <a:ext cx="8229600" cy="274320"/>
+              <a:t>UniRide</a:t>
+            </a:r>
+            <a:endParaRPr lang="en-US" sz="8000" dirty="0"/>
+          </a:p>
+        </p:txBody>
+      </p:sp>
+      <p:sp>
+        <p:nvSpPr>
+          <p:cNvPr id="5" name="Text 3"/>
+          <p:cNvSpPr/>
+          <p:nvPr/>
+        </p:nvSpPr>
+        <p:spPr>
+          <a:xfrm>
+            <a:off x="914400" y="2788920"/>
+            <a:ext cx="7315200" cy="411480"/>
           </a:xfrm>
           <a:prstGeom prst="rect">
             <a:avLst/>
@@ -4980,19 +4260,85 @@
           <a:bodyPr wrap="square" lIns="0" tIns="0" rIns="0" bIns="0" rtlCol="0" anchor="ctr"/>
           <a:lstStyle/>
           <a:p>
-            <a:pPr algn="l" indent="0" marL="0">
-              <a:buNone/>
-            </a:pPr>
-            <a:r>
-              <a:rPr lang="en-US" sz="1300" dirty="0">
-                <a:solidFill>
-                  <a:srgbClr val="9CA3AF"/>
-                </a:solidFill>
-                <a:latin typeface="Calibri" pitchFamily="34" charset="0"/>
-                <a:ea typeface="Calibri" pitchFamily="34" charset="-122"/>
-                <a:cs typeface="Calibri" pitchFamily="34" charset="-120"/>
-              </a:rPr>
-              <a:t>Built exclusively for campus commuters — riders and drivers alike.</a:t>
+            <a:pPr algn="ctr" indent="0" marL="0">
+              <a:buNone/>
+            </a:pPr>
+            <a:r>
+              <a:rPr lang="en-US" sz="1700" dirty="0">
+                <a:solidFill>
+                  <a:srgbClr val="A5B4FC"/>
+                </a:solidFill>
+                <a:latin typeface="Calibri" pitchFamily="34" charset="0"/>
+                <a:ea typeface="Calibri" pitchFamily="34" charset="-122"/>
+                <a:cs typeface="Calibri" pitchFamily="34" charset="-120"/>
+              </a:rPr>
+              <a:t>Need a ride to campus — or have empty seats to share?</a:t>
+            </a:r>
+            <a:endParaRPr lang="en-US" sz="1700" dirty="0"/>
+          </a:p>
+        </p:txBody>
+      </p:sp>
+      <p:sp>
+        <p:nvSpPr>
+          <p:cNvPr id="6" name="Shape 4"/>
+          <p:cNvSpPr/>
+          <p:nvPr/>
+        </p:nvSpPr>
+        <p:spPr>
+          <a:xfrm>
+            <a:off x="2011680" y="3429000"/>
+            <a:ext cx="1463040" cy="411480"/>
+          </a:xfrm>
+          <a:prstGeom prst="roundRect">
+            <a:avLst>
+              <a:gd name="adj" fmla="val 17778"/>
+            </a:avLst>
+          </a:prstGeom>
+          <a:solidFill>
+            <a:srgbClr val="121224"/>
+          </a:solidFill>
+          <a:ln w="19050">
+            <a:solidFill>
+              <a:srgbClr val="6366F1"/>
+            </a:solidFill>
+            <a:prstDash val="solid"/>
+          </a:ln>
+        </p:spPr>
+      </p:sp>
+      <p:sp>
+        <p:nvSpPr>
+          <p:cNvPr id="7" name="Text 5"/>
+          <p:cNvSpPr/>
+          <p:nvPr/>
+        </p:nvSpPr>
+        <p:spPr>
+          <a:xfrm>
+            <a:off x="2011680" y="3429000"/>
+            <a:ext cx="1463040" cy="411480"/>
+          </a:xfrm>
+          <a:prstGeom prst="rect">
+            <a:avLst/>
+          </a:prstGeom>
+          <a:noFill/>
+          <a:ln/>
+        </p:spPr>
+        <p:txBody>
+          <a:bodyPr wrap="square" lIns="0" tIns="0" rIns="0" bIns="0" rtlCol="0" anchor="ctr"/>
+          <a:lstStyle/>
+          <a:p>
+            <a:pPr algn="ctr" indent="0" marL="0">
+              <a:buNone/>
+            </a:pPr>
+            <a:r>
+              <a:rPr lang="en-US" sz="1300" b="1" dirty="0">
+                <a:solidFill>
+                  <a:srgbClr val="6366F1"/>
+                </a:solidFill>
+                <a:latin typeface="Calibri" pitchFamily="34" charset="0"/>
+                <a:ea typeface="Calibri" pitchFamily="34" charset="-122"/>
+                <a:cs typeface="Calibri" pitchFamily="34" charset="-120"/>
+              </a:rPr>
+              <a:t>Trusted</a:t>
             </a:r>
             <a:endParaRPr lang="en-US" sz="1300" dirty="0"/>
           </a:p>
@@ -5000,105 +4346,41 @@
       </p:sp>
       <p:sp>
         <p:nvSpPr>
-          <p:cNvPr id="4" name="Shape 2"/>
-          <p:cNvSpPr/>
-          <p:nvPr/>
-        </p:nvSpPr>
-        <p:spPr>
-          <a:xfrm>
-            <a:off x="365760" y="1143000"/>
-            <a:ext cx="4069080" cy="1417320"/>
-          </a:xfrm>
-          <a:prstGeom prst="rect">
-            <a:avLst/>
-          </a:prstGeom>
-          <a:solidFill>
-            <a:srgbClr val="111124"/>
-          </a:solidFill>
-          <a:ln/>
-          <a:effectLst>
-            <a:outerShdw sx="100000" sy="100000" kx="0" ky="0" algn="bl" rotWithShape="0" blurRad="203200" dist="50800" dir="8100000">
-              <a:srgbClr val="000000">
-                <a:alpha val="35000"/>
-              </a:srgbClr>
-            </a:outerShdw>
-          </a:effectLst>
-        </p:spPr>
-      </p:sp>
-      <p:sp>
-        <p:nvSpPr>
-          <p:cNvPr id="5" name="Shape 3"/>
-          <p:cNvSpPr/>
-          <p:nvPr/>
-        </p:nvSpPr>
-        <p:spPr>
-          <a:xfrm>
-            <a:off x="365760" y="1143000"/>
-            <a:ext cx="4069080" cy="45720"/>
-          </a:xfrm>
-          <a:prstGeom prst="rect">
-            <a:avLst/>
-          </a:prstGeom>
-          <a:solidFill>
-            <a:srgbClr val="6366F1"/>
-          </a:solidFill>
-          <a:ln/>
-        </p:spPr>
-      </p:sp>
-      <p:sp>
-        <p:nvSpPr>
-          <p:cNvPr id="6" name="Shape 4"/>
-          <p:cNvSpPr/>
-          <p:nvPr/>
-        </p:nvSpPr>
-        <p:spPr>
-          <a:xfrm>
-            <a:off x="548640" y="1613916"/>
-            <a:ext cx="475488" cy="475488"/>
-          </a:xfrm>
-          <a:prstGeom prst="ellipse">
-            <a:avLst/>
-          </a:prstGeom>
-          <a:solidFill>
-            <a:srgbClr val="1A1A38"/>
-          </a:solidFill>
-          <a:ln/>
-        </p:spPr>
-      </p:sp>
-      <p:pic>
-        <p:nvPicPr>
-          <p:cNvPr id="7" name="Image 0" descr="preencoded.png">    </p:cNvPr>
-          <p:cNvPicPr>
-            <a:picLocks noChangeAspect="1"/>
-          </p:cNvPicPr>
-          <p:nvPr/>
-        </p:nvPicPr>
-        <p:blipFill>
-          <a:blip r:embed="rId1"/>
-          <a:stretch>
-            <a:fillRect/>
-          </a:stretch>
-        </p:blipFill>
-        <p:spPr>
-          <a:xfrm>
-            <a:off x="658368" y="1723644"/>
-            <a:ext cx="256032" cy="256032"/>
-          </a:xfrm>
-          <a:prstGeom prst="rect">
-            <a:avLst/>
-          </a:prstGeom>
-        </p:spPr>
-      </p:pic>
-      <p:sp>
-        <p:nvSpPr>
-          <p:cNvPr id="8" name="Text 5"/>
-          <p:cNvSpPr/>
-          <p:nvPr/>
-        </p:nvSpPr>
-        <p:spPr>
-          <a:xfrm>
-            <a:off x="1170432" y="1650492"/>
-            <a:ext cx="3099816" cy="402336"/>
+          <p:cNvPr id="8" name="Shape 6"/>
+          <p:cNvSpPr/>
+          <p:nvPr/>
+        </p:nvSpPr>
+        <p:spPr>
+          <a:xfrm>
+            <a:off x="3840480" y="3429000"/>
+            <a:ext cx="1463040" cy="411480"/>
+          </a:xfrm>
+          <a:prstGeom prst="roundRect">
+            <a:avLst>
+              <a:gd name="adj" fmla="val 17778"/>
+            </a:avLst>
+          </a:prstGeom>
+          <a:solidFill>
+            <a:srgbClr val="121224"/>
+          </a:solidFill>
+          <a:ln w="19050">
+            <a:solidFill>
+              <a:srgbClr val="10B981"/>
+            </a:solidFill>
+            <a:prstDash val="solid"/>
+          </a:ln>
+        </p:spPr>
+      </p:sp>
+      <p:sp>
+        <p:nvSpPr>
+          <p:cNvPr id="9" name="Text 7"/>
+          <p:cNvSpPr/>
+          <p:nvPr/>
+        </p:nvSpPr>
+        <p:spPr>
+          <a:xfrm>
+            <a:off x="3840480" y="3429000"/>
+            <a:ext cx="1463040" cy="411480"/>
           </a:xfrm>
           <a:prstGeom prst="rect">
             <a:avLst/>
@@ -5110,125 +4392,61 @@
           <a:bodyPr wrap="square" lIns="0" tIns="0" rIns="0" bIns="0" rtlCol="0" anchor="ctr"/>
           <a:lstStyle/>
           <a:p>
-            <a:pPr algn="l" indent="0" marL="0">
-              <a:buNone/>
-            </a:pPr>
-            <a:r>
-              <a:rPr lang="en-US" sz="1700" b="1" dirty="0">
-                <a:solidFill>
-                  <a:srgbClr val="FFFFFF"/>
-                </a:solidFill>
-                <a:latin typeface="Calibri" pitchFamily="34" charset="0"/>
-                <a:ea typeface="Calibri" pitchFamily="34" charset="-122"/>
-                <a:cs typeface="Calibri" pitchFamily="34" charset="-120"/>
-              </a:rPr>
-              <a:t>Campus-Verified Community</a:t>
-            </a:r>
-            <a:endParaRPr lang="en-US" sz="1700" dirty="0"/>
-          </a:p>
-        </p:txBody>
-      </p:sp>
-      <p:sp>
-        <p:nvSpPr>
-          <p:cNvPr id="9" name="Shape 6"/>
-          <p:cNvSpPr/>
-          <p:nvPr/>
-        </p:nvSpPr>
-        <p:spPr>
-          <a:xfrm>
-            <a:off x="4709160" y="1143000"/>
-            <a:ext cx="4069080" cy="1417320"/>
-          </a:xfrm>
-          <a:prstGeom prst="rect">
-            <a:avLst/>
-          </a:prstGeom>
-          <a:solidFill>
-            <a:srgbClr val="111124"/>
-          </a:solidFill>
-          <a:ln/>
-          <a:effectLst>
-            <a:outerShdw sx="100000" sy="100000" kx="0" ky="0" algn="bl" rotWithShape="0" blurRad="203200" dist="50800" dir="8100000">
-              <a:srgbClr val="000000">
-                <a:alpha val="35000"/>
-              </a:srgbClr>
-            </a:outerShdw>
-          </a:effectLst>
-        </p:spPr>
-      </p:sp>
-      <p:sp>
-        <p:nvSpPr>
-          <p:cNvPr id="10" name="Shape 7"/>
-          <p:cNvSpPr/>
-          <p:nvPr/>
-        </p:nvSpPr>
-        <p:spPr>
-          <a:xfrm>
-            <a:off x="4709160" y="1143000"/>
-            <a:ext cx="4069080" cy="45720"/>
-          </a:xfrm>
-          <a:prstGeom prst="rect">
-            <a:avLst/>
-          </a:prstGeom>
-          <a:solidFill>
-            <a:srgbClr val="FBBF24"/>
-          </a:solidFill>
-          <a:ln/>
-        </p:spPr>
-      </p:sp>
-      <p:sp>
-        <p:nvSpPr>
-          <p:cNvPr id="11" name="Shape 8"/>
-          <p:cNvSpPr/>
-          <p:nvPr/>
-        </p:nvSpPr>
-        <p:spPr>
-          <a:xfrm>
-            <a:off x="4892040" y="1613916"/>
-            <a:ext cx="475488" cy="475488"/>
-          </a:xfrm>
-          <a:prstGeom prst="ellipse">
-            <a:avLst/>
-          </a:prstGeom>
-          <a:solidFill>
-            <a:srgbClr val="1A1A38"/>
-          </a:solidFill>
-          <a:ln/>
-        </p:spPr>
-      </p:sp>
-      <p:pic>
-        <p:nvPicPr>
-          <p:cNvPr id="12" name="Image 1" descr="preencoded.png">    </p:cNvPr>
-          <p:cNvPicPr>
-            <a:picLocks noChangeAspect="1"/>
-          </p:cNvPicPr>
-          <p:nvPr/>
-        </p:nvPicPr>
-        <p:blipFill>
-          <a:blip r:embed="rId2"/>
-          <a:stretch>
-            <a:fillRect/>
-          </a:stretch>
-        </p:blipFill>
-        <p:spPr>
-          <a:xfrm>
-            <a:off x="5001768" y="1723644"/>
-            <a:ext cx="256032" cy="256032"/>
-          </a:xfrm>
-          <a:prstGeom prst="rect">
-            <a:avLst/>
-          </a:prstGeom>
-        </p:spPr>
-      </p:pic>
-      <p:sp>
-        <p:nvSpPr>
-          <p:cNvPr id="13" name="Text 9"/>
-          <p:cNvSpPr/>
-          <p:nvPr/>
-        </p:nvSpPr>
-        <p:spPr>
-          <a:xfrm>
-            <a:off x="5513832" y="1650492"/>
-            <a:ext cx="3099816" cy="402336"/>
+            <a:pPr algn="ctr" indent="0" marL="0">
+              <a:buNone/>
+            </a:pPr>
+            <a:r>
+              <a:rPr lang="en-US" sz="1300" b="1" dirty="0">
+                <a:solidFill>
+                  <a:srgbClr val="10B981"/>
+                </a:solidFill>
+                <a:latin typeface="Calibri" pitchFamily="34" charset="0"/>
+                <a:ea typeface="Calibri" pitchFamily="34" charset="-122"/>
+                <a:cs typeface="Calibri" pitchFamily="34" charset="-120"/>
+              </a:rPr>
+              <a:t>Affordable</a:t>
+            </a:r>
+            <a:endParaRPr lang="en-US" sz="1300" dirty="0"/>
+          </a:p>
+        </p:txBody>
+      </p:sp>
+      <p:sp>
+        <p:nvSpPr>
+          <p:cNvPr id="10" name="Shape 8"/>
+          <p:cNvSpPr/>
+          <p:nvPr/>
+        </p:nvSpPr>
+        <p:spPr>
+          <a:xfrm>
+            <a:off x="5669280" y="3429000"/>
+            <a:ext cx="1463040" cy="411480"/>
+          </a:xfrm>
+          <a:prstGeom prst="roundRect">
+            <a:avLst>
+              <a:gd name="adj" fmla="val 17778"/>
+            </a:avLst>
+          </a:prstGeom>
+          <a:solidFill>
+            <a:srgbClr val="121224"/>
+          </a:solidFill>
+          <a:ln w="19050">
+            <a:solidFill>
+              <a:srgbClr val="FBBF24"/>
+            </a:solidFill>
+            <a:prstDash val="solid"/>
+          </a:ln>
+        </p:spPr>
+      </p:sp>
+      <p:sp>
+        <p:nvSpPr>
+          <p:cNvPr id="11" name="Text 9"/>
+          <p:cNvSpPr/>
+          <p:nvPr/>
+        </p:nvSpPr>
+        <p:spPr>
+          <a:xfrm>
+            <a:off x="5669280" y="3429000"/>
+            <a:ext cx="1463040" cy="411480"/>
           </a:xfrm>
           <a:prstGeom prst="rect">
             <a:avLst/>
@@ -5240,281 +4458,21 @@
           <a:bodyPr wrap="square" lIns="0" tIns="0" rIns="0" bIns="0" rtlCol="0" anchor="ctr"/>
           <a:lstStyle/>
           <a:p>
-            <a:pPr algn="l" indent="0" marL="0">
-              <a:buNone/>
-            </a:pPr>
-            <a:r>
-              <a:rPr lang="en-US" sz="1700" b="1" dirty="0">
-                <a:solidFill>
-                  <a:srgbClr val="FFFFFF"/>
-                </a:solidFill>
-                <a:latin typeface="Calibri" pitchFamily="34" charset="0"/>
-                <a:ea typeface="Calibri" pitchFamily="34" charset="-122"/>
-                <a:cs typeface="Calibri" pitchFamily="34" charset="-120"/>
-              </a:rPr>
-              <a:t>Student-First Pricing</a:t>
-            </a:r>
-            <a:endParaRPr lang="en-US" sz="1700" dirty="0"/>
-          </a:p>
-        </p:txBody>
-      </p:sp>
-      <p:sp>
-        <p:nvSpPr>
-          <p:cNvPr id="14" name="Shape 10"/>
-          <p:cNvSpPr/>
-          <p:nvPr/>
-        </p:nvSpPr>
-        <p:spPr>
-          <a:xfrm>
-            <a:off x="365760" y="2788920"/>
-            <a:ext cx="4069080" cy="1417320"/>
-          </a:xfrm>
-          <a:prstGeom prst="rect">
-            <a:avLst/>
-          </a:prstGeom>
-          <a:solidFill>
-            <a:srgbClr val="111124"/>
-          </a:solidFill>
-          <a:ln/>
-          <a:effectLst>
-            <a:outerShdw sx="100000" sy="100000" kx="0" ky="0" algn="bl" rotWithShape="0" blurRad="203200" dist="50800" dir="8100000">
-              <a:srgbClr val="000000">
-                <a:alpha val="35000"/>
-              </a:srgbClr>
-            </a:outerShdw>
-          </a:effectLst>
-        </p:spPr>
-      </p:sp>
-      <p:sp>
-        <p:nvSpPr>
-          <p:cNvPr id="15" name="Shape 11"/>
-          <p:cNvSpPr/>
-          <p:nvPr/>
-        </p:nvSpPr>
-        <p:spPr>
-          <a:xfrm>
-            <a:off x="365760" y="2788920"/>
-            <a:ext cx="4069080" cy="45720"/>
-          </a:xfrm>
-          <a:prstGeom prst="rect">
-            <a:avLst/>
-          </a:prstGeom>
-          <a:solidFill>
-            <a:srgbClr val="10B981"/>
-          </a:solidFill>
-          <a:ln/>
-        </p:spPr>
-      </p:sp>
-      <p:sp>
-        <p:nvSpPr>
-          <p:cNvPr id="16" name="Shape 12"/>
-          <p:cNvSpPr/>
-          <p:nvPr/>
-        </p:nvSpPr>
-        <p:spPr>
-          <a:xfrm>
-            <a:off x="548640" y="3259836"/>
-            <a:ext cx="475488" cy="475488"/>
-          </a:xfrm>
-          <a:prstGeom prst="ellipse">
-            <a:avLst/>
-          </a:prstGeom>
-          <a:solidFill>
-            <a:srgbClr val="1A1A38"/>
-          </a:solidFill>
-          <a:ln/>
-        </p:spPr>
-      </p:sp>
-      <p:pic>
-        <p:nvPicPr>
-          <p:cNvPr id="17" name="Image 2" descr="preencoded.png">    </p:cNvPr>
-          <p:cNvPicPr>
-            <a:picLocks noChangeAspect="1"/>
-          </p:cNvPicPr>
-          <p:nvPr/>
-        </p:nvPicPr>
-        <p:blipFill>
-          <a:blip r:embed="rId3"/>
-          <a:stretch>
-            <a:fillRect/>
-          </a:stretch>
-        </p:blipFill>
-        <p:spPr>
-          <a:xfrm>
-            <a:off x="658368" y="3369564"/>
-            <a:ext cx="256032" cy="256032"/>
-          </a:xfrm>
-          <a:prstGeom prst="rect">
-            <a:avLst/>
-          </a:prstGeom>
-        </p:spPr>
-      </p:pic>
-      <p:sp>
-        <p:nvSpPr>
-          <p:cNvPr id="18" name="Text 13"/>
-          <p:cNvSpPr/>
-          <p:nvPr/>
-        </p:nvSpPr>
-        <p:spPr>
-          <a:xfrm>
-            <a:off x="1170432" y="3296412"/>
-            <a:ext cx="3099816" cy="402336"/>
-          </a:xfrm>
-          <a:prstGeom prst="rect">
-            <a:avLst/>
-          </a:prstGeom>
-          <a:noFill/>
-          <a:ln/>
-        </p:spPr>
-        <p:txBody>
-          <a:bodyPr wrap="square" lIns="0" tIns="0" rIns="0" bIns="0" rtlCol="0" anchor="ctr"/>
-          <a:lstStyle/>
-          <a:p>
-            <a:pPr algn="l" indent="0" marL="0">
-              <a:buNone/>
-            </a:pPr>
-            <a:r>
-              <a:rPr lang="en-US" sz="1700" b="1" dirty="0">
-                <a:solidFill>
-                  <a:srgbClr val="FFFFFF"/>
-                </a:solidFill>
-                <a:latin typeface="Calibri" pitchFamily="34" charset="0"/>
-                <a:ea typeface="Calibri" pitchFamily="34" charset="-122"/>
-                <a:cs typeface="Calibri" pitchFamily="34" charset="-120"/>
-              </a:rPr>
-              <a:t>Smart Daily Route Matching</a:t>
-            </a:r>
-            <a:endParaRPr lang="en-US" sz="1700" dirty="0"/>
-          </a:p>
-        </p:txBody>
-      </p:sp>
-      <p:sp>
-        <p:nvSpPr>
-          <p:cNvPr id="19" name="Shape 14"/>
-          <p:cNvSpPr/>
-          <p:nvPr/>
-        </p:nvSpPr>
-        <p:spPr>
-          <a:xfrm>
-            <a:off x="4709160" y="2788920"/>
-            <a:ext cx="4069080" cy="1417320"/>
-          </a:xfrm>
-          <a:prstGeom prst="rect">
-            <a:avLst/>
-          </a:prstGeom>
-          <a:solidFill>
-            <a:srgbClr val="111124"/>
-          </a:solidFill>
-          <a:ln/>
-          <a:effectLst>
-            <a:outerShdw sx="100000" sy="100000" kx="0" ky="0" algn="bl" rotWithShape="0" blurRad="203200" dist="50800" dir="8100000">
-              <a:srgbClr val="000000">
-                <a:alpha val="35000"/>
-              </a:srgbClr>
-            </a:outerShdw>
-          </a:effectLst>
-        </p:spPr>
-      </p:sp>
-      <p:sp>
-        <p:nvSpPr>
-          <p:cNvPr id="20" name="Shape 15"/>
-          <p:cNvSpPr/>
-          <p:nvPr/>
-        </p:nvSpPr>
-        <p:spPr>
-          <a:xfrm>
-            <a:off x="4709160" y="2788920"/>
-            <a:ext cx="4069080" cy="45720"/>
-          </a:xfrm>
-          <a:prstGeom prst="rect">
-            <a:avLst/>
-          </a:prstGeom>
-          <a:solidFill>
-            <a:srgbClr val="A5B4FC"/>
-          </a:solidFill>
-          <a:ln/>
-        </p:spPr>
-      </p:sp>
-      <p:sp>
-        <p:nvSpPr>
-          <p:cNvPr id="21" name="Shape 16"/>
-          <p:cNvSpPr/>
-          <p:nvPr/>
-        </p:nvSpPr>
-        <p:spPr>
-          <a:xfrm>
-            <a:off x="4892040" y="3259836"/>
-            <a:ext cx="475488" cy="475488"/>
-          </a:xfrm>
-          <a:prstGeom prst="ellipse">
-            <a:avLst/>
-          </a:prstGeom>
-          <a:solidFill>
-            <a:srgbClr val="1A1A38"/>
-          </a:solidFill>
-          <a:ln/>
-        </p:spPr>
-      </p:sp>
-      <p:pic>
-        <p:nvPicPr>
-          <p:cNvPr id="22" name="Image 3" descr="preencoded.png">    </p:cNvPr>
-          <p:cNvPicPr>
-            <a:picLocks noChangeAspect="1"/>
-          </p:cNvPicPr>
-          <p:nvPr/>
-        </p:nvPicPr>
-        <p:blipFill>
-          <a:blip r:embed="rId4"/>
-          <a:stretch>
-            <a:fillRect/>
-          </a:stretch>
-        </p:blipFill>
-        <p:spPr>
-          <a:xfrm>
-            <a:off x="5001768" y="3369564"/>
-            <a:ext cx="256032" cy="256032"/>
-          </a:xfrm>
-          <a:prstGeom prst="rect">
-            <a:avLst/>
-          </a:prstGeom>
-        </p:spPr>
-      </p:pic>
-      <p:sp>
-        <p:nvSpPr>
-          <p:cNvPr id="23" name="Text 17"/>
-          <p:cNvSpPr/>
-          <p:nvPr/>
-        </p:nvSpPr>
-        <p:spPr>
-          <a:xfrm>
-            <a:off x="5513832" y="3296412"/>
-            <a:ext cx="3099816" cy="402336"/>
-          </a:xfrm>
-          <a:prstGeom prst="rect">
-            <a:avLst/>
-          </a:prstGeom>
-          <a:noFill/>
-          <a:ln/>
-        </p:spPr>
-        <p:txBody>
-          <a:bodyPr wrap="square" lIns="0" tIns="0" rIns="0" bIns="0" rtlCol="0" anchor="ctr"/>
-          <a:lstStyle/>
-          <a:p>
-            <a:pPr algn="l" indent="0" marL="0">
-              <a:buNone/>
-            </a:pPr>
-            <a:r>
-              <a:rPr lang="en-US" sz="1700" b="1" dirty="0">
-                <a:solidFill>
-                  <a:srgbClr val="FFFFFF"/>
-                </a:solidFill>
-                <a:latin typeface="Calibri" pitchFamily="34" charset="0"/>
-                <a:ea typeface="Calibri" pitchFamily="34" charset="-122"/>
-                <a:cs typeface="Calibri" pitchFamily="34" charset="-120"/>
-              </a:rPr>
-              <a:t>Campus Social Network</a:t>
-            </a:r>
-            <a:endParaRPr lang="en-US" sz="1700" dirty="0"/>
+            <a:pPr algn="ctr" indent="0" marL="0">
+              <a:buNone/>
+            </a:pPr>
+            <a:r>
+              <a:rPr lang="en-US" sz="1300" b="1" dirty="0">
+                <a:solidFill>
+                  <a:srgbClr val="FBBF24"/>
+                </a:solidFill>
+                <a:latin typeface="Calibri" pitchFamily="34" charset="0"/>
+                <a:ea typeface="Calibri" pitchFamily="34" charset="-122"/>
+                <a:cs typeface="Calibri" pitchFamily="34" charset="-120"/>
+              </a:rPr>
+              <a:t>Seamless</a:t>
+            </a:r>
+            <a:endParaRPr lang="en-US" sz="1300" dirty="0"/>
           </a:p>
         </p:txBody>
       </p:sp>
@@ -5558,7 +4516,7 @@
         </p:nvSpPr>
         <p:spPr>
           <a:xfrm>
-            <a:off x="2286000" y="457200"/>
+            <a:off x="5029200" y="457200"/>
             <a:ext cx="4572000" cy="4572000"/>
           </a:xfrm>
           <a:prstGeom prst="ellipse">
@@ -5566,13 +4524,13 @@
           </a:prstGeom>
           <a:solidFill>
             <a:srgbClr val="6366F1">
-              <a:alpha val="15000"/>
+              <a:alpha val="8000"/>
             </a:srgbClr>
           </a:solidFill>
           <a:ln w="12700">
             <a:solidFill>
               <a:srgbClr val="6366F1">
-                <a:alpha val="15000"/>
+                <a:alpha val="8000"/>
               </a:srgbClr>
             </a:solidFill>
             <a:prstDash val="solid"/>
@@ -5587,8 +4545,8 @@
         </p:nvSpPr>
         <p:spPr>
           <a:xfrm>
-            <a:off x="914400" y="1005840"/>
-            <a:ext cx="7315200" cy="457200"/>
+            <a:off x="914400" y="1188720"/>
+            <a:ext cx="7315200" cy="914400"/>
           </a:xfrm>
           <a:prstGeom prst="rect">
             <a:avLst/>
@@ -5604,7 +4562,46 @@
               <a:buNone/>
             </a:pPr>
             <a:r>
-              <a:rPr lang="en-US" sz="2000" spc="800" kern="0" dirty="0">
+              <a:rPr lang="en-US" sz="5600" b="1" dirty="0">
+                <a:solidFill>
+                  <a:srgbClr val="FFFFFF"/>
+                </a:solidFill>
+                <a:latin typeface="Calibri" pitchFamily="34" charset="0"/>
+                <a:ea typeface="Calibri" pitchFamily="34" charset="-122"/>
+                <a:cs typeface="Calibri" pitchFamily="34" charset="-120"/>
+              </a:rPr>
+              <a:t>Find a Ride</a:t>
+            </a:r>
+            <a:endParaRPr lang="en-US" sz="5600" dirty="0"/>
+          </a:p>
+        </p:txBody>
+      </p:sp>
+      <p:sp>
+        <p:nvSpPr>
+          <p:cNvPr id="4" name="Text 2"/>
+          <p:cNvSpPr/>
+          <p:nvPr/>
+        </p:nvSpPr>
+        <p:spPr>
+          <a:xfrm>
+            <a:off x="914400" y="2194560"/>
+            <a:ext cx="7315200" cy="365760"/>
+          </a:xfrm>
+          <a:prstGeom prst="rect">
+            <a:avLst/>
+          </a:prstGeom>
+          <a:noFill/>
+          <a:ln/>
+        </p:spPr>
+        <p:txBody>
+          <a:bodyPr wrap="square" lIns="0" tIns="0" rIns="0" bIns="0" rtlCol="0" anchor="ctr"/>
+          <a:lstStyle/>
+          <a:p>
+            <a:pPr algn="ctr" indent="0" marL="0">
+              <a:buNone/>
+            </a:pPr>
+            <a:r>
+              <a:rPr lang="en-US" sz="1600" dirty="0">
                 <a:solidFill>
                   <a:srgbClr val="A5B4FC"/>
                 </a:solidFill>
@@ -5612,22 +4609,66 @@
                 <a:ea typeface="Calibri" pitchFamily="34" charset="-122"/>
                 <a:cs typeface="Calibri" pitchFamily="34" charset="-120"/>
               </a:rPr>
-              <a:t>Introducing</a:t>
-            </a:r>
-            <a:endParaRPr lang="en-US" sz="2000" dirty="0"/>
-          </a:p>
-        </p:txBody>
-      </p:sp>
-      <p:sp>
-        <p:nvSpPr>
-          <p:cNvPr id="4" name="Text 2"/>
-          <p:cNvSpPr/>
-          <p:nvPr/>
-        </p:nvSpPr>
-        <p:spPr>
-          <a:xfrm>
-            <a:off x="914400" y="1508760"/>
-            <a:ext cx="7315200" cy="1188720"/>
+              <a:t>Get to campus without the chaos.</a:t>
+            </a:r>
+            <a:endParaRPr lang="en-US" sz="1600" dirty="0"/>
+          </a:p>
+        </p:txBody>
+      </p:sp>
+      <p:sp>
+        <p:nvSpPr>
+          <p:cNvPr id="5" name="Shape 3"/>
+          <p:cNvSpPr/>
+          <p:nvPr/>
+        </p:nvSpPr>
+        <p:spPr>
+          <a:xfrm>
+            <a:off x="1737360" y="2971800"/>
+            <a:ext cx="475488" cy="475488"/>
+          </a:xfrm>
+          <a:prstGeom prst="ellipse">
+            <a:avLst/>
+          </a:prstGeom>
+          <a:solidFill>
+            <a:srgbClr val="1A1A38"/>
+          </a:solidFill>
+          <a:ln/>
+        </p:spPr>
+      </p:sp>
+      <p:pic>
+        <p:nvPicPr>
+          <p:cNvPr id="6" name="Image 0" descr="preencoded.png">    </p:cNvPr>
+          <p:cNvPicPr>
+            <a:picLocks noChangeAspect="1"/>
+          </p:cNvPicPr>
+          <p:nvPr/>
+        </p:nvPicPr>
+        <p:blipFill>
+          <a:blip r:embed="rId1"/>
+          <a:stretch>
+            <a:fillRect/>
+          </a:stretch>
+        </p:blipFill>
+        <p:spPr>
+          <a:xfrm>
+            <a:off x="1847088" y="3081528"/>
+            <a:ext cx="256032" cy="256032"/>
+          </a:xfrm>
+          <a:prstGeom prst="rect">
+            <a:avLst/>
+          </a:prstGeom>
+        </p:spPr>
+      </p:pic>
+      <p:sp>
+        <p:nvSpPr>
+          <p:cNvPr id="7" name="Text 4"/>
+          <p:cNvSpPr/>
+          <p:nvPr/>
+        </p:nvSpPr>
+        <p:spPr>
+          <a:xfrm>
+            <a:off x="914400" y="3566160"/>
+            <a:ext cx="2286000" cy="329184"/>
           </a:xfrm>
           <a:prstGeom prst="rect">
             <a:avLst/>
@@ -5643,7 +4684,7 @@
               <a:buNone/>
             </a:pPr>
             <a:r>
-              <a:rPr lang="en-US" sz="8000" b="1" dirty="0">
+              <a:rPr lang="en-US" sz="1300" b="1" dirty="0">
                 <a:solidFill>
                   <a:srgbClr val="FFFFFF"/>
                 </a:solidFill>
@@ -5651,22 +4692,66 @@
                 <a:ea typeface="Calibri" pitchFamily="34" charset="-122"/>
                 <a:cs typeface="Calibri" pitchFamily="34" charset="-120"/>
               </a:rPr>
-              <a:t>UniRide</a:t>
-            </a:r>
-            <a:endParaRPr lang="en-US" sz="8000" dirty="0"/>
-          </a:p>
-        </p:txBody>
-      </p:sp>
-      <p:sp>
-        <p:nvSpPr>
-          <p:cNvPr id="5" name="Text 3"/>
-          <p:cNvSpPr/>
-          <p:nvPr/>
-        </p:nvSpPr>
-        <p:spPr>
-          <a:xfrm>
-            <a:off x="914400" y="2788920"/>
-            <a:ext cx="7315200" cy="411480"/>
+              <a:t>Search by route &amp; time</a:t>
+            </a:r>
+            <a:endParaRPr lang="en-US" sz="1300" dirty="0"/>
+          </a:p>
+        </p:txBody>
+      </p:sp>
+      <p:sp>
+        <p:nvSpPr>
+          <p:cNvPr id="8" name="Shape 5"/>
+          <p:cNvSpPr/>
+          <p:nvPr/>
+        </p:nvSpPr>
+        <p:spPr>
+          <a:xfrm>
+            <a:off x="4343400" y="2971800"/>
+            <a:ext cx="475488" cy="475488"/>
+          </a:xfrm>
+          <a:prstGeom prst="ellipse">
+            <a:avLst/>
+          </a:prstGeom>
+          <a:solidFill>
+            <a:srgbClr val="1A1A38"/>
+          </a:solidFill>
+          <a:ln/>
+        </p:spPr>
+      </p:sp>
+      <p:pic>
+        <p:nvPicPr>
+          <p:cNvPr id="9" name="Image 1" descr="preencoded.png">    </p:cNvPr>
+          <p:cNvPicPr>
+            <a:picLocks noChangeAspect="1"/>
+          </p:cNvPicPr>
+          <p:nvPr/>
+        </p:nvPicPr>
+        <p:blipFill>
+          <a:blip r:embed="rId2"/>
+          <a:stretch>
+            <a:fillRect/>
+          </a:stretch>
+        </p:blipFill>
+        <p:spPr>
+          <a:xfrm>
+            <a:off x="4453128" y="3081528"/>
+            <a:ext cx="256032" cy="256032"/>
+          </a:xfrm>
+          <a:prstGeom prst="rect">
+            <a:avLst/>
+          </a:prstGeom>
+        </p:spPr>
+      </p:pic>
+      <p:sp>
+        <p:nvSpPr>
+          <p:cNvPr id="10" name="Text 6"/>
+          <p:cNvSpPr/>
+          <p:nvPr/>
+        </p:nvSpPr>
+        <p:spPr>
+          <a:xfrm>
+            <a:off x="3520440" y="3566160"/>
+            <a:ext cx="2286000" cy="329184"/>
           </a:xfrm>
           <a:prstGeom prst="rect">
             <a:avLst/>
@@ -5682,57 +4767,74 @@
               <a:buNone/>
             </a:pPr>
             <a:r>
-              <a:rPr lang="en-US" sz="1700" dirty="0">
-                <a:solidFill>
-                  <a:srgbClr val="A5B4FC"/>
-                </a:solidFill>
-                <a:latin typeface="Calibri" pitchFamily="34" charset="0"/>
-                <a:ea typeface="Calibri" pitchFamily="34" charset="-122"/>
-                <a:cs typeface="Calibri" pitchFamily="34" charset="-120"/>
-              </a:rPr>
-              <a:t>Need a ride to campus — or have empty seats to share?</a:t>
-            </a:r>
-            <a:endParaRPr lang="en-US" sz="1700" dirty="0"/>
-          </a:p>
-        </p:txBody>
-      </p:sp>
-      <p:sp>
-        <p:nvSpPr>
-          <p:cNvPr id="6" name="Shape 4"/>
-          <p:cNvSpPr/>
-          <p:nvPr/>
-        </p:nvSpPr>
-        <p:spPr>
-          <a:xfrm>
-            <a:off x="2011680" y="3429000"/>
-            <a:ext cx="1463040" cy="411480"/>
-          </a:xfrm>
-          <a:prstGeom prst="roundRect">
-            <a:avLst>
-              <a:gd name="adj" fmla="val 17778"/>
-            </a:avLst>
-          </a:prstGeom>
-          <a:solidFill>
-            <a:srgbClr val="121224"/>
-          </a:solidFill>
-          <a:ln w="19050">
-            <a:solidFill>
-              <a:srgbClr val="6366F1"/>
-            </a:solidFill>
-            <a:prstDash val="solid"/>
-          </a:ln>
-        </p:spPr>
-      </p:sp>
-      <p:sp>
-        <p:nvSpPr>
-          <p:cNvPr id="7" name="Text 5"/>
-          <p:cNvSpPr/>
-          <p:nvPr/>
-        </p:nvSpPr>
-        <p:spPr>
-          <a:xfrm>
-            <a:off x="2011680" y="3429000"/>
-            <a:ext cx="1463040" cy="411480"/>
+              <a:rPr lang="en-US" sz="1300" b="1" dirty="0">
+                <a:solidFill>
+                  <a:srgbClr val="FFFFFF"/>
+                </a:solidFill>
+                <a:latin typeface="Calibri" pitchFamily="34" charset="0"/>
+                <a:ea typeface="Calibri" pitchFamily="34" charset="-122"/>
+                <a:cs typeface="Calibri" pitchFamily="34" charset="-120"/>
+              </a:rPr>
+              <a:t>Campus-verified riders</a:t>
+            </a:r>
+            <a:endParaRPr lang="en-US" sz="1300" dirty="0"/>
+          </a:p>
+        </p:txBody>
+      </p:sp>
+      <p:sp>
+        <p:nvSpPr>
+          <p:cNvPr id="11" name="Shape 7"/>
+          <p:cNvSpPr/>
+          <p:nvPr/>
+        </p:nvSpPr>
+        <p:spPr>
+          <a:xfrm>
+            <a:off x="6949440" y="2971800"/>
+            <a:ext cx="475488" cy="475488"/>
+          </a:xfrm>
+          <a:prstGeom prst="ellipse">
+            <a:avLst/>
+          </a:prstGeom>
+          <a:solidFill>
+            <a:srgbClr val="1A1A38"/>
+          </a:solidFill>
+          <a:ln/>
+        </p:spPr>
+      </p:sp>
+      <p:pic>
+        <p:nvPicPr>
+          <p:cNvPr id="12" name="Image 2" descr="preencoded.png">    </p:cNvPr>
+          <p:cNvPicPr>
+            <a:picLocks noChangeAspect="1"/>
+          </p:cNvPicPr>
+          <p:nvPr/>
+        </p:nvPicPr>
+        <p:blipFill>
+          <a:blip r:embed="rId3"/>
+          <a:stretch>
+            <a:fillRect/>
+          </a:stretch>
+        </p:blipFill>
+        <p:spPr>
+          <a:xfrm>
+            <a:off x="7059168" y="3081528"/>
+            <a:ext cx="256032" cy="256032"/>
+          </a:xfrm>
+          <a:prstGeom prst="rect">
+            <a:avLst/>
+          </a:prstGeom>
+        </p:spPr>
+      </p:pic>
+      <p:sp>
+        <p:nvSpPr>
+          <p:cNvPr id="13" name="Text 8"/>
+          <p:cNvSpPr/>
+          <p:nvPr/>
+        </p:nvSpPr>
+        <p:spPr>
+          <a:xfrm>
+            <a:off x="6126480" y="3566160"/>
+            <a:ext cx="2286000" cy="329184"/>
           </a:xfrm>
           <a:prstGeom prst="rect">
             <a:avLst/>
@@ -5750,145 +4852,13 @@
             <a:r>
               <a:rPr lang="en-US" sz="1300" b="1" dirty="0">
                 <a:solidFill>
-                  <a:srgbClr val="6366F1"/>
-                </a:solidFill>
-                <a:latin typeface="Calibri" pitchFamily="34" charset="0"/>
-                <a:ea typeface="Calibri" pitchFamily="34" charset="-122"/>
-                <a:cs typeface="Calibri" pitchFamily="34" charset="-120"/>
-              </a:rPr>
-              <a:t>Trusted</a:t>
-            </a:r>
-            <a:endParaRPr lang="en-US" sz="1300" dirty="0"/>
-          </a:p>
-        </p:txBody>
-      </p:sp>
-      <p:sp>
-        <p:nvSpPr>
-          <p:cNvPr id="8" name="Shape 6"/>
-          <p:cNvSpPr/>
-          <p:nvPr/>
-        </p:nvSpPr>
-        <p:spPr>
-          <a:xfrm>
-            <a:off x="3840480" y="3429000"/>
-            <a:ext cx="1463040" cy="411480"/>
-          </a:xfrm>
-          <a:prstGeom prst="roundRect">
-            <a:avLst>
-              <a:gd name="adj" fmla="val 17778"/>
-            </a:avLst>
-          </a:prstGeom>
-          <a:solidFill>
-            <a:srgbClr val="121224"/>
-          </a:solidFill>
-          <a:ln w="19050">
-            <a:solidFill>
-              <a:srgbClr val="10B981"/>
-            </a:solidFill>
-            <a:prstDash val="solid"/>
-          </a:ln>
-        </p:spPr>
-      </p:sp>
-      <p:sp>
-        <p:nvSpPr>
-          <p:cNvPr id="9" name="Text 7"/>
-          <p:cNvSpPr/>
-          <p:nvPr/>
-        </p:nvSpPr>
-        <p:spPr>
-          <a:xfrm>
-            <a:off x="3840480" y="3429000"/>
-            <a:ext cx="1463040" cy="411480"/>
-          </a:xfrm>
-          <a:prstGeom prst="rect">
-            <a:avLst/>
-          </a:prstGeom>
-          <a:noFill/>
-          <a:ln/>
-        </p:spPr>
-        <p:txBody>
-          <a:bodyPr wrap="square" lIns="0" tIns="0" rIns="0" bIns="0" rtlCol="0" anchor="ctr"/>
-          <a:lstStyle/>
-          <a:p>
-            <a:pPr algn="ctr" indent="0" marL="0">
-              <a:buNone/>
-            </a:pPr>
-            <a:r>
-              <a:rPr lang="en-US" sz="1300" b="1" dirty="0">
-                <a:solidFill>
-                  <a:srgbClr val="10B981"/>
-                </a:solidFill>
-                <a:latin typeface="Calibri" pitchFamily="34" charset="0"/>
-                <a:ea typeface="Calibri" pitchFamily="34" charset="-122"/>
-                <a:cs typeface="Calibri" pitchFamily="34" charset="-120"/>
-              </a:rPr>
-              <a:t>Affordable</a:t>
-            </a:r>
-            <a:endParaRPr lang="en-US" sz="1300" dirty="0"/>
-          </a:p>
-        </p:txBody>
-      </p:sp>
-      <p:sp>
-        <p:nvSpPr>
-          <p:cNvPr id="10" name="Shape 8"/>
-          <p:cNvSpPr/>
-          <p:nvPr/>
-        </p:nvSpPr>
-        <p:spPr>
-          <a:xfrm>
-            <a:off x="5669280" y="3429000"/>
-            <a:ext cx="1463040" cy="411480"/>
-          </a:xfrm>
-          <a:prstGeom prst="roundRect">
-            <a:avLst>
-              <a:gd name="adj" fmla="val 17778"/>
-            </a:avLst>
-          </a:prstGeom>
-          <a:solidFill>
-            <a:srgbClr val="121224"/>
-          </a:solidFill>
-          <a:ln w="19050">
-            <a:solidFill>
-              <a:srgbClr val="FBBF24"/>
-            </a:solidFill>
-            <a:prstDash val="solid"/>
-          </a:ln>
-        </p:spPr>
-      </p:sp>
-      <p:sp>
-        <p:nvSpPr>
-          <p:cNvPr id="11" name="Text 9"/>
-          <p:cNvSpPr/>
-          <p:nvPr/>
-        </p:nvSpPr>
-        <p:spPr>
-          <a:xfrm>
-            <a:off x="5669280" y="3429000"/>
-            <a:ext cx="1463040" cy="411480"/>
-          </a:xfrm>
-          <a:prstGeom prst="rect">
-            <a:avLst/>
-          </a:prstGeom>
-          <a:noFill/>
-          <a:ln/>
-        </p:spPr>
-        <p:txBody>
-          <a:bodyPr wrap="square" lIns="0" tIns="0" rIns="0" bIns="0" rtlCol="0" anchor="ctr"/>
-          <a:lstStyle/>
-          <a:p>
-            <a:pPr algn="ctr" indent="0" marL="0">
-              <a:buNone/>
-            </a:pPr>
-            <a:r>
-              <a:rPr lang="en-US" sz="1300" b="1" dirty="0">
-                <a:solidFill>
-                  <a:srgbClr val="FBBF24"/>
-                </a:solidFill>
-                <a:latin typeface="Calibri" pitchFamily="34" charset="0"/>
-                <a:ea typeface="Calibri" pitchFamily="34" charset="-122"/>
-                <a:cs typeface="Calibri" pitchFamily="34" charset="-120"/>
-              </a:rPr>
-              <a:t>Seamless</a:t>
+                  <a:srgbClr val="FFFFFF"/>
+                </a:solidFill>
+                <a:latin typeface="Calibri" pitchFamily="34" charset="0"/>
+                <a:ea typeface="Calibri" pitchFamily="34" charset="-122"/>
+                <a:cs typeface="Calibri" pitchFamily="34" charset="-120"/>
+              </a:rPr>
+              <a:t>Ratings after every ride</a:t>
             </a:r>
             <a:endParaRPr lang="en-US" sz="1300" dirty="0"/>
           </a:p>
@@ -5941,13 +4911,13 @@
             <a:avLst/>
           </a:prstGeom>
           <a:solidFill>
-            <a:srgbClr val="6366F1">
+            <a:srgbClr val="10B981">
               <a:alpha val="8000"/>
             </a:srgbClr>
           </a:solidFill>
           <a:ln w="12700">
             <a:solidFill>
-              <a:srgbClr val="6366F1">
+              <a:srgbClr val="10B981">
                 <a:alpha val="8000"/>
               </a:srgbClr>
             </a:solidFill>
@@ -5988,7 +4958,7 @@
                 <a:ea typeface="Calibri" pitchFamily="34" charset="-122"/>
                 <a:cs typeface="Calibri" pitchFamily="34" charset="-120"/>
               </a:rPr>
-              <a:t>Find a Ride</a:t>
+              <a:t>Offer a Ride</a:t>
             </a:r>
             <a:endParaRPr lang="en-US" sz="5600" dirty="0"/>
           </a:p>
@@ -6021,13 +4991,13 @@
             <a:r>
               <a:rPr lang="en-US" sz="1600" dirty="0">
                 <a:solidFill>
-                  <a:srgbClr val="A5B4FC"/>
-                </a:solidFill>
-                <a:latin typeface="Calibri" pitchFamily="34" charset="0"/>
-                <a:ea typeface="Calibri" pitchFamily="34" charset="-122"/>
-                <a:cs typeface="Calibri" pitchFamily="34" charset="-120"/>
-              </a:rPr>
-              <a:t>Get to campus without the chaos.</a:t>
+                  <a:srgbClr val="10B981"/>
+                </a:solidFill>
+                <a:latin typeface="Calibri" pitchFamily="34" charset="0"/>
+                <a:ea typeface="Calibri" pitchFamily="34" charset="-122"/>
+                <a:cs typeface="Calibri" pitchFamily="34" charset="-120"/>
+              </a:rPr>
+              <a:t>Turn your daily drive into shared value.</a:t>
             </a:r>
             <a:endParaRPr lang="en-US" sz="1600" dirty="0"/>
           </a:p>
@@ -6048,7 +5018,7 @@
             <a:avLst/>
           </a:prstGeom>
           <a:solidFill>
-            <a:srgbClr val="1A1A38"/>
+            <a:srgbClr val="0D2420"/>
           </a:solidFill>
           <a:ln/>
         </p:spPr>
@@ -6110,7 +5080,7 @@
                 <a:ea typeface="Calibri" pitchFamily="34" charset="-122"/>
                 <a:cs typeface="Calibri" pitchFamily="34" charset="-120"/>
               </a:rPr>
-              <a:t>Search by route &amp; time</a:t>
+              <a:t>Set your route &amp; stops</a:t>
             </a:r>
             <a:endParaRPr lang="en-US" sz="1300" dirty="0"/>
           </a:p>
@@ -6131,7 +5101,7 @@
             <a:avLst/>
           </a:prstGeom>
           <a:solidFill>
-            <a:srgbClr val="1A1A38"/>
+            <a:srgbClr val="0D2420"/>
           </a:solidFill>
           <a:ln/>
         </p:spPr>
@@ -6193,7 +5163,7 @@
                 <a:ea typeface="Calibri" pitchFamily="34" charset="-122"/>
                 <a:cs typeface="Calibri" pitchFamily="34" charset="-120"/>
               </a:rPr>
-              <a:t>Campus-verified riders</a:t>
+              <a:t>Split fuel costs fairly</a:t>
             </a:r>
             <a:endParaRPr lang="en-US" sz="1300" dirty="0"/>
           </a:p>
@@ -6214,7 +5184,7 @@
             <a:avLst/>
           </a:prstGeom>
           <a:solidFill>
-            <a:srgbClr val="1A1A38"/>
+            <a:srgbClr val="0D2420"/>
           </a:solidFill>
           <a:ln/>
         </p:spPr>
@@ -6276,7 +5246,7 @@
                 <a:ea typeface="Calibri" pitchFamily="34" charset="-122"/>
                 <a:cs typeface="Calibri" pitchFamily="34" charset="-120"/>
               </a:rPr>
-              <a:t>Ratings after every ride</a:t>
+              <a:t>Approve every rider</a:t>
             </a:r>
             <a:endParaRPr lang="en-US" sz="1300" dirty="0"/>
           </a:p>
@@ -6329,14 +5299,14 @@
             <a:avLst/>
           </a:prstGeom>
           <a:solidFill>
-            <a:srgbClr val="10B981">
-              <a:alpha val="8000"/>
+            <a:srgbClr val="FBBF24">
+              <a:alpha val="7000"/>
             </a:srgbClr>
           </a:solidFill>
           <a:ln w="12700">
             <a:solidFill>
-              <a:srgbClr val="10B981">
-                <a:alpha val="8000"/>
+              <a:srgbClr val="FBBF24">
+                <a:alpha val="7000"/>
               </a:srgbClr>
             </a:solidFill>
             <a:prstDash val="solid"/>
@@ -6376,7 +5346,7 @@
                 <a:ea typeface="Calibri" pitchFamily="34" charset="-122"/>
                 <a:cs typeface="Calibri" pitchFamily="34" charset="-120"/>
               </a:rPr>
-              <a:t>Offer a Ride</a:t>
+              <a:t>More than just a ride.</a:t>
             </a:r>
             <a:endParaRPr lang="en-US" sz="5600" dirty="0"/>
           </a:p>
@@ -6409,13 +5379,13 @@
             <a:r>
               <a:rPr lang="en-US" sz="1600" dirty="0">
                 <a:solidFill>
-                  <a:srgbClr val="10B981"/>
-                </a:solidFill>
-                <a:latin typeface="Calibri" pitchFamily="34" charset="0"/>
-                <a:ea typeface="Calibri" pitchFamily="34" charset="-122"/>
-                <a:cs typeface="Calibri" pitchFamily="34" charset="-120"/>
-              </a:rPr>
-              <a:t>Turn your daily drive into shared value.</a:t>
+                  <a:srgbClr val="9CA3AF"/>
+                </a:solidFill>
+                <a:latin typeface="Calibri" pitchFamily="34" charset="0"/>
+                <a:ea typeface="Calibri" pitchFamily="34" charset="-122"/>
+                <a:cs typeface="Calibri" pitchFamily="34" charset="-120"/>
+              </a:rPr>
+              <a:t>UniRide connects your campus beyond the commute.</a:t>
             </a:r>
             <a:endParaRPr lang="en-US" sz="1600" dirty="0"/>
           </a:p>
@@ -6436,7 +5406,7 @@
             <a:avLst/>
           </a:prstGeom>
           <a:solidFill>
-            <a:srgbClr val="0D2420"/>
+            <a:srgbClr val="1A1600"/>
           </a:solidFill>
           <a:ln/>
         </p:spPr>
@@ -6498,7 +5468,7 @@
                 <a:ea typeface="Calibri" pitchFamily="34" charset="-122"/>
                 <a:cs typeface="Calibri" pitchFamily="34" charset="-120"/>
               </a:rPr>
-              <a:t>Set your route &amp; stops</a:t>
+              <a:t>Campus Community</a:t>
             </a:r>
             <a:endParaRPr lang="en-US" sz="1300" dirty="0"/>
           </a:p>
@@ -6519,7 +5489,7 @@
             <a:avLst/>
           </a:prstGeom>
           <a:solidFill>
-            <a:srgbClr val="0D2420"/>
+            <a:srgbClr val="1A1600"/>
           </a:solidFill>
           <a:ln/>
         </p:spPr>
@@ -6581,7 +5551,7 @@
                 <a:ea typeface="Calibri" pitchFamily="34" charset="-122"/>
                 <a:cs typeface="Calibri" pitchFamily="34" charset="-120"/>
               </a:rPr>
-              <a:t>Split fuel costs fairly</a:t>
+              <a:t>Ride History &amp; Ratings</a:t>
             </a:r>
             <a:endParaRPr lang="en-US" sz="1300" dirty="0"/>
           </a:p>
@@ -6602,7 +5572,7 @@
             <a:avLst/>
           </a:prstGeom>
           <a:solidFill>
-            <a:srgbClr val="0D2420"/>
+            <a:srgbClr val="1A1600"/>
           </a:solidFill>
           <a:ln/>
         </p:spPr>
@@ -6664,7 +5634,7 @@
                 <a:ea typeface="Calibri" pitchFamily="34" charset="-122"/>
                 <a:cs typeface="Calibri" pitchFamily="34" charset="-120"/>
               </a:rPr>
-              <a:t>Approve every rider</a:t>
+              <a:t>Events &amp; Announcements</a:t>
             </a:r>
             <a:endParaRPr lang="en-US" sz="1300" dirty="0"/>
           </a:p>
